--- a/Doc/CCC-Proposal-status-2026.pptx
+++ b/Doc/CCC-Proposal-status-2026.pptx
@@ -6,19 +6,20 @@
   </p:sldMasterIdLst>
   <p:sldIdLst>
     <p:sldId id="256" r:id="rId5"/>
-    <p:sldId id="261" r:id="rId6"/>
-    <p:sldId id="262" r:id="rId7"/>
-    <p:sldId id="280" r:id="rId8"/>
-    <p:sldId id="281" r:id="rId9"/>
-    <p:sldId id="265" r:id="rId10"/>
-    <p:sldId id="267" r:id="rId11"/>
-    <p:sldId id="279" r:id="rId12"/>
-    <p:sldId id="266" r:id="rId13"/>
-    <p:sldId id="268" r:id="rId14"/>
-    <p:sldId id="269" r:id="rId15"/>
-    <p:sldId id="275" r:id="rId16"/>
-    <p:sldId id="276" r:id="rId17"/>
-    <p:sldId id="264" r:id="rId18"/>
+    <p:sldId id="282" r:id="rId6"/>
+    <p:sldId id="261" r:id="rId7"/>
+    <p:sldId id="262" r:id="rId8"/>
+    <p:sldId id="280" r:id="rId9"/>
+    <p:sldId id="281" r:id="rId10"/>
+    <p:sldId id="265" r:id="rId11"/>
+    <p:sldId id="267" r:id="rId12"/>
+    <p:sldId id="279" r:id="rId13"/>
+    <p:sldId id="266" r:id="rId14"/>
+    <p:sldId id="268" r:id="rId15"/>
+    <p:sldId id="269" r:id="rId16"/>
+    <p:sldId id="275" r:id="rId17"/>
+    <p:sldId id="276" r:id="rId18"/>
+    <p:sldId id="264" r:id="rId19"/>
   </p:sldIdLst>
   <p:sldSz cx="12192000" cy="6858000"/>
   <p:notesSz cx="6858000" cy="9144000"/>
@@ -336,7 +337,7 @@
           <a:p>
             <a:fld id="{D11DF394-111B-DC42-A2EF-5BAC25F95CBA}" type="datetimeFigureOut">
               <a:rPr lang="en-US" smtClean="0"/>
-              <a:t>8/3/26</a:t>
+              <a:t>8/19/26</a:t>
             </a:fld>
             <a:endParaRPr lang="en-US"/>
           </a:p>
@@ -534,7 +535,7 @@
           <a:p>
             <a:fld id="{D11DF394-111B-DC42-A2EF-5BAC25F95CBA}" type="datetimeFigureOut">
               <a:rPr lang="en-US" smtClean="0"/>
-              <a:t>8/3/26</a:t>
+              <a:t>8/19/26</a:t>
             </a:fld>
             <a:endParaRPr lang="en-US"/>
           </a:p>
@@ -742,7 +743,7 @@
           <a:p>
             <a:fld id="{D11DF394-111B-DC42-A2EF-5BAC25F95CBA}" type="datetimeFigureOut">
               <a:rPr lang="en-US" smtClean="0"/>
-              <a:t>8/3/26</a:t>
+              <a:t>8/19/26</a:t>
             </a:fld>
             <a:endParaRPr lang="en-US"/>
           </a:p>
@@ -2291,7 +2292,7 @@
           <a:p>
             <a:fld id="{D11DF394-111B-DC42-A2EF-5BAC25F95CBA}" type="datetimeFigureOut">
               <a:rPr lang="en-US" smtClean="0"/>
-              <a:t>8/3/26</a:t>
+              <a:t>8/19/26</a:t>
             </a:fld>
             <a:endParaRPr lang="en-US"/>
           </a:p>
@@ -2602,7 +2603,7 @@
           <a:p>
             <a:fld id="{D11DF394-111B-DC42-A2EF-5BAC25F95CBA}" type="datetimeFigureOut">
               <a:rPr lang="en-US" smtClean="0"/>
-              <a:t>8/3/26</a:t>
+              <a:t>8/19/26</a:t>
             </a:fld>
             <a:endParaRPr lang="en-US"/>
           </a:p>
@@ -2890,7 +2891,7 @@
           <a:p>
             <a:fld id="{D11DF394-111B-DC42-A2EF-5BAC25F95CBA}" type="datetimeFigureOut">
               <a:rPr lang="en-US" smtClean="0"/>
-              <a:t>8/3/26</a:t>
+              <a:t>8/19/26</a:t>
             </a:fld>
             <a:endParaRPr lang="en-US"/>
           </a:p>
@@ -3131,7 +3132,7 @@
           <a:p>
             <a:fld id="{D11DF394-111B-DC42-A2EF-5BAC25F95CBA}" type="datetimeFigureOut">
               <a:rPr lang="en-US" smtClean="0"/>
-              <a:t>8/3/26</a:t>
+              <a:t>8/19/26</a:t>
             </a:fld>
             <a:endParaRPr lang="en-US"/>
           </a:p>
@@ -3665,6 +3666,1896 @@
       </p:grpSpPr>
       <p:sp>
         <p:nvSpPr>
+          <p:cNvPr id="12" name="Rectangle 11">
+            <a:extLst>
+              <a:ext uri="{FF2B5EF4-FFF2-40B4-BE49-F238E27FC236}">
+                <a16:creationId xmlns:a16="http://schemas.microsoft.com/office/drawing/2014/main" id="{FACE02C8-3CAD-5ADB-A492-5FD5F36F243F}"/>
+              </a:ext>
+            </a:extLst>
+          </p:cNvPr>
+          <p:cNvSpPr/>
+          <p:nvPr/>
+        </p:nvSpPr>
+        <p:spPr>
+          <a:xfrm>
+            <a:off x="6912024" y="3831053"/>
+            <a:ext cx="3249097" cy="2481660"/>
+          </a:xfrm>
+          <a:prstGeom prst="rect">
+            <a:avLst/>
+          </a:prstGeom>
+          <a:solidFill>
+            <a:srgbClr val="FFFFFF"/>
+          </a:solidFill>
+          <a:ln w="19050" cap="flat" cmpd="sng" algn="ctr">
+            <a:solidFill>
+              <a:srgbClr val="000000"/>
+            </a:solidFill>
+            <a:prstDash val="solid"/>
+            <a:headEnd type="none" w="med" len="med"/>
+            <a:tailEnd type="none" w="med" len="med"/>
+          </a:ln>
+          <a:effectLst/>
+        </p:spPr>
+        <p:txBody>
+          <a:bodyPr rot="0" spcFirstLastPara="0" vertOverflow="overflow" horzOverflow="overflow" vert="horz" wrap="square" lIns="91440" tIns="45720" rIns="91440" bIns="45720" numCol="1" spcCol="0" rtlCol="0" fromWordArt="0" anchor="ctr" anchorCtr="0" forceAA="0" compatLnSpc="1">
+            <a:prstTxWarp prst="textNoShape">
+              <a:avLst/>
+            </a:prstTxWarp>
+            <a:noAutofit/>
+          </a:bodyPr>
+          <a:lstStyle/>
+          <a:p>
+            <a:pPr marL="0" marR="0" lvl="0" indent="0" defTabSz="914400" eaLnBrk="1" fontAlgn="auto" latinLnBrk="0" hangingPunct="1">
+              <a:lnSpc>
+                <a:spcPct val="100000"/>
+              </a:lnSpc>
+              <a:spcBef>
+                <a:spcPts val="300"/>
+              </a:spcBef>
+              <a:spcAft>
+                <a:spcPts val="0"/>
+              </a:spcAft>
+              <a:buClr>
+                <a:srgbClr val="000000"/>
+              </a:buClr>
+              <a:buSzTx/>
+              <a:buFont typeface="Arial"/>
+              <a:buNone/>
+              <a:tabLst/>
+              <a:defRPr/>
+            </a:pPr>
+            <a:r>
+              <a:rPr kumimoji="0" lang="en-US" sz="1600" b="1" i="0" u="none" strike="noStrike" kern="0" cap="none" spc="0" normalizeH="0" baseline="0" noProof="0" dirty="0">
+                <a:ln>
+                  <a:noFill/>
+                </a:ln>
+                <a:solidFill>
+                  <a:srgbClr val="535353"/>
+                </a:solidFill>
+                <a:effectLst/>
+                <a:uLnTx/>
+                <a:uFillTx/>
+                <a:latin typeface="Arial"/>
+                <a:ea typeface="+mn-ea"/>
+                <a:cs typeface="Calibri" panose="020F0502020204030204" pitchFamily="34" charset="0"/>
+                <a:sym typeface="Arial"/>
+              </a:rPr>
+              <a:t>Works on all CC platforms:</a:t>
+            </a:r>
+          </a:p>
+          <a:p>
+            <a:pPr marL="285750" marR="0" lvl="0" indent="-285750" defTabSz="914400" eaLnBrk="1" fontAlgn="auto" latinLnBrk="0" hangingPunct="1">
+              <a:lnSpc>
+                <a:spcPct val="100000"/>
+              </a:lnSpc>
+              <a:spcBef>
+                <a:spcPts val="300"/>
+              </a:spcBef>
+              <a:spcAft>
+                <a:spcPts val="0"/>
+              </a:spcAft>
+              <a:buClr>
+                <a:srgbClr val="000000"/>
+              </a:buClr>
+              <a:buSzTx/>
+              <a:buFont typeface="Arial" panose="020B0604020202020204" pitchFamily="34" charset="0"/>
+              <a:buChar char="•"/>
+              <a:tabLst/>
+              <a:defRPr/>
+            </a:pPr>
+            <a:r>
+              <a:rPr kumimoji="0" lang="en-US" sz="1600" b="0" i="0" u="none" strike="noStrike" kern="0" cap="none" spc="0" normalizeH="0" baseline="0" noProof="0" dirty="0">
+                <a:ln>
+                  <a:noFill/>
+                </a:ln>
+                <a:solidFill>
+                  <a:srgbClr val="535353"/>
+                </a:solidFill>
+                <a:effectLst/>
+                <a:uLnTx/>
+                <a:uFillTx/>
+                <a:latin typeface="Arial"/>
+                <a:ea typeface="+mn-ea"/>
+                <a:cs typeface="Calibri" panose="020F0502020204030204" pitchFamily="34" charset="0"/>
+                <a:sym typeface="Arial"/>
+              </a:rPr>
+              <a:t>Simulated enclave</a:t>
+            </a:r>
+          </a:p>
+          <a:p>
+            <a:pPr marL="285750" marR="0" lvl="0" indent="-285750" defTabSz="914400" eaLnBrk="1" fontAlgn="auto" latinLnBrk="0" hangingPunct="1">
+              <a:lnSpc>
+                <a:spcPct val="100000"/>
+              </a:lnSpc>
+              <a:spcBef>
+                <a:spcPts val="300"/>
+              </a:spcBef>
+              <a:spcAft>
+                <a:spcPts val="0"/>
+              </a:spcAft>
+              <a:buClr>
+                <a:srgbClr val="000000"/>
+              </a:buClr>
+              <a:buSzTx/>
+              <a:buFont typeface="Arial" panose="020B0604020202020204" pitchFamily="34" charset="0"/>
+              <a:buChar char="•"/>
+              <a:tabLst/>
+              <a:defRPr/>
+            </a:pPr>
+            <a:r>
+              <a:rPr kumimoji="0" lang="en-US" sz="1600" b="0" i="0" u="none" strike="noStrike" kern="0" cap="none" spc="0" normalizeH="0" baseline="0" noProof="0" dirty="0">
+                <a:ln>
+                  <a:noFill/>
+                </a:ln>
+                <a:solidFill>
+                  <a:srgbClr val="535353"/>
+                </a:solidFill>
+                <a:effectLst/>
+                <a:uLnTx/>
+                <a:uFillTx/>
+                <a:latin typeface="Arial"/>
+                <a:ea typeface="+mn-ea"/>
+                <a:cs typeface="Calibri" panose="020F0502020204030204" pitchFamily="34" charset="0"/>
+                <a:sym typeface="Arial"/>
+              </a:rPr>
+              <a:t>AMD SEV-SNP</a:t>
+            </a:r>
+          </a:p>
+          <a:p>
+            <a:pPr marL="285750" marR="0" lvl="0" indent="-285750" defTabSz="914400" eaLnBrk="1" fontAlgn="auto" latinLnBrk="0" hangingPunct="1">
+              <a:lnSpc>
+                <a:spcPct val="100000"/>
+              </a:lnSpc>
+              <a:spcBef>
+                <a:spcPts val="300"/>
+              </a:spcBef>
+              <a:spcAft>
+                <a:spcPts val="0"/>
+              </a:spcAft>
+              <a:buClr>
+                <a:srgbClr val="000000"/>
+              </a:buClr>
+              <a:buSzTx/>
+              <a:buFont typeface="Arial" panose="020B0604020202020204" pitchFamily="34" charset="0"/>
+              <a:buChar char="•"/>
+              <a:tabLst/>
+              <a:defRPr/>
+            </a:pPr>
+            <a:r>
+              <a:rPr kumimoji="0" lang="en-US" sz="1600" b="0" i="0" u="none" strike="noStrike" kern="0" cap="none" spc="0" normalizeH="0" baseline="0" noProof="0" dirty="0">
+                <a:ln>
+                  <a:noFill/>
+                </a:ln>
+                <a:solidFill>
+                  <a:srgbClr val="535353"/>
+                </a:solidFill>
+                <a:effectLst/>
+                <a:uLnTx/>
+                <a:uFillTx/>
+                <a:latin typeface="Arial"/>
+                <a:ea typeface="+mn-ea"/>
+                <a:cs typeface="Calibri" panose="020F0502020204030204" pitchFamily="34" charset="0"/>
+                <a:sym typeface="Arial"/>
+              </a:rPr>
+              <a:t>Intel SGX (Gramine and OE)</a:t>
+            </a:r>
+          </a:p>
+          <a:p>
+            <a:pPr marL="285750" marR="0" lvl="0" indent="-285750" defTabSz="914400" eaLnBrk="1" fontAlgn="auto" latinLnBrk="0" hangingPunct="1">
+              <a:lnSpc>
+                <a:spcPct val="100000"/>
+              </a:lnSpc>
+              <a:spcBef>
+                <a:spcPts val="300"/>
+              </a:spcBef>
+              <a:spcAft>
+                <a:spcPts val="0"/>
+              </a:spcAft>
+              <a:buClr>
+                <a:srgbClr val="000000"/>
+              </a:buClr>
+              <a:buSzTx/>
+              <a:buFont typeface="Arial" panose="020B0604020202020204" pitchFamily="34" charset="0"/>
+              <a:buChar char="•"/>
+              <a:tabLst/>
+              <a:defRPr/>
+            </a:pPr>
+            <a:r>
+              <a:rPr kumimoji="0" lang="en-US" sz="1600" b="0" i="0" u="none" strike="noStrike" kern="0" cap="none" spc="0" normalizeH="0" baseline="0" noProof="0" dirty="0">
+                <a:ln>
+                  <a:noFill/>
+                </a:ln>
+                <a:solidFill>
+                  <a:srgbClr val="535353"/>
+                </a:solidFill>
+                <a:effectLst/>
+                <a:uLnTx/>
+                <a:uFillTx/>
+                <a:latin typeface="Arial"/>
+                <a:ea typeface="+mn-ea"/>
+                <a:cs typeface="Calibri" panose="020F0502020204030204" pitchFamily="34" charset="0"/>
+                <a:sym typeface="Arial"/>
+              </a:rPr>
+              <a:t>Arm CCA (Samsung Islet)</a:t>
+            </a:r>
+          </a:p>
+          <a:p>
+            <a:pPr marL="285750" marR="0" lvl="0" indent="-285750" defTabSz="914400" eaLnBrk="1" fontAlgn="auto" latinLnBrk="0" hangingPunct="1">
+              <a:lnSpc>
+                <a:spcPct val="100000"/>
+              </a:lnSpc>
+              <a:spcBef>
+                <a:spcPts val="300"/>
+              </a:spcBef>
+              <a:spcAft>
+                <a:spcPts val="0"/>
+              </a:spcAft>
+              <a:buClr>
+                <a:srgbClr val="000000"/>
+              </a:buClr>
+              <a:buSzTx/>
+              <a:buFont typeface="Arial" panose="020B0604020202020204" pitchFamily="34" charset="0"/>
+              <a:buChar char="•"/>
+              <a:tabLst/>
+              <a:defRPr/>
+            </a:pPr>
+            <a:r>
+              <a:rPr kumimoji="0" lang="en-US" sz="1600" b="0" i="0" u="none" strike="noStrike" kern="0" cap="none" spc="0" normalizeH="0" baseline="0" noProof="0" dirty="0">
+                <a:ln>
+                  <a:noFill/>
+                </a:ln>
+                <a:solidFill>
+                  <a:srgbClr val="535353"/>
+                </a:solidFill>
+                <a:effectLst/>
+                <a:uLnTx/>
+                <a:uFillTx/>
+                <a:latin typeface="Arial"/>
+                <a:ea typeface="+mn-ea"/>
+                <a:cs typeface="Calibri" panose="020F0502020204030204" pitchFamily="34" charset="0"/>
+                <a:sym typeface="Arial"/>
+              </a:rPr>
+              <a:t>RISC-V Keystone</a:t>
+            </a:r>
+          </a:p>
+          <a:p>
+            <a:pPr marL="285750" marR="0" lvl="0" indent="-285750" defTabSz="914400" eaLnBrk="1" fontAlgn="auto" latinLnBrk="0" hangingPunct="1">
+              <a:lnSpc>
+                <a:spcPct val="100000"/>
+              </a:lnSpc>
+              <a:spcBef>
+                <a:spcPts val="300"/>
+              </a:spcBef>
+              <a:spcAft>
+                <a:spcPts val="0"/>
+              </a:spcAft>
+              <a:buClr>
+                <a:srgbClr val="000000"/>
+              </a:buClr>
+              <a:buSzTx/>
+              <a:buFont typeface="Arial" panose="020B0604020202020204" pitchFamily="34" charset="0"/>
+              <a:buChar char="•"/>
+              <a:tabLst/>
+              <a:defRPr/>
+            </a:pPr>
+            <a:r>
+              <a:rPr kumimoji="0" lang="en-US" sz="1600" b="0" i="0" u="none" strike="noStrike" kern="0" cap="none" spc="0" normalizeH="0" baseline="0" noProof="0" dirty="0">
+                <a:ln>
+                  <a:noFill/>
+                </a:ln>
+                <a:solidFill>
+                  <a:srgbClr val="535353"/>
+                </a:solidFill>
+                <a:effectLst/>
+                <a:uLnTx/>
+                <a:uFillTx/>
+                <a:latin typeface="Arial"/>
+                <a:ea typeface="+mn-ea"/>
+                <a:cs typeface="Calibri" panose="020F0502020204030204" pitchFamily="34" charset="0"/>
+                <a:sym typeface="Arial"/>
+              </a:rPr>
+              <a:t>TPM</a:t>
+            </a:r>
+          </a:p>
+          <a:p>
+            <a:pPr marL="285750" marR="0" lvl="0" indent="-285750" defTabSz="914400" eaLnBrk="1" fontAlgn="auto" latinLnBrk="0" hangingPunct="1">
+              <a:lnSpc>
+                <a:spcPct val="100000"/>
+              </a:lnSpc>
+              <a:spcBef>
+                <a:spcPts val="300"/>
+              </a:spcBef>
+              <a:spcAft>
+                <a:spcPts val="0"/>
+              </a:spcAft>
+              <a:buClr>
+                <a:srgbClr val="000000"/>
+              </a:buClr>
+              <a:buSzTx/>
+              <a:buFont typeface="Arial" panose="020B0604020202020204" pitchFamily="34" charset="0"/>
+              <a:buChar char="•"/>
+              <a:tabLst/>
+              <a:defRPr/>
+            </a:pPr>
+            <a:r>
+              <a:rPr kumimoji="0" lang="en-US" sz="1600" b="1" i="0" u="none" strike="noStrike" kern="0" cap="none" spc="0" normalizeH="0" baseline="0" noProof="0" dirty="0">
+                <a:ln>
+                  <a:noFill/>
+                </a:ln>
+                <a:solidFill>
+                  <a:srgbClr val="535353"/>
+                </a:solidFill>
+                <a:effectLst/>
+                <a:uLnTx/>
+                <a:uFillTx/>
+                <a:latin typeface="Arial"/>
+                <a:ea typeface="+mn-ea"/>
+                <a:cs typeface="Calibri" panose="020F0502020204030204" pitchFamily="34" charset="0"/>
+                <a:sym typeface="Arial"/>
+              </a:rPr>
+              <a:t>Application enclave service</a:t>
+            </a:r>
+          </a:p>
+        </p:txBody>
+      </p:sp>
+      <p:sp>
+        <p:nvSpPr>
+          <p:cNvPr id="13" name="Title 1">
+            <a:extLst>
+              <a:ext uri="{FF2B5EF4-FFF2-40B4-BE49-F238E27FC236}">
+                <a16:creationId xmlns:a16="http://schemas.microsoft.com/office/drawing/2014/main" id="{B9916862-CC8D-D00A-ADAA-CE15F575CE8B}"/>
+              </a:ext>
+            </a:extLst>
+          </p:cNvPr>
+          <p:cNvSpPr txBox="1">
+            <a:spLocks/>
+          </p:cNvSpPr>
+          <p:nvPr/>
+        </p:nvSpPr>
+        <p:spPr>
+          <a:xfrm>
+            <a:off x="511333" y="267178"/>
+            <a:ext cx="11169333" cy="793751"/>
+          </a:xfrm>
+          <a:prstGeom prst="rect">
+            <a:avLst/>
+          </a:prstGeom>
+        </p:spPr>
+        <p:txBody>
+          <a:bodyPr/>
+          <a:lstStyle>
+            <a:defPPr marR="0" lvl="0" algn="l" rtl="0">
+              <a:lnSpc>
+                <a:spcPct val="100000"/>
+              </a:lnSpc>
+              <a:spcBef>
+                <a:spcPts val="0"/>
+              </a:spcBef>
+              <a:spcAft>
+                <a:spcPts val="0"/>
+              </a:spcAft>
+            </a:defPPr>
+            <a:lvl1pPr marR="0" lvl="0" algn="l" rtl="0">
+              <a:lnSpc>
+                <a:spcPct val="100000"/>
+              </a:lnSpc>
+              <a:spcBef>
+                <a:spcPts val="0"/>
+              </a:spcBef>
+              <a:spcAft>
+                <a:spcPts val="0"/>
+              </a:spcAft>
+              <a:buClr>
+                <a:srgbClr val="000000"/>
+              </a:buClr>
+              <a:buFont typeface="Arial"/>
+              <a:defRPr sz="1400" b="0" i="0" u="none" strike="noStrike" cap="none">
+                <a:solidFill>
+                  <a:srgbClr val="000000"/>
+                </a:solidFill>
+                <a:latin typeface="Arial"/>
+                <a:ea typeface="Arial"/>
+                <a:cs typeface="Arial"/>
+                <a:sym typeface="Arial"/>
+              </a:defRPr>
+            </a:lvl1pPr>
+            <a:lvl2pPr marR="0" lvl="1" algn="l" rtl="0">
+              <a:lnSpc>
+                <a:spcPct val="100000"/>
+              </a:lnSpc>
+              <a:spcBef>
+                <a:spcPts val="0"/>
+              </a:spcBef>
+              <a:spcAft>
+                <a:spcPts val="0"/>
+              </a:spcAft>
+              <a:buClr>
+                <a:srgbClr val="000000"/>
+              </a:buClr>
+              <a:buFont typeface="Arial"/>
+              <a:defRPr sz="1400" b="0" i="0" u="none" strike="noStrike" cap="none">
+                <a:solidFill>
+                  <a:srgbClr val="000000"/>
+                </a:solidFill>
+                <a:latin typeface="Arial"/>
+                <a:ea typeface="Arial"/>
+                <a:cs typeface="Arial"/>
+                <a:sym typeface="Arial"/>
+              </a:defRPr>
+            </a:lvl2pPr>
+            <a:lvl3pPr marR="0" lvl="2" algn="l" rtl="0">
+              <a:lnSpc>
+                <a:spcPct val="100000"/>
+              </a:lnSpc>
+              <a:spcBef>
+                <a:spcPts val="0"/>
+              </a:spcBef>
+              <a:spcAft>
+                <a:spcPts val="0"/>
+              </a:spcAft>
+              <a:buClr>
+                <a:srgbClr val="000000"/>
+              </a:buClr>
+              <a:buFont typeface="Arial"/>
+              <a:defRPr sz="1400" b="0" i="0" u="none" strike="noStrike" cap="none">
+                <a:solidFill>
+                  <a:srgbClr val="000000"/>
+                </a:solidFill>
+                <a:latin typeface="Arial"/>
+                <a:ea typeface="Arial"/>
+                <a:cs typeface="Arial"/>
+                <a:sym typeface="Arial"/>
+              </a:defRPr>
+            </a:lvl3pPr>
+            <a:lvl4pPr marR="0" lvl="3" algn="l" rtl="0">
+              <a:lnSpc>
+                <a:spcPct val="100000"/>
+              </a:lnSpc>
+              <a:spcBef>
+                <a:spcPts val="0"/>
+              </a:spcBef>
+              <a:spcAft>
+                <a:spcPts val="0"/>
+              </a:spcAft>
+              <a:buClr>
+                <a:srgbClr val="000000"/>
+              </a:buClr>
+              <a:buFont typeface="Arial"/>
+              <a:defRPr sz="1400" b="0" i="0" u="none" strike="noStrike" cap="none">
+                <a:solidFill>
+                  <a:srgbClr val="000000"/>
+                </a:solidFill>
+                <a:latin typeface="Arial"/>
+                <a:ea typeface="Arial"/>
+                <a:cs typeface="Arial"/>
+                <a:sym typeface="Arial"/>
+              </a:defRPr>
+            </a:lvl4pPr>
+            <a:lvl5pPr marR="0" lvl="4" algn="l" rtl="0">
+              <a:lnSpc>
+                <a:spcPct val="100000"/>
+              </a:lnSpc>
+              <a:spcBef>
+                <a:spcPts val="0"/>
+              </a:spcBef>
+              <a:spcAft>
+                <a:spcPts val="0"/>
+              </a:spcAft>
+              <a:buClr>
+                <a:srgbClr val="000000"/>
+              </a:buClr>
+              <a:buFont typeface="Arial"/>
+              <a:defRPr sz="1400" b="0" i="0" u="none" strike="noStrike" cap="none">
+                <a:solidFill>
+                  <a:srgbClr val="000000"/>
+                </a:solidFill>
+                <a:latin typeface="Arial"/>
+                <a:ea typeface="Arial"/>
+                <a:cs typeface="Arial"/>
+                <a:sym typeface="Arial"/>
+              </a:defRPr>
+            </a:lvl5pPr>
+            <a:lvl6pPr marR="0" lvl="5" algn="l" rtl="0">
+              <a:lnSpc>
+                <a:spcPct val="100000"/>
+              </a:lnSpc>
+              <a:spcBef>
+                <a:spcPts val="0"/>
+              </a:spcBef>
+              <a:spcAft>
+                <a:spcPts val="0"/>
+              </a:spcAft>
+              <a:buClr>
+                <a:srgbClr val="000000"/>
+              </a:buClr>
+              <a:buFont typeface="Arial"/>
+              <a:defRPr sz="1400" b="0" i="0" u="none" strike="noStrike" cap="none">
+                <a:solidFill>
+                  <a:srgbClr val="000000"/>
+                </a:solidFill>
+                <a:latin typeface="Arial"/>
+                <a:ea typeface="Arial"/>
+                <a:cs typeface="Arial"/>
+                <a:sym typeface="Arial"/>
+              </a:defRPr>
+            </a:lvl6pPr>
+            <a:lvl7pPr marR="0" lvl="6" algn="l" rtl="0">
+              <a:lnSpc>
+                <a:spcPct val="100000"/>
+              </a:lnSpc>
+              <a:spcBef>
+                <a:spcPts val="0"/>
+              </a:spcBef>
+              <a:spcAft>
+                <a:spcPts val="0"/>
+              </a:spcAft>
+              <a:buClr>
+                <a:srgbClr val="000000"/>
+              </a:buClr>
+              <a:buFont typeface="Arial"/>
+              <a:defRPr sz="1400" b="0" i="0" u="none" strike="noStrike" cap="none">
+                <a:solidFill>
+                  <a:srgbClr val="000000"/>
+                </a:solidFill>
+                <a:latin typeface="Arial"/>
+                <a:ea typeface="Arial"/>
+                <a:cs typeface="Arial"/>
+                <a:sym typeface="Arial"/>
+              </a:defRPr>
+            </a:lvl7pPr>
+            <a:lvl8pPr marR="0" lvl="7" algn="l" rtl="0">
+              <a:lnSpc>
+                <a:spcPct val="100000"/>
+              </a:lnSpc>
+              <a:spcBef>
+                <a:spcPts val="0"/>
+              </a:spcBef>
+              <a:spcAft>
+                <a:spcPts val="0"/>
+              </a:spcAft>
+              <a:buClr>
+                <a:srgbClr val="000000"/>
+              </a:buClr>
+              <a:buFont typeface="Arial"/>
+              <a:defRPr sz="1400" b="0" i="0" u="none" strike="noStrike" cap="none">
+                <a:solidFill>
+                  <a:srgbClr val="000000"/>
+                </a:solidFill>
+                <a:latin typeface="Arial"/>
+                <a:ea typeface="Arial"/>
+                <a:cs typeface="Arial"/>
+                <a:sym typeface="Arial"/>
+              </a:defRPr>
+            </a:lvl8pPr>
+            <a:lvl9pPr marR="0" lvl="8" algn="l" rtl="0">
+              <a:lnSpc>
+                <a:spcPct val="100000"/>
+              </a:lnSpc>
+              <a:spcBef>
+                <a:spcPts val="0"/>
+              </a:spcBef>
+              <a:spcAft>
+                <a:spcPts val="0"/>
+              </a:spcAft>
+              <a:buClr>
+                <a:srgbClr val="000000"/>
+              </a:buClr>
+              <a:buFont typeface="Arial"/>
+              <a:defRPr sz="1400" b="0" i="0" u="none" strike="noStrike" cap="none">
+                <a:solidFill>
+                  <a:srgbClr val="000000"/>
+                </a:solidFill>
+                <a:latin typeface="Arial"/>
+                <a:ea typeface="Arial"/>
+                <a:cs typeface="Arial"/>
+                <a:sym typeface="Arial"/>
+              </a:defRPr>
+            </a:lvl9pPr>
+          </a:lstStyle>
+          <a:p>
+            <a:pPr marL="0" marR="0" lvl="0" indent="0" algn="l" defTabSz="914400" rtl="0" eaLnBrk="1" fontAlgn="auto" latinLnBrk="0" hangingPunct="1">
+              <a:lnSpc>
+                <a:spcPct val="100000"/>
+              </a:lnSpc>
+              <a:spcBef>
+                <a:spcPts val="0"/>
+              </a:spcBef>
+              <a:spcAft>
+                <a:spcPts val="0"/>
+              </a:spcAft>
+              <a:buClr>
+                <a:srgbClr val="000000"/>
+              </a:buClr>
+              <a:buSzTx/>
+              <a:buFont typeface="Arial"/>
+              <a:buNone/>
+              <a:tabLst/>
+              <a:defRPr/>
+            </a:pPr>
+            <a:r>
+              <a:rPr kumimoji="0" lang="en-US" sz="3200" b="1" i="0" u="none" strike="noStrike" kern="0" cap="none" spc="0" normalizeH="0" baseline="0" noProof="0">
+                <a:ln>
+                  <a:noFill/>
+                </a:ln>
+                <a:solidFill>
+                  <a:srgbClr val="000000"/>
+                </a:solidFill>
+                <a:effectLst/>
+                <a:uLnTx/>
+                <a:uFillTx/>
+                <a:latin typeface="Arial"/>
+                <a:cs typeface="Arial"/>
+                <a:sym typeface="Arial"/>
+              </a:rPr>
+              <a:t>Certifier: “Simple Example” App</a:t>
+            </a:r>
+          </a:p>
+        </p:txBody>
+      </p:sp>
+      <p:sp>
+        <p:nvSpPr>
+          <p:cNvPr id="14" name="Content Placeholder 7">
+            <a:extLst>
+              <a:ext uri="{FF2B5EF4-FFF2-40B4-BE49-F238E27FC236}">
+                <a16:creationId xmlns:a16="http://schemas.microsoft.com/office/drawing/2014/main" id="{1831A8AD-0FD9-EA12-EA7C-A6CAF957C40F}"/>
+              </a:ext>
+            </a:extLst>
+          </p:cNvPr>
+          <p:cNvSpPr txBox="1">
+            <a:spLocks/>
+          </p:cNvSpPr>
+          <p:nvPr/>
+        </p:nvSpPr>
+        <p:spPr>
+          <a:xfrm>
+            <a:off x="842158" y="1118136"/>
+            <a:ext cx="8552969" cy="1178640"/>
+          </a:xfrm>
+          <a:prstGeom prst="rect">
+            <a:avLst/>
+          </a:prstGeom>
+          <a:solidFill>
+            <a:srgbClr val="70AD47">
+              <a:lumMod val="20000"/>
+              <a:lumOff val="80000"/>
+            </a:srgbClr>
+          </a:solidFill>
+          <a:ln>
+            <a:solidFill>
+              <a:srgbClr val="000000"/>
+            </a:solidFill>
+          </a:ln>
+        </p:spPr>
+        <p:txBody>
+          <a:bodyPr spcFirstLastPara="1" wrap="square" lIns="45700" tIns="45700" rIns="45700" bIns="45700" anchor="t" anchorCtr="0">
+            <a:noAutofit/>
+          </a:bodyPr>
+          <a:lstStyle>
+            <a:defPPr marR="0" lvl="0" algn="l" rtl="0">
+              <a:lnSpc>
+                <a:spcPct val="100000"/>
+              </a:lnSpc>
+              <a:spcBef>
+                <a:spcPts val="0"/>
+              </a:spcBef>
+              <a:spcAft>
+                <a:spcPts val="0"/>
+              </a:spcAft>
+            </a:defPPr>
+            <a:lvl1pPr marL="457200" marR="0" lvl="0" indent="-228600" algn="l" rtl="0">
+              <a:lnSpc>
+                <a:spcPct val="90000"/>
+              </a:lnSpc>
+              <a:spcBef>
+                <a:spcPts val="1200"/>
+              </a:spcBef>
+              <a:spcAft>
+                <a:spcPts val="0"/>
+              </a:spcAft>
+              <a:buClr>
+                <a:schemeClr val="lt2"/>
+              </a:buClr>
+              <a:buSzPts val="2800"/>
+              <a:buFont typeface="Arial"/>
+              <a:buNone/>
+              <a:defRPr sz="2800" b="0" i="0" u="none" strike="noStrike" cap="none">
+                <a:solidFill>
+                  <a:schemeClr val="lt2"/>
+                </a:solidFill>
+                <a:latin typeface="Arial"/>
+                <a:ea typeface="Arial"/>
+                <a:cs typeface="Arial"/>
+                <a:sym typeface="Arial"/>
+              </a:defRPr>
+            </a:lvl1pPr>
+            <a:lvl2pPr marL="914400" marR="0" lvl="1" indent="-228600" algn="l" rtl="0">
+              <a:lnSpc>
+                <a:spcPct val="90000"/>
+              </a:lnSpc>
+              <a:spcBef>
+                <a:spcPts val="1200"/>
+              </a:spcBef>
+              <a:spcAft>
+                <a:spcPts val="0"/>
+              </a:spcAft>
+              <a:buClr>
+                <a:srgbClr val="000000"/>
+              </a:buClr>
+              <a:buSzPts val="2800"/>
+              <a:buFont typeface="Arial"/>
+              <a:buNone/>
+              <a:defRPr sz="2800" b="0" i="0" u="none" strike="noStrike" cap="none">
+                <a:solidFill>
+                  <a:srgbClr val="000000"/>
+                </a:solidFill>
+                <a:latin typeface="Arial"/>
+                <a:ea typeface="Arial"/>
+                <a:cs typeface="Arial"/>
+                <a:sym typeface="Arial"/>
+              </a:defRPr>
+            </a:lvl2pPr>
+            <a:lvl3pPr marL="1371600" marR="0" lvl="2" indent="-228600" algn="l" rtl="0">
+              <a:lnSpc>
+                <a:spcPct val="90000"/>
+              </a:lnSpc>
+              <a:spcBef>
+                <a:spcPts val="1200"/>
+              </a:spcBef>
+              <a:spcAft>
+                <a:spcPts val="0"/>
+              </a:spcAft>
+              <a:buClr>
+                <a:srgbClr val="000000"/>
+              </a:buClr>
+              <a:buSzPts val="2800"/>
+              <a:buFont typeface="Arial"/>
+              <a:buNone/>
+              <a:defRPr sz="2800" b="0" i="0" u="none" strike="noStrike" cap="none">
+                <a:solidFill>
+                  <a:srgbClr val="000000"/>
+                </a:solidFill>
+                <a:latin typeface="Arial"/>
+                <a:ea typeface="Arial"/>
+                <a:cs typeface="Arial"/>
+                <a:sym typeface="Arial"/>
+              </a:defRPr>
+            </a:lvl3pPr>
+            <a:lvl4pPr marL="1828800" marR="0" lvl="3" indent="-228600" algn="l" rtl="0">
+              <a:lnSpc>
+                <a:spcPct val="90000"/>
+              </a:lnSpc>
+              <a:spcBef>
+                <a:spcPts val="1200"/>
+              </a:spcBef>
+              <a:spcAft>
+                <a:spcPts val="0"/>
+              </a:spcAft>
+              <a:buClr>
+                <a:srgbClr val="000000"/>
+              </a:buClr>
+              <a:buSzPts val="2800"/>
+              <a:buFont typeface="Arial"/>
+              <a:buNone/>
+              <a:defRPr sz="2800" b="0" i="0" u="none" strike="noStrike" cap="none">
+                <a:solidFill>
+                  <a:srgbClr val="000000"/>
+                </a:solidFill>
+                <a:latin typeface="Arial"/>
+                <a:ea typeface="Arial"/>
+                <a:cs typeface="Arial"/>
+                <a:sym typeface="Arial"/>
+              </a:defRPr>
+            </a:lvl4pPr>
+            <a:lvl5pPr marL="2286000" marR="0" lvl="4" indent="-228600" algn="l" rtl="0">
+              <a:lnSpc>
+                <a:spcPct val="90000"/>
+              </a:lnSpc>
+              <a:spcBef>
+                <a:spcPts val="1200"/>
+              </a:spcBef>
+              <a:spcAft>
+                <a:spcPts val="0"/>
+              </a:spcAft>
+              <a:buClr>
+                <a:srgbClr val="000000"/>
+              </a:buClr>
+              <a:buSzPts val="2800"/>
+              <a:buFont typeface="Arial"/>
+              <a:buNone/>
+              <a:defRPr sz="2800" b="0" i="0" u="none" strike="noStrike" cap="none">
+                <a:solidFill>
+                  <a:srgbClr val="000000"/>
+                </a:solidFill>
+                <a:latin typeface="Arial"/>
+                <a:ea typeface="Arial"/>
+                <a:cs typeface="Arial"/>
+                <a:sym typeface="Arial"/>
+              </a:defRPr>
+            </a:lvl5pPr>
+            <a:lvl6pPr marL="2743200" marR="0" lvl="5" indent="-406400" algn="l" rtl="0">
+              <a:lnSpc>
+                <a:spcPct val="90000"/>
+              </a:lnSpc>
+              <a:spcBef>
+                <a:spcPts val="1200"/>
+              </a:spcBef>
+              <a:spcAft>
+                <a:spcPts val="0"/>
+              </a:spcAft>
+              <a:buClr>
+                <a:srgbClr val="000000"/>
+              </a:buClr>
+              <a:buSzPts val="2800"/>
+              <a:buFont typeface="Arial"/>
+              <a:buChar char="•"/>
+              <a:defRPr sz="2800" b="0" i="0" u="none" strike="noStrike" cap="none">
+                <a:solidFill>
+                  <a:srgbClr val="000000"/>
+                </a:solidFill>
+                <a:latin typeface="Arial"/>
+                <a:ea typeface="Arial"/>
+                <a:cs typeface="Arial"/>
+                <a:sym typeface="Arial"/>
+              </a:defRPr>
+            </a:lvl6pPr>
+            <a:lvl7pPr marL="3200400" marR="0" lvl="6" indent="-406400" algn="l" rtl="0">
+              <a:lnSpc>
+                <a:spcPct val="90000"/>
+              </a:lnSpc>
+              <a:spcBef>
+                <a:spcPts val="1200"/>
+              </a:spcBef>
+              <a:spcAft>
+                <a:spcPts val="0"/>
+              </a:spcAft>
+              <a:buClr>
+                <a:srgbClr val="000000"/>
+              </a:buClr>
+              <a:buSzPts val="2800"/>
+              <a:buFont typeface="Arial"/>
+              <a:buChar char="•"/>
+              <a:defRPr sz="2800" b="0" i="0" u="none" strike="noStrike" cap="none">
+                <a:solidFill>
+                  <a:srgbClr val="000000"/>
+                </a:solidFill>
+                <a:latin typeface="Arial"/>
+                <a:ea typeface="Arial"/>
+                <a:cs typeface="Arial"/>
+                <a:sym typeface="Arial"/>
+              </a:defRPr>
+            </a:lvl7pPr>
+            <a:lvl8pPr marL="3657600" marR="0" lvl="7" indent="-406400" algn="l" rtl="0">
+              <a:lnSpc>
+                <a:spcPct val="90000"/>
+              </a:lnSpc>
+              <a:spcBef>
+                <a:spcPts val="1200"/>
+              </a:spcBef>
+              <a:spcAft>
+                <a:spcPts val="0"/>
+              </a:spcAft>
+              <a:buClr>
+                <a:srgbClr val="000000"/>
+              </a:buClr>
+              <a:buSzPts val="2800"/>
+              <a:buFont typeface="Arial"/>
+              <a:buChar char="•"/>
+              <a:defRPr sz="2800" b="0" i="0" u="none" strike="noStrike" cap="none">
+                <a:solidFill>
+                  <a:srgbClr val="000000"/>
+                </a:solidFill>
+                <a:latin typeface="Arial"/>
+                <a:ea typeface="Arial"/>
+                <a:cs typeface="Arial"/>
+                <a:sym typeface="Arial"/>
+              </a:defRPr>
+            </a:lvl8pPr>
+            <a:lvl9pPr marL="4114800" marR="0" lvl="8" indent="-406400" algn="l" rtl="0">
+              <a:lnSpc>
+                <a:spcPct val="90000"/>
+              </a:lnSpc>
+              <a:spcBef>
+                <a:spcPts val="1000"/>
+              </a:spcBef>
+              <a:spcAft>
+                <a:spcPts val="0"/>
+              </a:spcAft>
+              <a:buClr>
+                <a:srgbClr val="000000"/>
+              </a:buClr>
+              <a:buSzPts val="2800"/>
+              <a:buFont typeface="Arial"/>
+              <a:buChar char="•"/>
+              <a:defRPr sz="2800" b="0" i="0" u="none" strike="noStrike" cap="none">
+                <a:solidFill>
+                  <a:srgbClr val="000000"/>
+                </a:solidFill>
+                <a:latin typeface="Arial"/>
+                <a:ea typeface="Arial"/>
+                <a:cs typeface="Arial"/>
+                <a:sym typeface="Arial"/>
+              </a:defRPr>
+            </a:lvl9pPr>
+          </a:lstStyle>
+          <a:p>
+            <a:pPr marL="6350" marR="0" lvl="0" indent="0" algn="l" defTabSz="914400" rtl="0" eaLnBrk="1" fontAlgn="auto" latinLnBrk="0" hangingPunct="1">
+              <a:lnSpc>
+                <a:spcPct val="90000"/>
+              </a:lnSpc>
+              <a:spcBef>
+                <a:spcPts val="200"/>
+              </a:spcBef>
+              <a:spcAft>
+                <a:spcPts val="0"/>
+              </a:spcAft>
+              <a:buClr>
+                <a:srgbClr val="535353"/>
+              </a:buClr>
+              <a:buSzPts val="2800"/>
+              <a:buFont typeface="Arial"/>
+              <a:buNone/>
+              <a:tabLst/>
+              <a:defRPr/>
+            </a:pPr>
+            <a:r>
+              <a:rPr kumimoji="0" lang="en-US" sz="1600" b="0" i="0" u="none" strike="noStrike" kern="0" cap="none" spc="0" normalizeH="0" baseline="0" noProof="0">
+                <a:ln>
+                  <a:noFill/>
+                </a:ln>
+                <a:solidFill>
+                  <a:srgbClr val="000000"/>
+                </a:solidFill>
+                <a:effectLst/>
+                <a:uLnTx/>
+                <a:uFillTx/>
+                <a:latin typeface="Courier New" panose="02070309020205020404" pitchFamily="49" charset="0"/>
+                <a:cs typeface="Courier New" panose="02070309020205020404" pitchFamily="49" charset="0"/>
+                <a:sym typeface="Arial"/>
+              </a:rPr>
+              <a:t>Running App as server</a:t>
+            </a:r>
+          </a:p>
+          <a:p>
+            <a:pPr marL="463550" marR="0" lvl="1" indent="0" algn="l" defTabSz="914400" rtl="0" eaLnBrk="1" fontAlgn="auto" latinLnBrk="0" hangingPunct="1">
+              <a:lnSpc>
+                <a:spcPct val="90000"/>
+              </a:lnSpc>
+              <a:spcBef>
+                <a:spcPts val="200"/>
+              </a:spcBef>
+              <a:spcAft>
+                <a:spcPts val="0"/>
+              </a:spcAft>
+              <a:buClr>
+                <a:srgbClr val="000000"/>
+              </a:buClr>
+              <a:buSzPts val="2800"/>
+              <a:buFont typeface="Arial"/>
+              <a:buNone/>
+              <a:tabLst/>
+              <a:defRPr/>
+            </a:pPr>
+            <a:r>
+              <a:rPr kumimoji="0" lang="en-US" sz="1600" b="0" i="0" u="none" strike="noStrike" kern="0" cap="none" spc="0" normalizeH="0" baseline="0" noProof="0">
+                <a:ln>
+                  <a:noFill/>
+                </a:ln>
+                <a:solidFill>
+                  <a:srgbClr val="000000"/>
+                </a:solidFill>
+                <a:effectLst/>
+                <a:uLnTx/>
+                <a:uFillTx/>
+                <a:latin typeface="Courier New" panose="02070309020205020404" pitchFamily="49" charset="0"/>
+                <a:cs typeface="Courier New" panose="02070309020205020404" pitchFamily="49" charset="0"/>
+                <a:sym typeface="Arial"/>
+              </a:rPr>
+              <a:t>Client peer id is Measured</a:t>
+            </a:r>
+          </a:p>
+          <a:p>
+            <a:pPr marL="463550" marR="0" lvl="1" indent="0" algn="l" defTabSz="914400" rtl="0" eaLnBrk="1" fontAlgn="auto" latinLnBrk="0" hangingPunct="1">
+              <a:lnSpc>
+                <a:spcPct val="90000"/>
+              </a:lnSpc>
+              <a:spcBef>
+                <a:spcPts val="200"/>
+              </a:spcBef>
+              <a:spcAft>
+                <a:spcPts val="0"/>
+              </a:spcAft>
+              <a:buClr>
+                <a:srgbClr val="000000"/>
+              </a:buClr>
+              <a:buSzPts val="2800"/>
+              <a:buFont typeface="Arial"/>
+              <a:buNone/>
+              <a:tabLst/>
+              <a:defRPr/>
+            </a:pPr>
+            <a:r>
+              <a:rPr kumimoji="0" lang="en-US" sz="1600" b="0" i="0" u="none" strike="noStrike" kern="0" cap="none" spc="0" normalizeH="0" baseline="0" noProof="0">
+                <a:ln>
+                  <a:noFill/>
+                </a:ln>
+                <a:solidFill>
+                  <a:srgbClr val="000000"/>
+                </a:solidFill>
+                <a:effectLst/>
+                <a:uLnTx/>
+                <a:uFillTx/>
+                <a:latin typeface="Courier New" panose="02070309020205020404" pitchFamily="49" charset="0"/>
+                <a:cs typeface="Courier New" panose="02070309020205020404" pitchFamily="49" charset="0"/>
+                <a:sym typeface="Arial"/>
+              </a:rPr>
+              <a:t>8522d8e996e0089b26cb5dde06341c728e3017fa78974e3dce364bef56bdd307</a:t>
+            </a:r>
+          </a:p>
+          <a:p>
+            <a:pPr marL="463550" marR="0" lvl="1" indent="0" algn="l" defTabSz="914400" rtl="0" eaLnBrk="1" fontAlgn="auto" latinLnBrk="0" hangingPunct="1">
+              <a:lnSpc>
+                <a:spcPct val="90000"/>
+              </a:lnSpc>
+              <a:spcBef>
+                <a:spcPts val="200"/>
+              </a:spcBef>
+              <a:spcAft>
+                <a:spcPts val="0"/>
+              </a:spcAft>
+              <a:buClr>
+                <a:srgbClr val="000000"/>
+              </a:buClr>
+              <a:buSzPts val="2800"/>
+              <a:buFont typeface="Arial"/>
+              <a:buNone/>
+              <a:tabLst/>
+              <a:defRPr/>
+            </a:pPr>
+            <a:r>
+              <a:rPr kumimoji="0" lang="en-US" sz="1600" b="0" i="0" u="none" strike="noStrike" kern="0" cap="none" spc="0" normalizeH="0" baseline="0" noProof="0">
+                <a:ln>
+                  <a:noFill/>
+                </a:ln>
+                <a:solidFill>
+                  <a:srgbClr val="000000"/>
+                </a:solidFill>
+                <a:effectLst/>
+                <a:uLnTx/>
+                <a:uFillTx/>
+                <a:latin typeface="Courier New" panose="02070309020205020404" pitchFamily="49" charset="0"/>
+                <a:cs typeface="Courier New" panose="02070309020205020404" pitchFamily="49" charset="0"/>
+                <a:sym typeface="Arial"/>
+              </a:rPr>
+              <a:t>SSL server read: Hi from your secret client</a:t>
+            </a:r>
+          </a:p>
+        </p:txBody>
+      </p:sp>
+      <p:sp>
+        <p:nvSpPr>
+          <p:cNvPr id="15" name="Content Placeholder 7">
+            <a:extLst>
+              <a:ext uri="{FF2B5EF4-FFF2-40B4-BE49-F238E27FC236}">
+                <a16:creationId xmlns:a16="http://schemas.microsoft.com/office/drawing/2014/main" id="{FACB03FD-580D-0272-51E5-F593B8992383}"/>
+              </a:ext>
+            </a:extLst>
+          </p:cNvPr>
+          <p:cNvSpPr txBox="1">
+            <a:spLocks/>
+          </p:cNvSpPr>
+          <p:nvPr/>
+        </p:nvSpPr>
+        <p:spPr>
+          <a:xfrm>
+            <a:off x="842158" y="2346727"/>
+            <a:ext cx="8552969" cy="1178640"/>
+          </a:xfrm>
+          <a:prstGeom prst="rect">
+            <a:avLst/>
+          </a:prstGeom>
+          <a:solidFill>
+            <a:srgbClr val="70AD47">
+              <a:lumMod val="20000"/>
+              <a:lumOff val="80000"/>
+            </a:srgbClr>
+          </a:solidFill>
+          <a:ln>
+            <a:solidFill>
+              <a:srgbClr val="000000"/>
+            </a:solidFill>
+          </a:ln>
+        </p:spPr>
+        <p:txBody>
+          <a:bodyPr spcFirstLastPara="1" wrap="square" lIns="45700" tIns="45700" rIns="45700" bIns="45700" anchor="t" anchorCtr="0">
+            <a:noAutofit/>
+          </a:bodyPr>
+          <a:lstStyle>
+            <a:defPPr marR="0" lvl="0" algn="l" rtl="0">
+              <a:lnSpc>
+                <a:spcPct val="100000"/>
+              </a:lnSpc>
+              <a:spcBef>
+                <a:spcPts val="0"/>
+              </a:spcBef>
+              <a:spcAft>
+                <a:spcPts val="0"/>
+              </a:spcAft>
+            </a:defPPr>
+            <a:lvl1pPr marL="457200" marR="0" lvl="0" indent="-228600" algn="l" rtl="0">
+              <a:lnSpc>
+                <a:spcPct val="90000"/>
+              </a:lnSpc>
+              <a:spcBef>
+                <a:spcPts val="1200"/>
+              </a:spcBef>
+              <a:spcAft>
+                <a:spcPts val="0"/>
+              </a:spcAft>
+              <a:buClr>
+                <a:schemeClr val="lt2"/>
+              </a:buClr>
+              <a:buSzPts val="2800"/>
+              <a:buFont typeface="Arial"/>
+              <a:buNone/>
+              <a:defRPr sz="2800" b="0" i="0" u="none" strike="noStrike" cap="none">
+                <a:solidFill>
+                  <a:schemeClr val="lt2"/>
+                </a:solidFill>
+                <a:latin typeface="Arial"/>
+                <a:ea typeface="Arial"/>
+                <a:cs typeface="Arial"/>
+                <a:sym typeface="Arial"/>
+              </a:defRPr>
+            </a:lvl1pPr>
+            <a:lvl2pPr marL="914400" marR="0" lvl="1" indent="-228600" algn="l" rtl="0">
+              <a:lnSpc>
+                <a:spcPct val="90000"/>
+              </a:lnSpc>
+              <a:spcBef>
+                <a:spcPts val="1200"/>
+              </a:spcBef>
+              <a:spcAft>
+                <a:spcPts val="0"/>
+              </a:spcAft>
+              <a:buClr>
+                <a:srgbClr val="000000"/>
+              </a:buClr>
+              <a:buSzPts val="2800"/>
+              <a:buFont typeface="Arial"/>
+              <a:buNone/>
+              <a:defRPr sz="2800" b="0" i="0" u="none" strike="noStrike" cap="none">
+                <a:solidFill>
+                  <a:srgbClr val="000000"/>
+                </a:solidFill>
+                <a:latin typeface="Arial"/>
+                <a:ea typeface="Arial"/>
+                <a:cs typeface="Arial"/>
+                <a:sym typeface="Arial"/>
+              </a:defRPr>
+            </a:lvl2pPr>
+            <a:lvl3pPr marL="1371600" marR="0" lvl="2" indent="-228600" algn="l" rtl="0">
+              <a:lnSpc>
+                <a:spcPct val="90000"/>
+              </a:lnSpc>
+              <a:spcBef>
+                <a:spcPts val="1200"/>
+              </a:spcBef>
+              <a:spcAft>
+                <a:spcPts val="0"/>
+              </a:spcAft>
+              <a:buClr>
+                <a:srgbClr val="000000"/>
+              </a:buClr>
+              <a:buSzPts val="2800"/>
+              <a:buFont typeface="Arial"/>
+              <a:buNone/>
+              <a:defRPr sz="2800" b="0" i="0" u="none" strike="noStrike" cap="none">
+                <a:solidFill>
+                  <a:srgbClr val="000000"/>
+                </a:solidFill>
+                <a:latin typeface="Arial"/>
+                <a:ea typeface="Arial"/>
+                <a:cs typeface="Arial"/>
+                <a:sym typeface="Arial"/>
+              </a:defRPr>
+            </a:lvl3pPr>
+            <a:lvl4pPr marL="1828800" marR="0" lvl="3" indent="-228600" algn="l" rtl="0">
+              <a:lnSpc>
+                <a:spcPct val="90000"/>
+              </a:lnSpc>
+              <a:spcBef>
+                <a:spcPts val="1200"/>
+              </a:spcBef>
+              <a:spcAft>
+                <a:spcPts val="0"/>
+              </a:spcAft>
+              <a:buClr>
+                <a:srgbClr val="000000"/>
+              </a:buClr>
+              <a:buSzPts val="2800"/>
+              <a:buFont typeface="Arial"/>
+              <a:buNone/>
+              <a:defRPr sz="2800" b="0" i="0" u="none" strike="noStrike" cap="none">
+                <a:solidFill>
+                  <a:srgbClr val="000000"/>
+                </a:solidFill>
+                <a:latin typeface="Arial"/>
+                <a:ea typeface="Arial"/>
+                <a:cs typeface="Arial"/>
+                <a:sym typeface="Arial"/>
+              </a:defRPr>
+            </a:lvl4pPr>
+            <a:lvl5pPr marL="2286000" marR="0" lvl="4" indent="-228600" algn="l" rtl="0">
+              <a:lnSpc>
+                <a:spcPct val="90000"/>
+              </a:lnSpc>
+              <a:spcBef>
+                <a:spcPts val="1200"/>
+              </a:spcBef>
+              <a:spcAft>
+                <a:spcPts val="0"/>
+              </a:spcAft>
+              <a:buClr>
+                <a:srgbClr val="000000"/>
+              </a:buClr>
+              <a:buSzPts val="2800"/>
+              <a:buFont typeface="Arial"/>
+              <a:buNone/>
+              <a:defRPr sz="2800" b="0" i="0" u="none" strike="noStrike" cap="none">
+                <a:solidFill>
+                  <a:srgbClr val="000000"/>
+                </a:solidFill>
+                <a:latin typeface="Arial"/>
+                <a:ea typeface="Arial"/>
+                <a:cs typeface="Arial"/>
+                <a:sym typeface="Arial"/>
+              </a:defRPr>
+            </a:lvl5pPr>
+            <a:lvl6pPr marL="2743200" marR="0" lvl="5" indent="-406400" algn="l" rtl="0">
+              <a:lnSpc>
+                <a:spcPct val="90000"/>
+              </a:lnSpc>
+              <a:spcBef>
+                <a:spcPts val="1200"/>
+              </a:spcBef>
+              <a:spcAft>
+                <a:spcPts val="0"/>
+              </a:spcAft>
+              <a:buClr>
+                <a:srgbClr val="000000"/>
+              </a:buClr>
+              <a:buSzPts val="2800"/>
+              <a:buFont typeface="Arial"/>
+              <a:buChar char="•"/>
+              <a:defRPr sz="2800" b="0" i="0" u="none" strike="noStrike" cap="none">
+                <a:solidFill>
+                  <a:srgbClr val="000000"/>
+                </a:solidFill>
+                <a:latin typeface="Arial"/>
+                <a:ea typeface="Arial"/>
+                <a:cs typeface="Arial"/>
+                <a:sym typeface="Arial"/>
+              </a:defRPr>
+            </a:lvl6pPr>
+            <a:lvl7pPr marL="3200400" marR="0" lvl="6" indent="-406400" algn="l" rtl="0">
+              <a:lnSpc>
+                <a:spcPct val="90000"/>
+              </a:lnSpc>
+              <a:spcBef>
+                <a:spcPts val="1200"/>
+              </a:spcBef>
+              <a:spcAft>
+                <a:spcPts val="0"/>
+              </a:spcAft>
+              <a:buClr>
+                <a:srgbClr val="000000"/>
+              </a:buClr>
+              <a:buSzPts val="2800"/>
+              <a:buFont typeface="Arial"/>
+              <a:buChar char="•"/>
+              <a:defRPr sz="2800" b="0" i="0" u="none" strike="noStrike" cap="none">
+                <a:solidFill>
+                  <a:srgbClr val="000000"/>
+                </a:solidFill>
+                <a:latin typeface="Arial"/>
+                <a:ea typeface="Arial"/>
+                <a:cs typeface="Arial"/>
+                <a:sym typeface="Arial"/>
+              </a:defRPr>
+            </a:lvl7pPr>
+            <a:lvl8pPr marL="3657600" marR="0" lvl="7" indent="-406400" algn="l" rtl="0">
+              <a:lnSpc>
+                <a:spcPct val="90000"/>
+              </a:lnSpc>
+              <a:spcBef>
+                <a:spcPts val="1200"/>
+              </a:spcBef>
+              <a:spcAft>
+                <a:spcPts val="0"/>
+              </a:spcAft>
+              <a:buClr>
+                <a:srgbClr val="000000"/>
+              </a:buClr>
+              <a:buSzPts val="2800"/>
+              <a:buFont typeface="Arial"/>
+              <a:buChar char="•"/>
+              <a:defRPr sz="2800" b="0" i="0" u="none" strike="noStrike" cap="none">
+                <a:solidFill>
+                  <a:srgbClr val="000000"/>
+                </a:solidFill>
+                <a:latin typeface="Arial"/>
+                <a:ea typeface="Arial"/>
+                <a:cs typeface="Arial"/>
+                <a:sym typeface="Arial"/>
+              </a:defRPr>
+            </a:lvl8pPr>
+            <a:lvl9pPr marL="4114800" marR="0" lvl="8" indent="-406400" algn="l" rtl="0">
+              <a:lnSpc>
+                <a:spcPct val="90000"/>
+              </a:lnSpc>
+              <a:spcBef>
+                <a:spcPts val="1000"/>
+              </a:spcBef>
+              <a:spcAft>
+                <a:spcPts val="0"/>
+              </a:spcAft>
+              <a:buClr>
+                <a:srgbClr val="000000"/>
+              </a:buClr>
+              <a:buSzPts val="2800"/>
+              <a:buFont typeface="Arial"/>
+              <a:buChar char="•"/>
+              <a:defRPr sz="2800" b="0" i="0" u="none" strike="noStrike" cap="none">
+                <a:solidFill>
+                  <a:srgbClr val="000000"/>
+                </a:solidFill>
+                <a:latin typeface="Arial"/>
+                <a:ea typeface="Arial"/>
+                <a:cs typeface="Arial"/>
+                <a:sym typeface="Arial"/>
+              </a:defRPr>
+            </a:lvl9pPr>
+          </a:lstStyle>
+          <a:p>
+            <a:pPr marL="6350" marR="0" lvl="0" indent="0" algn="l" defTabSz="914400" rtl="0" eaLnBrk="1" fontAlgn="auto" latinLnBrk="0" hangingPunct="1">
+              <a:lnSpc>
+                <a:spcPct val="90000"/>
+              </a:lnSpc>
+              <a:spcBef>
+                <a:spcPts val="200"/>
+              </a:spcBef>
+              <a:spcAft>
+                <a:spcPts val="0"/>
+              </a:spcAft>
+              <a:buClr>
+                <a:srgbClr val="535353"/>
+              </a:buClr>
+              <a:buSzPts val="2800"/>
+              <a:buFont typeface="Arial"/>
+              <a:buNone/>
+              <a:tabLst/>
+              <a:defRPr/>
+            </a:pPr>
+            <a:r>
+              <a:rPr kumimoji="0" lang="en-US" sz="1600" b="0" i="0" u="none" strike="noStrike" kern="0" cap="none" spc="0" normalizeH="0" baseline="0" noProof="0">
+                <a:ln>
+                  <a:noFill/>
+                </a:ln>
+                <a:solidFill>
+                  <a:srgbClr val="000000"/>
+                </a:solidFill>
+                <a:effectLst/>
+                <a:uLnTx/>
+                <a:uFillTx/>
+                <a:latin typeface="Courier New" panose="02070309020205020404" pitchFamily="49" charset="0"/>
+                <a:cs typeface="Courier New" panose="02070309020205020404" pitchFamily="49" charset="0"/>
+                <a:sym typeface="Arial"/>
+              </a:rPr>
+              <a:t>Running App as client</a:t>
+            </a:r>
+          </a:p>
+          <a:p>
+            <a:pPr marL="463550" marR="0" lvl="1" indent="0" algn="l" defTabSz="914400" rtl="0" eaLnBrk="1" fontAlgn="auto" latinLnBrk="0" hangingPunct="1">
+              <a:lnSpc>
+                <a:spcPct val="90000"/>
+              </a:lnSpc>
+              <a:spcBef>
+                <a:spcPts val="200"/>
+              </a:spcBef>
+              <a:spcAft>
+                <a:spcPts val="0"/>
+              </a:spcAft>
+              <a:buClr>
+                <a:srgbClr val="000000"/>
+              </a:buClr>
+              <a:buSzPts val="2800"/>
+              <a:buFont typeface="Arial"/>
+              <a:buNone/>
+              <a:tabLst/>
+              <a:defRPr/>
+            </a:pPr>
+            <a:r>
+              <a:rPr kumimoji="0" lang="en-US" sz="1600" b="0" i="0" u="none" strike="noStrike" kern="0" cap="none" spc="0" normalizeH="0" baseline="0" noProof="0">
+                <a:ln>
+                  <a:noFill/>
+                </a:ln>
+                <a:solidFill>
+                  <a:srgbClr val="000000"/>
+                </a:solidFill>
+                <a:effectLst/>
+                <a:uLnTx/>
+                <a:uFillTx/>
+                <a:latin typeface="Courier New" panose="02070309020205020404" pitchFamily="49" charset="0"/>
+                <a:cs typeface="Courier New" panose="02070309020205020404" pitchFamily="49" charset="0"/>
+                <a:sym typeface="Arial"/>
+              </a:rPr>
+              <a:t>Server peer id : Measured</a:t>
+            </a:r>
+          </a:p>
+          <a:p>
+            <a:pPr marL="463550" marR="0" lvl="1" indent="0" algn="l" defTabSz="914400" rtl="0" eaLnBrk="1" fontAlgn="auto" latinLnBrk="0" hangingPunct="1">
+              <a:lnSpc>
+                <a:spcPct val="90000"/>
+              </a:lnSpc>
+              <a:spcBef>
+                <a:spcPts val="200"/>
+              </a:spcBef>
+              <a:spcAft>
+                <a:spcPts val="0"/>
+              </a:spcAft>
+              <a:buClr>
+                <a:srgbClr val="000000"/>
+              </a:buClr>
+              <a:buSzPts val="2800"/>
+              <a:buFont typeface="Arial"/>
+              <a:buNone/>
+              <a:tabLst/>
+              <a:defRPr/>
+            </a:pPr>
+            <a:r>
+              <a:rPr kumimoji="0" lang="en-US" sz="1600" b="0" i="0" u="none" strike="noStrike" kern="0" cap="none" spc="0" normalizeH="0" baseline="0" noProof="0">
+                <a:ln>
+                  <a:noFill/>
+                </a:ln>
+                <a:solidFill>
+                  <a:srgbClr val="000000"/>
+                </a:solidFill>
+                <a:effectLst/>
+                <a:uLnTx/>
+                <a:uFillTx/>
+                <a:latin typeface="Courier New" panose="02070309020205020404" pitchFamily="49" charset="0"/>
+                <a:cs typeface="Courier New" panose="02070309020205020404" pitchFamily="49" charset="0"/>
+                <a:sym typeface="Arial"/>
+              </a:rPr>
+              <a:t>8522d8e996e0089b26cb5dde06341c728e3017fa78974e3dce364bef56bdd307</a:t>
+            </a:r>
+          </a:p>
+          <a:p>
+            <a:pPr marL="463550" marR="0" lvl="1" indent="0" algn="l" defTabSz="914400" rtl="0" eaLnBrk="1" fontAlgn="auto" latinLnBrk="0" hangingPunct="1">
+              <a:lnSpc>
+                <a:spcPct val="90000"/>
+              </a:lnSpc>
+              <a:spcBef>
+                <a:spcPts val="200"/>
+              </a:spcBef>
+              <a:spcAft>
+                <a:spcPts val="0"/>
+              </a:spcAft>
+              <a:buClr>
+                <a:srgbClr val="000000"/>
+              </a:buClr>
+              <a:buSzPts val="2800"/>
+              <a:buFont typeface="Arial"/>
+              <a:buNone/>
+              <a:tabLst/>
+              <a:defRPr/>
+            </a:pPr>
+            <a:r>
+              <a:rPr kumimoji="0" lang="en-US" sz="1600" b="0" i="0" u="none" strike="noStrike" kern="0" cap="none" spc="0" normalizeH="0" baseline="0" noProof="0">
+                <a:ln>
+                  <a:noFill/>
+                </a:ln>
+                <a:solidFill>
+                  <a:srgbClr val="000000"/>
+                </a:solidFill>
+                <a:effectLst/>
+                <a:uLnTx/>
+                <a:uFillTx/>
+                <a:latin typeface="Courier New" panose="02070309020205020404" pitchFamily="49" charset="0"/>
+                <a:cs typeface="Courier New" panose="02070309020205020404" pitchFamily="49" charset="0"/>
+                <a:sym typeface="Arial"/>
+              </a:rPr>
+              <a:t>SSL client read: Hi from your secret server</a:t>
+            </a:r>
+          </a:p>
+        </p:txBody>
+      </p:sp>
+      <p:sp>
+        <p:nvSpPr>
+          <p:cNvPr id="16" name="Content Placeholder 7">
+            <a:extLst>
+              <a:ext uri="{FF2B5EF4-FFF2-40B4-BE49-F238E27FC236}">
+                <a16:creationId xmlns:a16="http://schemas.microsoft.com/office/drawing/2014/main" id="{D8BF95BA-D581-ABA1-C857-5D4B968FA4BE}"/>
+              </a:ext>
+            </a:extLst>
+          </p:cNvPr>
+          <p:cNvSpPr txBox="1">
+            <a:spLocks/>
+          </p:cNvSpPr>
+          <p:nvPr/>
+        </p:nvSpPr>
+        <p:spPr bwMode="ltGray">
+          <a:xfrm>
+            <a:off x="542276" y="3786834"/>
+            <a:ext cx="5881051" cy="1953029"/>
+          </a:xfrm>
+          <a:prstGeom prst="rect">
+            <a:avLst/>
+          </a:prstGeom>
+          <a:noFill/>
+        </p:spPr>
+        <p:txBody>
+          <a:bodyPr vert="horz" lIns="365760" tIns="228600" rIns="228600" bIns="228600" rtlCol="0">
+            <a:noAutofit/>
+          </a:bodyPr>
+          <a:lstStyle>
+            <a:lvl1pPr marL="0" indent="0" algn="l" defTabSz="914400" rtl="0" eaLnBrk="1" latinLnBrk="0" hangingPunct="1">
+              <a:lnSpc>
+                <a:spcPct val="100000"/>
+              </a:lnSpc>
+              <a:spcBef>
+                <a:spcPts val="1200"/>
+              </a:spcBef>
+              <a:buClr>
+                <a:schemeClr val="tx1">
+                  <a:lumMod val="60000"/>
+                  <a:lumOff val="40000"/>
+                </a:schemeClr>
+              </a:buClr>
+              <a:buSzPct val="90000"/>
+              <a:buFont typeface="Arial" panose="020B0604020202020204" pitchFamily="34" charset="0"/>
+              <a:buChar char="​"/>
+              <a:defRPr lang="en-US" sz="1800" kern="1200" dirty="0">
+                <a:solidFill>
+                  <a:schemeClr val="tx1"/>
+                </a:solidFill>
+                <a:latin typeface="+mn-lt"/>
+                <a:ea typeface="+mn-ea"/>
+                <a:cs typeface="+mn-cs"/>
+              </a:defRPr>
+            </a:lvl1pPr>
+            <a:lvl2pPr marL="457200" indent="-184150" algn="l" defTabSz="914400" rtl="0" eaLnBrk="1" latinLnBrk="0" hangingPunct="1">
+              <a:lnSpc>
+                <a:spcPct val="100000"/>
+              </a:lnSpc>
+              <a:spcBef>
+                <a:spcPts val="1200"/>
+              </a:spcBef>
+              <a:buClr>
+                <a:schemeClr val="bg1"/>
+              </a:buClr>
+              <a:buSzPct val="90000"/>
+              <a:buFont typeface="Arial" panose="020B0604020202020204" pitchFamily="34" charset="0"/>
+              <a:buChar char="•"/>
+              <a:defRPr lang="en-US" sz="1600" kern="1200" dirty="0">
+                <a:solidFill>
+                  <a:schemeClr val="bg1"/>
+                </a:solidFill>
+                <a:latin typeface="+mn-lt"/>
+                <a:ea typeface="+mn-ea"/>
+                <a:cs typeface="+mn-cs"/>
+              </a:defRPr>
+            </a:lvl2pPr>
+            <a:lvl3pPr marL="744538" indent="-169863" algn="l" defTabSz="914400" rtl="0" eaLnBrk="1" latinLnBrk="0" hangingPunct="1">
+              <a:lnSpc>
+                <a:spcPct val="100000"/>
+              </a:lnSpc>
+              <a:spcBef>
+                <a:spcPts val="1200"/>
+              </a:spcBef>
+              <a:spcAft>
+                <a:spcPts val="0"/>
+              </a:spcAft>
+              <a:buClr>
+                <a:schemeClr val="bg1"/>
+              </a:buClr>
+              <a:buSzPct val="90000"/>
+              <a:buFont typeface="Camphor Std" panose="020B0504030404020204" pitchFamily="34" charset="0"/>
+              <a:buChar char="–"/>
+              <a:defRPr lang="en-US" sz="1400" kern="1200" dirty="0">
+                <a:solidFill>
+                  <a:schemeClr val="bg1"/>
+                </a:solidFill>
+                <a:latin typeface="+mn-lt"/>
+                <a:ea typeface="+mn-ea"/>
+                <a:cs typeface="+mn-cs"/>
+              </a:defRPr>
+            </a:lvl3pPr>
+            <a:lvl4pPr marL="969963" indent="-166688" algn="l" defTabSz="914400" rtl="0" eaLnBrk="1" latinLnBrk="0" hangingPunct="1">
+              <a:lnSpc>
+                <a:spcPct val="100000"/>
+              </a:lnSpc>
+              <a:spcBef>
+                <a:spcPts val="1200"/>
+              </a:spcBef>
+              <a:buClr>
+                <a:schemeClr val="bg1"/>
+              </a:buClr>
+              <a:buSzPct val="90000"/>
+              <a:buFont typeface="Arial" panose="020B0604020202020204" pitchFamily="34" charset="0"/>
+              <a:buChar char="•"/>
+              <a:defRPr lang="en-US" sz="1200" kern="1200" dirty="0">
+                <a:solidFill>
+                  <a:schemeClr val="bg1"/>
+                </a:solidFill>
+                <a:latin typeface="+mn-lt"/>
+                <a:ea typeface="+mn-ea"/>
+                <a:cs typeface="+mn-cs"/>
+              </a:defRPr>
+            </a:lvl4pPr>
+            <a:lvl5pPr marL="1143000" indent="-138113" algn="l" defTabSz="914400" rtl="0" eaLnBrk="1" latinLnBrk="0" hangingPunct="1">
+              <a:lnSpc>
+                <a:spcPct val="100000"/>
+              </a:lnSpc>
+              <a:spcBef>
+                <a:spcPts val="1200"/>
+              </a:spcBef>
+              <a:buClr>
+                <a:schemeClr val="bg1"/>
+              </a:buClr>
+              <a:buSzPct val="90000"/>
+              <a:buFont typeface="Camphor Std" panose="020B0504030404020204" pitchFamily="34" charset="0"/>
+              <a:buChar char="–"/>
+              <a:tabLst/>
+              <a:defRPr lang="en-US" sz="1200" kern="1200" dirty="0">
+                <a:solidFill>
+                  <a:schemeClr val="bg1"/>
+                </a:solidFill>
+                <a:latin typeface="+mn-lt"/>
+                <a:ea typeface="+mn-ea"/>
+                <a:cs typeface="+mn-cs"/>
+              </a:defRPr>
+            </a:lvl5pPr>
+            <a:lvl6pPr marL="1258888" indent="-111125" algn="l" defTabSz="914400" rtl="0" eaLnBrk="1" latinLnBrk="0" hangingPunct="1">
+              <a:lnSpc>
+                <a:spcPct val="100000"/>
+              </a:lnSpc>
+              <a:spcBef>
+                <a:spcPts val="1200"/>
+              </a:spcBef>
+              <a:buClrTx/>
+              <a:buSzPct val="90000"/>
+              <a:buFont typeface="Arial" panose="020B0604020202020204" pitchFamily="34" charset="0"/>
+              <a:buChar char="•"/>
+              <a:tabLst/>
+              <a:defRPr sz="1800" kern="1200">
+                <a:solidFill>
+                  <a:schemeClr val="bg1"/>
+                </a:solidFill>
+                <a:latin typeface="+mn-lt"/>
+                <a:ea typeface="+mn-ea"/>
+                <a:cs typeface="+mn-cs"/>
+              </a:defRPr>
+            </a:lvl6pPr>
+            <a:lvl7pPr marL="1379538" indent="-120650" algn="l" defTabSz="914400" rtl="0" eaLnBrk="1" latinLnBrk="0" hangingPunct="1">
+              <a:lnSpc>
+                <a:spcPct val="100000"/>
+              </a:lnSpc>
+              <a:spcBef>
+                <a:spcPts val="1200"/>
+              </a:spcBef>
+              <a:buClrTx/>
+              <a:buSzPct val="90000"/>
+              <a:buFont typeface="System Font Regular"/>
+              <a:buChar char="-"/>
+              <a:tabLst/>
+              <a:defRPr sz="1400" kern="1200">
+                <a:solidFill>
+                  <a:schemeClr val="bg1"/>
+                </a:solidFill>
+                <a:latin typeface="+mn-lt"/>
+                <a:ea typeface="+mn-ea"/>
+                <a:cs typeface="+mn-cs"/>
+              </a:defRPr>
+            </a:lvl7pPr>
+            <a:lvl8pPr marL="1550988" indent="-120650" algn="l" defTabSz="914400" rtl="0" eaLnBrk="1" latinLnBrk="0" hangingPunct="1">
+              <a:lnSpc>
+                <a:spcPct val="100000"/>
+              </a:lnSpc>
+              <a:spcBef>
+                <a:spcPts val="1200"/>
+              </a:spcBef>
+              <a:buClrTx/>
+              <a:buSzPct val="90000"/>
+              <a:buFont typeface="Arial" panose="020B0604020202020204" pitchFamily="34" charset="0"/>
+              <a:buChar char="•"/>
+              <a:tabLst/>
+              <a:defRPr sz="1200" kern="1200">
+                <a:solidFill>
+                  <a:schemeClr val="bg1"/>
+                </a:solidFill>
+                <a:latin typeface="+mn-lt"/>
+                <a:ea typeface="+mn-ea"/>
+                <a:cs typeface="+mn-cs"/>
+              </a:defRPr>
+            </a:lvl8pPr>
+            <a:lvl9pPr marL="1722438" indent="-120650" algn="l" defTabSz="914400" rtl="0" eaLnBrk="1" latinLnBrk="0" hangingPunct="1">
+              <a:lnSpc>
+                <a:spcPct val="100000"/>
+              </a:lnSpc>
+              <a:spcBef>
+                <a:spcPts val="1200"/>
+              </a:spcBef>
+              <a:buClrTx/>
+              <a:buSzPct val="90000"/>
+              <a:buFont typeface="System Font Regular"/>
+              <a:buChar char="-"/>
+              <a:tabLst/>
+              <a:defRPr sz="1800" kern="1200">
+                <a:solidFill>
+                  <a:schemeClr val="bg1"/>
+                </a:solidFill>
+                <a:latin typeface="+mn-lt"/>
+                <a:ea typeface="+mn-ea"/>
+                <a:cs typeface="+mn-cs"/>
+              </a:defRPr>
+            </a:lvl9pPr>
+          </a:lstStyle>
+          <a:p>
+            <a:pPr fontAlgn="base">
+              <a:spcBef>
+                <a:spcPts val="200"/>
+              </a:spcBef>
+              <a:buClr>
+                <a:srgbClr val="000000">
+                  <a:lumMod val="60000"/>
+                  <a:lumOff val="40000"/>
+                </a:srgbClr>
+              </a:buClr>
+              <a:buFont typeface="Arial" panose="020B0604020202020204" pitchFamily="34" charset="0"/>
+              <a:buNone/>
+            </a:pPr>
+            <a:r>
+              <a:rPr sz="2000" dirty="0">
+                <a:solidFill>
+                  <a:srgbClr val="535353"/>
+                </a:solidFill>
+                <a:cs typeface="Calibri" panose="020F0502020204030204" pitchFamily="34" charset="0"/>
+                <a:sym typeface="Arial"/>
+              </a:rPr>
+              <a:t>You may want to add:</a:t>
+            </a:r>
+          </a:p>
+          <a:p>
+            <a:pPr marL="342900" indent="-342900" fontAlgn="base">
+              <a:spcBef>
+                <a:spcPts val="200"/>
+              </a:spcBef>
+              <a:buClr>
+                <a:srgbClr val="000000">
+                  <a:lumMod val="60000"/>
+                  <a:lumOff val="40000"/>
+                </a:srgbClr>
+              </a:buClr>
+              <a:buFont typeface="Courier New" panose="02070309020205020404" pitchFamily="49" charset="0"/>
+              <a:buChar char="o"/>
+            </a:pPr>
+            <a:r>
+              <a:rPr dirty="0">
+                <a:solidFill>
+                  <a:srgbClr val="535353"/>
+                </a:solidFill>
+                <a:cs typeface="Calibri" panose="020F0502020204030204" pitchFamily="34" charset="0"/>
+                <a:sym typeface="Arial"/>
+              </a:rPr>
+              <a:t>API serialization</a:t>
+            </a:r>
+          </a:p>
+          <a:p>
+            <a:pPr marL="342900" indent="-342900" fontAlgn="base">
+              <a:spcBef>
+                <a:spcPts val="200"/>
+              </a:spcBef>
+              <a:buClr>
+                <a:srgbClr val="000000">
+                  <a:lumMod val="60000"/>
+                  <a:lumOff val="40000"/>
+                </a:srgbClr>
+              </a:buClr>
+              <a:buFont typeface="Courier New" panose="02070309020205020404" pitchFamily="49" charset="0"/>
+              <a:buChar char="o"/>
+            </a:pPr>
+            <a:r>
+              <a:rPr dirty="0">
+                <a:solidFill>
+                  <a:srgbClr val="535353"/>
+                </a:solidFill>
+                <a:cs typeface="Calibri" panose="020F0502020204030204" pitchFamily="34" charset="0"/>
+                <a:sym typeface="Arial"/>
+              </a:rPr>
+              <a:t>ACLs for differentiated access</a:t>
+            </a:r>
+          </a:p>
+          <a:p>
+            <a:pPr marL="342900" indent="-342900" fontAlgn="base">
+              <a:spcBef>
+                <a:spcPts val="200"/>
+              </a:spcBef>
+              <a:buClr>
+                <a:srgbClr val="000000">
+                  <a:lumMod val="60000"/>
+                  <a:lumOff val="40000"/>
+                </a:srgbClr>
+              </a:buClr>
+              <a:buFont typeface="Courier New" panose="02070309020205020404" pitchFamily="49" charset="0"/>
+              <a:buChar char="o"/>
+            </a:pPr>
+            <a:r>
+              <a:rPr lang="en-US" dirty="0">
+                <a:solidFill>
+                  <a:srgbClr val="535353"/>
+                </a:solidFill>
+                <a:cs typeface="Calibri" panose="020F0502020204030204" pitchFamily="34" charset="0"/>
+                <a:sym typeface="Arial"/>
+              </a:rPr>
+              <a:t>Standard “distributed programming” primitives like Byzantine agreement</a:t>
+            </a:r>
+          </a:p>
+        </p:txBody>
+      </p:sp>
+    </p:spTree>
+    <p:extLst>
+      <p:ext uri="{BB962C8B-B14F-4D97-AF65-F5344CB8AC3E}">
+        <p14:creationId xmlns:p14="http://schemas.microsoft.com/office/powerpoint/2010/main" val="4123536275"/>
+      </p:ext>
+    </p:extLst>
+  </p:cSld>
+  <p:clrMapOvr>
+    <a:masterClrMapping/>
+  </p:clrMapOvr>
+</p:sld>
+</file>
+
+<file path=ppt/slides/slide11.xml><?xml version="1.0" encoding="utf-8"?>
+<p:sld xmlns:a="http://schemas.openxmlformats.org/drawingml/2006/main" xmlns:r="http://schemas.openxmlformats.org/officeDocument/2006/relationships" xmlns:p="http://schemas.openxmlformats.org/presentationml/2006/main">
+  <p:cSld>
+    <p:spTree>
+      <p:nvGrpSpPr>
+        <p:cNvPr id="1" name=""/>
+        <p:cNvGrpSpPr/>
+        <p:nvPr/>
+      </p:nvGrpSpPr>
+      <p:grpSpPr>
+        <a:xfrm>
+          <a:off x="0" y="0"/>
+          <a:ext cx="0" cy="0"/>
+          <a:chOff x="0" y="0"/>
+          <a:chExt cx="0" cy="0"/>
+        </a:xfrm>
+      </p:grpSpPr>
+      <p:sp>
+        <p:nvSpPr>
           <p:cNvPr id="5" name="Title 1">
             <a:extLst>
               <a:ext uri="{FF2B5EF4-FFF2-40B4-BE49-F238E27FC236}">
@@ -4230,44 +6121,40 @@
               <a:buAutoNum type="arabicPeriod"/>
             </a:pPr>
             <a:r>
-              <a:rPr sz="2400" b="1">
+              <a:rPr sz="2400" b="1" dirty="0">
                 <a:solidFill>
                   <a:srgbClr val="7030A0"/>
                 </a:solidFill>
-                <a:latin typeface="Arial"/>
                 <a:ea typeface="Times New Roman" panose="02020603050405020304" pitchFamily="18" charset="0"/>
                 <a:sym typeface="Arial"/>
               </a:rPr>
               <a:t>Simple </a:t>
             </a:r>
             <a:r>
-              <a:rPr sz="2400">
+              <a:rPr sz="2400" dirty="0">
                 <a:solidFill>
                   <a:srgbClr val="000000"/>
                 </a:solidFill>
-                <a:latin typeface="Arial"/>
                 <a:ea typeface="Times New Roman" panose="02020603050405020304" pitchFamily="18" charset="0"/>
                 <a:sym typeface="Arial"/>
               </a:rPr>
               <a:t>for most applications (and </a:t>
             </a:r>
             <a:r>
-              <a:rPr sz="2400" b="1">
+              <a:rPr sz="2400" b="1" dirty="0">
                 <a:solidFill>
                   <a:srgbClr val="7030A0"/>
                 </a:solidFill>
-                <a:latin typeface="Arial"/>
                 <a:ea typeface="Times New Roman" panose="02020603050405020304" pitchFamily="18" charset="0"/>
                 <a:sym typeface="Arial"/>
               </a:rPr>
               <a:t>adequate</a:t>
             </a:r>
             <a:r>
-              <a:rPr sz="2400">
+              <a:rPr sz="2400" dirty="0">
                 <a:solidFill>
                   <a:srgbClr val="000000"/>
                 </a:solidFill>
-                <a:latin typeface="Arial"/>
                 <a:ea typeface="Times New Roman" panose="02020603050405020304" pitchFamily="18" charset="0"/>
                 <a:sym typeface="Arial"/>
               </a:rPr>
@@ -4292,99 +6179,90 @@
               <a:buAutoNum type="arabicPeriod"/>
             </a:pPr>
             <a:r>
-              <a:rPr sz="2400">
+              <a:rPr sz="2400" dirty="0">
                 <a:solidFill>
                   <a:srgbClr val="000000"/>
                 </a:solidFill>
-                <a:latin typeface="Arial"/>
                 <a:ea typeface="Times New Roman" panose="02020603050405020304" pitchFamily="18" charset="0"/>
                 <a:sym typeface="Arial"/>
               </a:rPr>
               <a:t>Abstracts underlying </a:t>
             </a:r>
             <a:r>
-              <a:rPr sz="2400" b="1">
+              <a:rPr sz="2400" b="1" dirty="0">
                 <a:solidFill>
                   <a:srgbClr val="4472C4"/>
                 </a:solidFill>
-                <a:latin typeface="Arial"/>
                 <a:ea typeface="Times New Roman" panose="02020603050405020304" pitchFamily="18" charset="0"/>
                 <a:sym typeface="Arial"/>
               </a:rPr>
               <a:t>isolate</a:t>
             </a:r>
             <a:r>
-              <a:rPr sz="2400" b="1">
+              <a:rPr sz="2400" b="1" dirty="0">
                 <a:solidFill>
                   <a:srgbClr val="000000"/>
                 </a:solidFill>
-                <a:latin typeface="Arial"/>
                 <a:ea typeface="Times New Roman" panose="02020603050405020304" pitchFamily="18" charset="0"/>
                 <a:sym typeface="Arial"/>
               </a:rPr>
               <a:t>, </a:t>
             </a:r>
             <a:r>
-              <a:rPr sz="2400" b="1">
+              <a:rPr sz="2400" b="1" dirty="0">
                 <a:solidFill>
                   <a:srgbClr val="4472C4"/>
                 </a:solidFill>
-                <a:latin typeface="Arial"/>
                 <a:ea typeface="Times New Roman" panose="02020603050405020304" pitchFamily="18" charset="0"/>
                 <a:sym typeface="Arial"/>
               </a:rPr>
               <a:t>measure</a:t>
             </a:r>
             <a:r>
-              <a:rPr sz="2400" b="1">
+              <a:rPr sz="2400" b="1" dirty="0">
                 <a:solidFill>
                   <a:srgbClr val="000000"/>
                 </a:solidFill>
-                <a:latin typeface="Arial"/>
                 <a:ea typeface="Times New Roman" panose="02020603050405020304" pitchFamily="18" charset="0"/>
                 <a:sym typeface="Arial"/>
               </a:rPr>
               <a:t>, </a:t>
             </a:r>
             <a:r>
-              <a:rPr sz="2400" b="1">
+              <a:rPr sz="2400" b="1" dirty="0">
                 <a:solidFill>
                   <a:srgbClr val="4472C4"/>
                 </a:solidFill>
-                <a:latin typeface="Arial"/>
                 <a:ea typeface="Times New Roman" panose="02020603050405020304" pitchFamily="18" charset="0"/>
                 <a:sym typeface="Arial"/>
               </a:rPr>
               <a:t>seal/unseal</a:t>
             </a:r>
             <a:r>
-              <a:rPr sz="2400">
+              <a:rPr sz="2400" dirty="0">
                 <a:solidFill>
                   <a:srgbClr val="000000"/>
                 </a:solidFill>
-                <a:latin typeface="Arial"/>
                 <a:ea typeface="Times New Roman" panose="02020603050405020304" pitchFamily="18" charset="0"/>
                 <a:sym typeface="Arial"/>
               </a:rPr>
               <a:t>, and </a:t>
             </a:r>
             <a:r>
-              <a:rPr sz="2400" b="1">
+              <a:rPr sz="2400" b="1" dirty="0">
                 <a:solidFill>
                   <a:srgbClr val="4472C4"/>
                 </a:solidFill>
-                <a:latin typeface="Arial"/>
                 <a:ea typeface="Times New Roman" panose="02020603050405020304" pitchFamily="18" charset="0"/>
                 <a:sym typeface="Arial"/>
               </a:rPr>
               <a:t>attest</a:t>
             </a:r>
             <a:r>
-              <a:rPr sz="2400">
+              <a:rPr sz="2400" dirty="0">
                 <a:solidFill>
                   <a:srgbClr val="000000"/>
                 </a:solidFill>
-                <a:latin typeface="Arial"/>
                 <a:ea typeface="Times New Roman" panose="02020603050405020304" pitchFamily="18" charset="0"/>
                 <a:sym typeface="Arial"/>
               </a:rPr>
@@ -4409,33 +6287,30 @@
               <a:buAutoNum type="arabicPeriod"/>
             </a:pPr>
             <a:r>
-              <a:rPr sz="2400">
+              <a:rPr sz="2400" dirty="0">
                 <a:solidFill>
                   <a:srgbClr val="000000"/>
                 </a:solidFill>
-                <a:latin typeface="Arial"/>
                 <a:ea typeface="Times New Roman" panose="02020603050405020304" pitchFamily="18" charset="0"/>
                 <a:sym typeface="Arial"/>
               </a:rPr>
               <a:t>Provides a </a:t>
             </a:r>
             <a:r>
-              <a:rPr sz="2400" b="1">
+              <a:rPr sz="2400" b="1" dirty="0">
                 <a:solidFill>
                   <a:srgbClr val="00B050"/>
                 </a:solidFill>
-                <a:latin typeface="Arial"/>
                 <a:ea typeface="Times New Roman" panose="02020603050405020304" pitchFamily="18" charset="0"/>
                 <a:sym typeface="Arial"/>
               </a:rPr>
               <a:t>secure store </a:t>
             </a:r>
             <a:r>
-              <a:rPr sz="2400">
+              <a:rPr sz="2400" dirty="0">
                 <a:solidFill>
                   <a:srgbClr val="000000"/>
                 </a:solidFill>
-                <a:latin typeface="Arial"/>
                 <a:ea typeface="Times New Roman" panose="02020603050405020304" pitchFamily="18" charset="0"/>
                 <a:sym typeface="Arial"/>
               </a:rPr>
@@ -4460,33 +6335,30 @@
               <a:buAutoNum type="arabicPeriod"/>
             </a:pPr>
             <a:r>
-              <a:rPr sz="2400">
+              <a:rPr sz="2400" dirty="0">
                 <a:solidFill>
                   <a:srgbClr val="000000"/>
                 </a:solidFill>
-                <a:latin typeface="Arial"/>
                 <a:ea typeface="Times New Roman" panose="02020603050405020304" pitchFamily="18" charset="0"/>
                 <a:sym typeface="Arial"/>
               </a:rPr>
               <a:t>Includes mechanism to establish a </a:t>
             </a:r>
             <a:r>
-              <a:rPr sz="2400" b="1">
+              <a:rPr sz="2400" b="1" dirty="0">
                 <a:solidFill>
                   <a:srgbClr val="C00000"/>
                 </a:solidFill>
-                <a:latin typeface="Arial"/>
                 <a:ea typeface="Times New Roman" panose="02020603050405020304" pitchFamily="18" charset="0"/>
                 <a:sym typeface="Arial"/>
               </a:rPr>
               <a:t>secure channel </a:t>
             </a:r>
             <a:r>
-              <a:rPr sz="2400">
+              <a:rPr sz="2400" dirty="0">
                 <a:solidFill>
                   <a:srgbClr val="000000"/>
                 </a:solidFill>
-                <a:latin typeface="Arial"/>
                 <a:ea typeface="Times New Roman" panose="02020603050405020304" pitchFamily="18" charset="0"/>
                 <a:sym typeface="Arial"/>
               </a:rPr>
@@ -4504,25 +6376,23 @@
               <a:buClr>
                 <a:srgbClr val="000000"/>
               </a:buClr>
-              <a:buFont typeface="Courier New" panose="02070309020205020404" pitchFamily="49" charset="0"/>
-              <a:buChar char="o"/>
+              <a:buFont typeface="Arial" panose="020B0604020202020204" pitchFamily="34" charset="0"/>
+              <a:buChar char="•"/>
             </a:pPr>
             <a:r>
-              <a:rPr sz="2000">
+              <a:rPr sz="2000" dirty="0">
                 <a:solidFill>
                   <a:srgbClr val="000000"/>
                 </a:solidFill>
-                <a:latin typeface="Arial"/>
                 <a:ea typeface="Times New Roman" panose="02020603050405020304" pitchFamily="18" charset="0"/>
                 <a:sym typeface="Arial"/>
               </a:rPr>
               <a:t>Encrypted, integrity protected, bi-directional, with authenticated trusted enclave named by their measurements</a:t>
             </a:r>
-            <a:endParaRPr lang="en-US" sz="2000">
+            <a:endParaRPr lang="en-US" sz="2000" dirty="0">
               <a:solidFill>
                 <a:srgbClr val="000000"/>
               </a:solidFill>
-              <a:latin typeface="Arial"/>
               <a:ea typeface="Times New Roman" panose="02020603050405020304" pitchFamily="18" charset="0"/>
               <a:sym typeface="Arial"/>
             </a:endParaRPr>
@@ -4775,24 +6645,22 @@
               <a:buAutoNum type="arabicPeriod" startAt="5"/>
             </a:pPr>
             <a:r>
-              <a:rPr sz="2400">
+              <a:rPr sz="2400" dirty="0">
                 <a:solidFill>
                   <a:srgbClr val="000000"/>
                 </a:solidFill>
-                <a:latin typeface="Arial"/>
                 <a:ea typeface="Times New Roman" panose="02020603050405020304" pitchFamily="18" charset="0"/>
                 <a:sym typeface="Arial"/>
               </a:rPr>
               <a:t>Almost as simple as </a:t>
             </a:r>
             <a:r>
-              <a:rPr sz="2400" b="1">
+              <a:rPr sz="2400" b="1" dirty="0">
                 <a:solidFill>
                   <a:srgbClr val="ED7D31">
                     <a:lumMod val="75000"/>
                   </a:srgbClr>
                 </a:solidFill>
-                <a:latin typeface="Arial"/>
                 <a:ea typeface="Times New Roman" panose="02020603050405020304" pitchFamily="18" charset="0"/>
                 <a:sym typeface="Arial"/>
               </a:rPr>
@@ -4814,7 +6682,7 @@
 </p:sld>
 </file>
 
-<file path=ppt/slides/slide11.xml><?xml version="1.0" encoding="utf-8"?>
+<file path=ppt/slides/slide12.xml><?xml version="1.0" encoding="utf-8"?>
 <p:sld xmlns:a="http://schemas.openxmlformats.org/drawingml/2006/main" xmlns:r="http://schemas.openxmlformats.org/officeDocument/2006/relationships" xmlns:p="http://schemas.openxmlformats.org/presentationml/2006/main">
   <p:cSld>
     <p:spTree>
@@ -5428,13 +7296,13 @@
             </a:lvl9pPr>
           </a:lstStyle>
           <a:p>
-            <a:pPr marL="522288" lvl="1" indent="-233363">
+            <a:pPr marL="631825" lvl="1" indent="-342900">
               <a:spcBef>
                 <a:spcPts val="600"/>
               </a:spcBef>
               <a:buSzPct val="75000"/>
-              <a:buFont typeface="Courier New" panose="02070309020205020404" pitchFamily="49" charset="0"/>
-              <a:buChar char="o"/>
+              <a:buFont typeface="Arial" panose="020B0604020202020204" pitchFamily="34" charset="0"/>
+              <a:buChar char="•"/>
             </a:pPr>
             <a:r>
               <a:rPr lang="en-US" sz="1900" kern="0" dirty="0">
@@ -5444,13 +7312,13 @@
             </a:r>
           </a:p>
           <a:p>
-            <a:pPr marL="522288" lvl="1" indent="-233363">
+            <a:pPr marL="631825" lvl="1" indent="-342900">
               <a:spcBef>
                 <a:spcPts val="600"/>
               </a:spcBef>
               <a:buSzPct val="75000"/>
-              <a:buFont typeface="Courier New" panose="02070309020205020404" pitchFamily="49" charset="0"/>
-              <a:buChar char="o"/>
+              <a:buFont typeface="Arial" panose="020B0604020202020204" pitchFamily="34" charset="0"/>
+              <a:buChar char="•"/>
             </a:pPr>
             <a:r>
               <a:rPr lang="en-US" sz="1900" kern="0" dirty="0">
@@ -5460,13 +7328,13 @@
             </a:r>
           </a:p>
           <a:p>
-            <a:pPr marL="522288" lvl="1" indent="-233363">
+            <a:pPr marL="631825" lvl="1" indent="-342900">
               <a:spcBef>
                 <a:spcPts val="600"/>
               </a:spcBef>
               <a:buSzPct val="75000"/>
-              <a:buFont typeface="Courier New" panose="02070309020205020404" pitchFamily="49" charset="0"/>
-              <a:buChar char="o"/>
+              <a:buFont typeface="Arial" panose="020B0604020202020204" pitchFamily="34" charset="0"/>
+              <a:buChar char="•"/>
             </a:pPr>
             <a:r>
               <a:rPr lang="en-US" sz="1900" kern="0" dirty="0">
@@ -5476,13 +7344,13 @@
             </a:r>
           </a:p>
           <a:p>
-            <a:pPr marL="522288" lvl="1" indent="-233363">
+            <a:pPr marL="631825" lvl="1" indent="-342900">
               <a:spcBef>
                 <a:spcPts val="600"/>
               </a:spcBef>
               <a:buSzPct val="75000"/>
-              <a:buFont typeface="Courier New" panose="02070309020205020404" pitchFamily="49" charset="0"/>
-              <a:buChar char="o"/>
+              <a:buFont typeface="Arial" panose="020B0604020202020204" pitchFamily="34" charset="0"/>
+              <a:buChar char="•"/>
             </a:pPr>
             <a:r>
               <a:rPr lang="en-US" sz="1900" kern="0" dirty="0">
@@ -5492,13 +7360,13 @@
             </a:r>
           </a:p>
           <a:p>
-            <a:pPr marL="522288" lvl="1" indent="-233363">
+            <a:pPr marL="631825" lvl="1" indent="-342900">
               <a:spcBef>
                 <a:spcPts val="600"/>
               </a:spcBef>
               <a:buSzPct val="75000"/>
-              <a:buFont typeface="Courier New" panose="02070309020205020404" pitchFamily="49" charset="0"/>
-              <a:buChar char="o"/>
+              <a:buFont typeface="Arial" panose="020B0604020202020204" pitchFamily="34" charset="0"/>
+              <a:buChar char="•"/>
             </a:pPr>
             <a:r>
               <a:rPr lang="en-US" sz="1900" kern="0" dirty="0">
@@ -5508,13 +7376,13 @@
             </a:r>
           </a:p>
           <a:p>
-            <a:pPr marL="522288" lvl="2" indent="-233363">
+            <a:pPr marL="631825" lvl="2" indent="-342900">
               <a:spcBef>
                 <a:spcPts val="600"/>
               </a:spcBef>
               <a:buSzPct val="75000"/>
-              <a:buFont typeface="Courier New" panose="02070309020205020404" pitchFamily="49" charset="0"/>
-              <a:buChar char="o"/>
+              <a:buFont typeface="Arial" panose="020B0604020202020204" pitchFamily="34" charset="0"/>
+              <a:buChar char="•"/>
             </a:pPr>
             <a:r>
               <a:rPr lang="en-US" sz="1900" kern="0" dirty="0">
@@ -5524,13 +7392,13 @@
             </a:r>
           </a:p>
           <a:p>
-            <a:pPr marL="522288" lvl="2" indent="-233363">
+            <a:pPr marL="631825" lvl="2" indent="-342900">
               <a:spcBef>
                 <a:spcPts val="600"/>
               </a:spcBef>
               <a:buSzPct val="75000"/>
-              <a:buFont typeface="Courier New" panose="02070309020205020404" pitchFamily="49" charset="0"/>
-              <a:buChar char="o"/>
+              <a:buFont typeface="Arial" panose="020B0604020202020204" pitchFamily="34" charset="0"/>
+              <a:buChar char="•"/>
             </a:pPr>
             <a:r>
               <a:rPr lang="en-US" sz="1900" kern="0" dirty="0">
@@ -5555,8 +7423,8 @@
         </p:nvSpPr>
         <p:spPr>
           <a:xfrm>
-            <a:off x="6749305" y="274851"/>
-            <a:ext cx="3186213" cy="1423866"/>
+            <a:off x="7033846" y="566251"/>
+            <a:ext cx="2901672" cy="890760"/>
           </a:xfrm>
           <a:prstGeom prst="rect">
             <a:avLst/>
@@ -5630,7 +7498,7 @@
         </p:nvSpPr>
         <p:spPr>
           <a:xfrm>
-            <a:off x="10456093" y="522594"/>
+            <a:off x="10456093" y="813994"/>
             <a:ext cx="1416871" cy="215444"/>
           </a:xfrm>
           <a:prstGeom prst="rect">
@@ -5681,7 +7549,7 @@
         </p:nvSpPr>
         <p:spPr>
           <a:xfrm>
-            <a:off x="10400406" y="274851"/>
+            <a:off x="10400406" y="566251"/>
             <a:ext cx="1528245" cy="694049"/>
           </a:xfrm>
           <a:prstGeom prst="rect">
@@ -5761,7 +7629,7 @@
         </p:nvCxnSpPr>
         <p:spPr bwMode="gray">
           <a:xfrm>
-            <a:off x="9975013" y="621099"/>
+            <a:off x="9975013" y="912499"/>
             <a:ext cx="396083" cy="0"/>
           </a:xfrm>
           <a:prstGeom prst="straightConnector1">
@@ -5780,84 +7648,6 @@
           <a:effectLst/>
         </p:spPr>
       </p:cxnSp>
-      <p:sp>
-        <p:nvSpPr>
-          <p:cNvPr id="22" name="Rectangle 21">
-            <a:extLst>
-              <a:ext uri="{FF2B5EF4-FFF2-40B4-BE49-F238E27FC236}">
-                <a16:creationId xmlns:a16="http://schemas.microsoft.com/office/drawing/2014/main" id="{D2B89D24-765F-A001-F0D1-332A4FEE236F}"/>
-              </a:ext>
-            </a:extLst>
-          </p:cNvPr>
-          <p:cNvSpPr/>
-          <p:nvPr/>
-        </p:nvSpPr>
-        <p:spPr>
-          <a:xfrm>
-            <a:off x="10579726" y="1355636"/>
-            <a:ext cx="1201155" cy="801797"/>
-          </a:xfrm>
-          <a:prstGeom prst="rect">
-            <a:avLst/>
-          </a:prstGeom>
-          <a:noFill/>
-          <a:ln w="12700" cap="flat" cmpd="sng" algn="ctr">
-            <a:solidFill>
-              <a:srgbClr val="000000"/>
-            </a:solidFill>
-            <a:prstDash val="sysDash"/>
-            <a:round/>
-            <a:headEnd type="none" w="med" len="med"/>
-            <a:tailEnd type="none" w="med" len="med"/>
-          </a:ln>
-          <a:effectLst/>
-        </p:spPr>
-        <p:txBody>
-          <a:bodyPr rot="0" spcFirstLastPara="0" vertOverflow="overflow" horzOverflow="overflow" vert="horz" wrap="square" lIns="91440" tIns="45720" rIns="91440" bIns="45720" numCol="1" spcCol="0" rtlCol="0" fromWordArt="0" anchor="ctr" anchorCtr="0" forceAA="0" compatLnSpc="1">
-            <a:prstTxWarp prst="textNoShape">
-              <a:avLst/>
-            </a:prstTxWarp>
-            <a:noAutofit/>
-          </a:bodyPr>
-          <a:lstStyle/>
-          <a:p>
-            <a:pPr marL="0" marR="0" lvl="0" indent="0" algn="ctr" defTabSz="914400" eaLnBrk="1" fontAlgn="auto" latinLnBrk="0" hangingPunct="1">
-              <a:lnSpc>
-                <a:spcPct val="100000"/>
-              </a:lnSpc>
-              <a:spcBef>
-                <a:spcPts val="0"/>
-              </a:spcBef>
-              <a:spcAft>
-                <a:spcPts val="600"/>
-              </a:spcAft>
-              <a:buClr>
-                <a:srgbClr val="000000"/>
-              </a:buClr>
-              <a:buSzTx/>
-              <a:buFont typeface="Arial"/>
-              <a:buNone/>
-              <a:tabLst/>
-              <a:defRPr/>
-            </a:pPr>
-            <a:endParaRPr kumimoji="0" lang="en-US" sz="1200" b="0" i="0" u="none" strike="noStrike" kern="0" cap="none" spc="0" normalizeH="0" baseline="0" noProof="0">
-              <a:ln>
-                <a:noFill/>
-              </a:ln>
-              <a:solidFill>
-                <a:srgbClr val="FFFFFF"/>
-              </a:solidFill>
-              <a:effectLst/>
-              <a:uLnTx/>
-              <a:uFillTx/>
-              <a:latin typeface="Arial"/>
-              <a:ea typeface="+mn-ea"/>
-              <a:cs typeface="+mn-cs"/>
-              <a:sym typeface="Arial"/>
-            </a:endParaRPr>
-          </a:p>
-        </p:txBody>
-      </p:sp>
       <p:sp>
         <p:nvSpPr>
           <p:cNvPr id="23" name="TextBox 22">
@@ -5911,92 +7701,6 @@
       </p:sp>
       <p:sp>
         <p:nvSpPr>
-          <p:cNvPr id="24" name="TextBox 23">
-            <a:extLst>
-              <a:ext uri="{FF2B5EF4-FFF2-40B4-BE49-F238E27FC236}">
-                <a16:creationId xmlns:a16="http://schemas.microsoft.com/office/drawing/2014/main" id="{ED5DC245-EAEC-323B-1CE6-2DF3B7699853}"/>
-              </a:ext>
-            </a:extLst>
-          </p:cNvPr>
-          <p:cNvSpPr txBox="1"/>
-          <p:nvPr/>
-        </p:nvSpPr>
-        <p:spPr>
-          <a:xfrm>
-            <a:off x="10659507" y="1425333"/>
-            <a:ext cx="1041499" cy="646331"/>
-          </a:xfrm>
-          <a:prstGeom prst="rect">
-            <a:avLst/>
-          </a:prstGeom>
-        </p:spPr>
-        <p:txBody>
-          <a:bodyPr wrap="square" lIns="0" tIns="0" rIns="0" bIns="0" rtlCol="0">
-            <a:spAutoFit/>
-          </a:bodyPr>
-          <a:lstStyle/>
-          <a:p>
-            <a:pPr algn="ctr">
-              <a:spcAft>
-                <a:spcPts val="600"/>
-              </a:spcAft>
-              <a:buClr>
-                <a:srgbClr val="000000"/>
-              </a:buClr>
-              <a:buFont typeface="Arial"/>
-              <a:buNone/>
-            </a:pPr>
-            <a:r>
-              <a:rPr lang="en-US" sz="1400" kern="0">
-                <a:solidFill>
-                  <a:srgbClr val="000000"/>
-                </a:solidFill>
-                <a:latin typeface="Arial"/>
-                <a:cs typeface="Arial"/>
-                <a:sym typeface="Arial"/>
-              </a:rPr>
-              <a:t>Platform Attestation Service</a:t>
-            </a:r>
-          </a:p>
-        </p:txBody>
-      </p:sp>
-      <p:cxnSp>
-        <p:nvCxnSpPr>
-          <p:cNvPr id="25" name="Straight Arrow Connector 24">
-            <a:extLst>
-              <a:ext uri="{FF2B5EF4-FFF2-40B4-BE49-F238E27FC236}">
-                <a16:creationId xmlns:a16="http://schemas.microsoft.com/office/drawing/2014/main" id="{7EBC7815-7628-0037-FF3B-B9087E3B5DCF}"/>
-              </a:ext>
-            </a:extLst>
-          </p:cNvPr>
-          <p:cNvCxnSpPr>
-            <a:cxnSpLocks/>
-          </p:cNvCxnSpPr>
-          <p:nvPr/>
-        </p:nvCxnSpPr>
-        <p:spPr bwMode="gray">
-          <a:xfrm flipH="1">
-            <a:off x="11125250" y="1009360"/>
-            <a:ext cx="1939" cy="305718"/>
-          </a:xfrm>
-          <a:prstGeom prst="straightConnector1">
-            <a:avLst/>
-          </a:prstGeom>
-          <a:noFill/>
-          <a:ln w="25400" cap="flat" cmpd="sng" algn="ctr">
-            <a:solidFill>
-              <a:srgbClr val="000000"/>
-            </a:solidFill>
-            <a:prstDash val="solid"/>
-            <a:miter lim="800000"/>
-            <a:headEnd type="triangle"/>
-            <a:tailEnd type="triangle"/>
-          </a:ln>
-          <a:effectLst/>
-        </p:spPr>
-      </p:cxnSp>
-      <p:sp>
-        <p:nvSpPr>
           <p:cNvPr id="26" name="Content Placeholder 2">
             <a:extLst>
               <a:ext uri="{FF2B5EF4-FFF2-40B4-BE49-F238E27FC236}">
@@ -6011,8 +7715,8 @@
         </p:nvSpPr>
         <p:spPr>
           <a:xfrm>
-            <a:off x="6447352" y="2634010"/>
-            <a:ext cx="5734709" cy="3325792"/>
+            <a:off x="6601767" y="2634010"/>
+            <a:ext cx="5580294" cy="3325792"/>
           </a:xfrm>
           <a:prstGeom prst="rect">
             <a:avLst/>
@@ -6264,7 +7968,7 @@
               <a:defRPr/>
             </a:pPr>
             <a:r>
-              <a:rPr kumimoji="0" lang="en-US" sz="2000" b="0" i="0" u="none" strike="noStrike" kern="1200" cap="none" spc="0" normalizeH="0" baseline="0" noProof="0">
+              <a:rPr kumimoji="0" lang="en-US" sz="2000" b="0" i="0" u="none" strike="noStrike" kern="1200" cap="none" spc="0" normalizeH="0" baseline="0" noProof="0" dirty="0">
                 <a:ln>
                   <a:noFill/>
                 </a:ln>
@@ -6303,7 +8007,7 @@
               <a:defRPr/>
             </a:pPr>
             <a:r>
-              <a:rPr kumimoji="0" lang="en-US" sz="1400" b="0" i="0" u="none" strike="noStrike" kern="1200" cap="none" spc="0" normalizeH="0" baseline="0" noProof="0">
+              <a:rPr kumimoji="0" lang="en-US" sz="1400" b="0" i="0" u="none" strike="noStrike" kern="1200" cap="none" spc="0" normalizeH="0" baseline="0" noProof="0" dirty="0">
                 <a:ln>
                   <a:noFill/>
                 </a:ln>
@@ -6321,7 +8025,7 @@
               <a:t>1. Key[</a:t>
             </a:r>
             <a:r>
-              <a:rPr kumimoji="0" lang="en-US" sz="1400" b="0" i="0" u="none" strike="noStrike" kern="1200" cap="none" spc="0" normalizeH="0" baseline="0" noProof="0" err="1">
+              <a:rPr kumimoji="0" lang="en-US" sz="1400" b="0" i="0" u="none" strike="noStrike" kern="1200" cap="none" spc="0" normalizeH="0" baseline="0" noProof="0" dirty="0" err="1">
                 <a:ln>
                   <a:noFill/>
                 </a:ln>
@@ -6339,7 +8043,7 @@
               <a:t>rsa</a:t>
             </a:r>
             <a:r>
-              <a:rPr kumimoji="0" lang="en-US" sz="1400" b="0" i="0" u="none" strike="noStrike" kern="1200" cap="none" spc="0" normalizeH="0" baseline="0" noProof="0">
+              <a:rPr kumimoji="0" lang="en-US" sz="1400" b="0" i="0" u="none" strike="noStrike" kern="1200" cap="none" spc="0" normalizeH="0" baseline="0" noProof="0" dirty="0">
                 <a:ln>
                   <a:noFill/>
                 </a:ln>
@@ -6357,7 +8061,7 @@
               <a:t>, </a:t>
             </a:r>
             <a:r>
-              <a:rPr kumimoji="0" lang="en-US" sz="1400" b="0" i="0" u="none" strike="noStrike" kern="1200" cap="none" spc="0" normalizeH="0" baseline="0" noProof="0" err="1">
+              <a:rPr kumimoji="0" lang="en-US" sz="1400" b="0" i="0" u="none" strike="noStrike" kern="1200" cap="none" spc="0" normalizeH="0" baseline="0" noProof="0" dirty="0" err="1">
                 <a:ln>
                   <a:noFill/>
                 </a:ln>
@@ -6375,7 +8079,7 @@
               <a:t>policyKey</a:t>
             </a:r>
             <a:r>
-              <a:rPr kumimoji="0" lang="en-US" sz="1400" b="0" i="0" u="none" strike="noStrike" kern="1200" cap="none" spc="0" normalizeH="0" baseline="0" noProof="0">
+              <a:rPr kumimoji="0" lang="en-US" sz="1400" b="0" i="0" u="none" strike="noStrike" kern="1200" cap="none" spc="0" normalizeH="0" baseline="0" noProof="0" dirty="0">
                 <a:ln>
                   <a:noFill/>
                 </a:ln>
@@ -6414,7 +8118,7 @@
               <a:defRPr/>
             </a:pPr>
             <a:r>
-              <a:rPr kumimoji="0" lang="en-US" sz="1400" b="0" i="0" u="none" strike="noStrike" kern="1200" cap="none" spc="0" normalizeH="0" baseline="0" noProof="0">
+              <a:rPr kumimoji="0" lang="en-US" sz="1400" b="0" i="0" u="none" strike="noStrike" kern="1200" cap="none" spc="0" normalizeH="0" baseline="0" noProof="0" dirty="0">
                 <a:ln>
                   <a:noFill/>
                 </a:ln>
@@ -6432,7 +8136,7 @@
               <a:t>2. Key[</a:t>
             </a:r>
             <a:r>
-              <a:rPr kumimoji="0" lang="en-US" sz="1400" b="0" i="0" u="none" strike="noStrike" kern="1200" cap="none" spc="0" normalizeH="0" baseline="0" noProof="0" err="1">
+              <a:rPr kumimoji="0" lang="en-US" sz="1400" b="0" i="0" u="none" strike="noStrike" kern="1200" cap="none" spc="0" normalizeH="0" baseline="0" noProof="0" dirty="0" err="1">
                 <a:ln>
                   <a:noFill/>
                 </a:ln>
@@ -6450,7 +8154,7 @@
               <a:t>rsa</a:t>
             </a:r>
             <a:r>
-              <a:rPr kumimoji="0" lang="en-US" sz="1400" b="0" i="0" u="none" strike="noStrike" kern="1200" cap="none" spc="0" normalizeH="0" baseline="0" noProof="0">
+              <a:rPr kumimoji="0" lang="en-US" sz="1400" b="0" i="0" u="none" strike="noStrike" kern="1200" cap="none" spc="0" normalizeH="0" baseline="0" noProof="0" dirty="0">
                 <a:ln>
                   <a:noFill/>
                 </a:ln>
@@ -6468,7 +8172,7 @@
               <a:t>, </a:t>
             </a:r>
             <a:r>
-              <a:rPr kumimoji="0" lang="en-US" sz="1400" b="0" i="0" u="none" strike="noStrike" kern="1200" cap="none" spc="0" normalizeH="0" baseline="0" noProof="0" err="1">
+              <a:rPr kumimoji="0" lang="en-US" sz="1400" b="0" i="0" u="none" strike="noStrike" kern="1200" cap="none" spc="0" normalizeH="0" baseline="0" noProof="0" dirty="0" err="1">
                 <a:ln>
                   <a:noFill/>
                 </a:ln>
@@ -6486,7 +8190,7 @@
               <a:t>policyKey</a:t>
             </a:r>
             <a:r>
-              <a:rPr kumimoji="0" lang="en-US" sz="1400" b="0" i="0" u="none" strike="noStrike" kern="1200" cap="none" spc="0" normalizeH="0" baseline="0" noProof="0">
+              <a:rPr kumimoji="0" lang="en-US" sz="1400" b="0" i="0" u="none" strike="noStrike" kern="1200" cap="none" spc="0" normalizeH="0" baseline="0" noProof="0" dirty="0">
                 <a:ln>
                   <a:noFill/>
                 </a:ln>
@@ -6504,7 +8208,7 @@
               <a:t>, ... ] says </a:t>
             </a:r>
             <a:r>
-              <a:rPr kumimoji="0" lang="en-US" sz="1400" b="0" i="0" u="none" strike="noStrike" kern="1200" cap="none" spc="0" normalizeH="0" baseline="0" noProof="0">
+              <a:rPr kumimoji="0" lang="en-US" sz="1400" b="0" i="0" u="none" strike="noStrike" kern="1200" cap="none" spc="0" normalizeH="0" baseline="0" noProof="0" dirty="0">
                 <a:ln>
                   <a:noFill/>
                 </a:ln>
@@ -6522,7 +8226,7 @@
               <a:t>Measurement</a:t>
             </a:r>
             <a:r>
-              <a:rPr kumimoji="0" lang="en-US" sz="1400" b="0" i="0" u="none" strike="noStrike" kern="1200" cap="none" spc="0" normalizeH="0" baseline="0" noProof="0">
+              <a:rPr kumimoji="0" lang="en-US" sz="1400" b="0" i="0" u="none" strike="noStrike" kern="1200" cap="none" spc="0" normalizeH="0" baseline="0" noProof="0" dirty="0">
                 <a:ln>
                   <a:noFill/>
                 </a:ln>
@@ -6561,7 +8265,7 @@
               <a:defRPr/>
             </a:pPr>
             <a:r>
-              <a:rPr kumimoji="0" lang="en-US" sz="1400" b="0" i="0" u="none" strike="noStrike" kern="1200" cap="none" spc="0" normalizeH="0" baseline="0" noProof="0">
+              <a:rPr kumimoji="0" lang="en-US" sz="1400" b="0" i="0" u="none" strike="noStrike" kern="1200" cap="none" spc="0" normalizeH="0" baseline="0" noProof="0" dirty="0">
                 <a:ln>
                   <a:noFill/>
                 </a:ln>
@@ -6579,7 +8283,7 @@
               <a:t>3. Key[</a:t>
             </a:r>
             <a:r>
-              <a:rPr kumimoji="0" lang="en-US" sz="1400" b="0" i="0" u="none" strike="noStrike" kern="1200" cap="none" spc="0" normalizeH="0" baseline="0" noProof="0" err="1">
+              <a:rPr kumimoji="0" lang="en-US" sz="1400" b="0" i="0" u="none" strike="noStrike" kern="1200" cap="none" spc="0" normalizeH="0" baseline="0" noProof="0" dirty="0" err="1">
                 <a:ln>
                   <a:noFill/>
                 </a:ln>
@@ -6597,7 +8301,7 @@
               <a:t>rsa</a:t>
             </a:r>
             <a:r>
-              <a:rPr kumimoji="0" lang="en-US" sz="1400" b="0" i="0" u="none" strike="noStrike" kern="1200" cap="none" spc="0" normalizeH="0" baseline="0" noProof="0">
+              <a:rPr kumimoji="0" lang="en-US" sz="1400" b="0" i="0" u="none" strike="noStrike" kern="1200" cap="none" spc="0" normalizeH="0" baseline="0" noProof="0" dirty="0">
                 <a:ln>
                   <a:noFill/>
                 </a:ln>
@@ -6615,7 +8319,7 @@
               <a:t>, </a:t>
             </a:r>
             <a:r>
-              <a:rPr kumimoji="0" lang="en-US" sz="1400" b="0" i="0" u="none" strike="noStrike" kern="1200" cap="none" spc="0" normalizeH="0" baseline="0" noProof="0" err="1">
+              <a:rPr kumimoji="0" lang="en-US" sz="1400" b="0" i="0" u="none" strike="noStrike" kern="1200" cap="none" spc="0" normalizeH="0" baseline="0" noProof="0" dirty="0" err="1">
                 <a:ln>
                   <a:noFill/>
                 </a:ln>
@@ -6633,7 +8337,7 @@
               <a:t>policyKey</a:t>
             </a:r>
             <a:r>
-              <a:rPr kumimoji="0" lang="en-US" sz="1400" b="0" i="0" u="none" strike="noStrike" kern="1200" cap="none" spc="0" normalizeH="0" baseline="0" noProof="0">
+              <a:rPr kumimoji="0" lang="en-US" sz="1400" b="0" i="0" u="none" strike="noStrike" kern="1200" cap="none" spc="0" normalizeH="0" baseline="0" noProof="0" dirty="0">
                 <a:ln>
                   <a:noFill/>
                 </a:ln>
@@ -6651,7 +8355,7 @@
               <a:t>, ...] says Key[</a:t>
             </a:r>
             <a:r>
-              <a:rPr kumimoji="0" lang="en-US" sz="1400" b="0" i="0" u="none" strike="noStrike" kern="1200" cap="none" spc="0" normalizeH="0" baseline="0" noProof="0" err="1">
+              <a:rPr kumimoji="0" lang="en-US" sz="1400" b="0" i="0" u="none" strike="noStrike" kern="1200" cap="none" spc="0" normalizeH="0" baseline="0" noProof="0" dirty="0" err="1">
                 <a:ln>
                   <a:noFill/>
                 </a:ln>
@@ -6669,7 +8373,7 @@
               <a:t>rsa</a:t>
             </a:r>
             <a:r>
-              <a:rPr kumimoji="0" lang="en-US" sz="1400" b="0" i="0" u="none" strike="noStrike" kern="1200" cap="none" spc="0" normalizeH="0" baseline="0" noProof="0">
+              <a:rPr kumimoji="0" lang="en-US" sz="1400" b="0" i="0" u="none" strike="noStrike" kern="1200" cap="none" spc="0" normalizeH="0" baseline="0" noProof="0" dirty="0">
                 <a:ln>
                   <a:noFill/>
                 </a:ln>
@@ -6687,7 +8391,7 @@
               <a:t>, </a:t>
             </a:r>
             <a:r>
-              <a:rPr kumimoji="0" lang="en-US" sz="1400" b="0" i="0" u="none" strike="noStrike" kern="1200" cap="none" spc="0" normalizeH="0" baseline="0" noProof="0" err="1">
+              <a:rPr kumimoji="0" lang="en-US" sz="1400" b="0" i="0" u="none" strike="noStrike" kern="1200" cap="none" spc="0" normalizeH="0" baseline="0" noProof="0" dirty="0" err="1">
                 <a:ln>
                   <a:noFill/>
                 </a:ln>
@@ -6705,7 +8409,7 @@
               <a:t>platformKey</a:t>
             </a:r>
             <a:r>
-              <a:rPr kumimoji="0" lang="en-US" sz="1400" b="0" i="0" u="none" strike="noStrike" kern="1200" cap="none" spc="0" normalizeH="0" baseline="0" noProof="0">
+              <a:rPr kumimoji="0" lang="en-US" sz="1400" b="0" i="0" u="none" strike="noStrike" kern="1200" cap="none" spc="0" normalizeH="0" baseline="0" noProof="0" dirty="0">
                 <a:ln>
                   <a:noFill/>
                 </a:ln>
@@ -6744,7 +8448,7 @@
               <a:defRPr/>
             </a:pPr>
             <a:r>
-              <a:rPr kumimoji="0" lang="en-US" sz="1400" b="0" i="0" u="none" strike="noStrike" kern="1200" cap="none" spc="0" normalizeH="0" baseline="0" noProof="0">
+              <a:rPr kumimoji="0" lang="en-US" sz="1400" b="0" i="0" u="none" strike="noStrike" kern="1200" cap="none" spc="0" normalizeH="0" baseline="0" noProof="0" dirty="0">
                 <a:ln>
                   <a:noFill/>
                 </a:ln>
@@ -6762,7 +8466,7 @@
               <a:t>4. Key[</a:t>
             </a:r>
             <a:r>
-              <a:rPr kumimoji="0" lang="en-US" sz="1400" b="0" i="0" u="none" strike="noStrike" kern="1200" cap="none" spc="0" normalizeH="0" baseline="0" noProof="0" err="1">
+              <a:rPr kumimoji="0" lang="en-US" sz="1400" b="0" i="0" u="none" strike="noStrike" kern="1200" cap="none" spc="0" normalizeH="0" baseline="0" noProof="0" dirty="0" err="1">
                 <a:ln>
                   <a:noFill/>
                 </a:ln>
@@ -6780,7 +8484,7 @@
               <a:t>rsa</a:t>
             </a:r>
             <a:r>
-              <a:rPr kumimoji="0" lang="en-US" sz="1400" b="0" i="0" u="none" strike="noStrike" kern="1200" cap="none" spc="0" normalizeH="0" baseline="0" noProof="0">
+              <a:rPr kumimoji="0" lang="en-US" sz="1400" b="0" i="0" u="none" strike="noStrike" kern="1200" cap="none" spc="0" normalizeH="0" baseline="0" noProof="0" dirty="0">
                 <a:ln>
                   <a:noFill/>
                 </a:ln>
@@ -6798,7 +8502,7 @@
               <a:t>, </a:t>
             </a:r>
             <a:r>
-              <a:rPr kumimoji="0" lang="en-US" sz="1400" b="0" i="0" u="none" strike="noStrike" kern="1200" cap="none" spc="0" normalizeH="0" baseline="0" noProof="0" err="1">
+              <a:rPr kumimoji="0" lang="en-US" sz="1400" b="0" i="0" u="none" strike="noStrike" kern="1200" cap="none" spc="0" normalizeH="0" baseline="0" noProof="0" dirty="0" err="1">
                 <a:ln>
                   <a:noFill/>
                 </a:ln>
@@ -6816,7 +8520,7 @@
               <a:t>platformKey</a:t>
             </a:r>
             <a:r>
-              <a:rPr kumimoji="0" lang="en-US" sz="1400" b="0" i="0" u="none" strike="noStrike" kern="1200" cap="none" spc="0" normalizeH="0" baseline="0" noProof="0">
+              <a:rPr kumimoji="0" lang="en-US" sz="1400" b="0" i="0" u="none" strike="noStrike" kern="1200" cap="none" spc="0" normalizeH="0" baseline="0" noProof="0" dirty="0">
                 <a:ln>
                   <a:noFill/>
                 </a:ln>
@@ -6834,7 +8538,7 @@
               <a:t>, ...] says Key[</a:t>
             </a:r>
             <a:r>
-              <a:rPr kumimoji="0" lang="en-US" sz="1400" b="0" i="0" u="none" strike="noStrike" kern="1200" cap="none" spc="0" normalizeH="0" baseline="0" noProof="0" err="1">
+              <a:rPr kumimoji="0" lang="en-US" sz="1400" b="0" i="0" u="none" strike="noStrike" kern="1200" cap="none" spc="0" normalizeH="0" baseline="0" noProof="0" dirty="0" err="1">
                 <a:ln>
                   <a:noFill/>
                 </a:ln>
@@ -6852,7 +8556,7 @@
               <a:t>rsa</a:t>
             </a:r>
             <a:r>
-              <a:rPr kumimoji="0" lang="en-US" sz="1400" b="0" i="0" u="none" strike="noStrike" kern="1200" cap="none" spc="0" normalizeH="0" baseline="0" noProof="0">
+              <a:rPr kumimoji="0" lang="en-US" sz="1400" b="0" i="0" u="none" strike="noStrike" kern="1200" cap="none" spc="0" normalizeH="0" baseline="0" noProof="0" dirty="0">
                 <a:ln>
                   <a:noFill/>
                 </a:ln>
@@ -6870,7 +8574,7 @@
               <a:t>, </a:t>
             </a:r>
             <a:r>
-              <a:rPr kumimoji="0" lang="en-US" sz="1400" b="0" i="0" u="none" strike="noStrike" kern="1200" cap="none" spc="0" normalizeH="0" baseline="0" noProof="0" err="1">
+              <a:rPr kumimoji="0" lang="en-US" sz="1400" b="0" i="0" u="none" strike="noStrike" kern="1200" cap="none" spc="0" normalizeH="0" baseline="0" noProof="0" dirty="0" err="1">
                 <a:ln>
                   <a:noFill/>
                 </a:ln>
@@ -6888,7 +8592,7 @@
               <a:t>attestKey</a:t>
             </a:r>
             <a:r>
-              <a:rPr kumimoji="0" lang="en-US" sz="1400" b="0" i="0" u="none" strike="noStrike" kern="1200" cap="none" spc="0" normalizeH="0" baseline="0" noProof="0">
+              <a:rPr kumimoji="0" lang="en-US" sz="1400" b="0" i="0" u="none" strike="noStrike" kern="1200" cap="none" spc="0" normalizeH="0" baseline="0" noProof="0" dirty="0">
                 <a:ln>
                   <a:noFill/>
                 </a:ln>
@@ -6926,7 +8630,7 @@
               <a:tabLst/>
               <a:defRPr/>
             </a:pPr>
-            <a:endParaRPr kumimoji="0" lang="en-US" sz="2000" b="0" i="0" u="none" strike="noStrike" kern="1200" cap="none" spc="0" normalizeH="0" baseline="0" noProof="0">
+            <a:endParaRPr kumimoji="0" lang="en-US" sz="2000" b="0" i="0" u="none" strike="noStrike" kern="1200" cap="none" spc="0" normalizeH="0" baseline="0" noProof="0" dirty="0">
               <a:ln>
                 <a:noFill/>
               </a:ln>
@@ -6960,8 +8664,8 @@
         </p:nvSpPr>
         <p:spPr>
           <a:xfrm>
-            <a:off x="395536" y="765079"/>
-            <a:ext cx="5105325" cy="1062927"/>
+            <a:off x="411119" y="869566"/>
+            <a:ext cx="6338186" cy="1062927"/>
           </a:xfrm>
           <a:prstGeom prst="rect">
             <a:avLst/>
@@ -7229,7 +8933,7 @@
               </a:buClr>
             </a:pPr>
             <a:r>
-              <a:rPr lang="en-US" sz="3100" kern="0">
+              <a:rPr lang="en-US" sz="2400" kern="0" dirty="0">
                 <a:solidFill>
                   <a:srgbClr val="4472C4"/>
                 </a:solidFill>
@@ -7535,7 +9239,7 @@
               <a:buNone/>
             </a:pPr>
             <a:r>
-              <a:rPr lang="en-US" sz="2400" kern="0" dirty="0">
+              <a:rPr lang="en-US" sz="2000" kern="0" dirty="0">
                 <a:solidFill>
                   <a:srgbClr val="00B0F0"/>
                 </a:solidFill>
@@ -7561,7 +9265,7 @@
 </p:sld>
 </file>
 
-<file path=ppt/slides/slide12.xml><?xml version="1.0" encoding="utf-8"?>
+<file path=ppt/slides/slide13.xml><?xml version="1.0" encoding="utf-8"?>
 <p:sld xmlns:a="http://schemas.openxmlformats.org/drawingml/2006/main" xmlns:r="http://schemas.openxmlformats.org/officeDocument/2006/relationships" xmlns:p="http://schemas.openxmlformats.org/presentationml/2006/main">
   <p:cSld>
     <p:spTree>
@@ -8392,7 +10096,7 @@
 </p:sld>
 </file>
 
-<file path=ppt/slides/slide13.xml><?xml version="1.0" encoding="utf-8"?>
+<file path=ppt/slides/slide14.xml><?xml version="1.0" encoding="utf-8"?>
 <p:sld xmlns:a="http://schemas.openxmlformats.org/drawingml/2006/main" xmlns:r="http://schemas.openxmlformats.org/officeDocument/2006/relationships" xmlns:p="http://schemas.openxmlformats.org/presentationml/2006/main">
   <p:cSld>
     <p:spTree>
@@ -8471,7 +10175,7 @@
 </p:sld>
 </file>
 
-<file path=ppt/slides/slide14.xml><?xml version="1.0" encoding="utf-8"?>
+<file path=ppt/slides/slide15.xml><?xml version="1.0" encoding="utf-8"?>
 <p:sld xmlns:a="http://schemas.openxmlformats.org/drawingml/2006/main" xmlns:r="http://schemas.openxmlformats.org/officeDocument/2006/relationships" xmlns:p="http://schemas.openxmlformats.org/presentationml/2006/main">
   <p:cSld>
     <p:spTree>
@@ -13802,6 +15506,1001 @@
   <p:cSld>
     <p:spTree>
       <p:nvGrpSpPr>
+        <p:cNvPr id="1" name="">
+          <a:extLst>
+            <a:ext uri="{FF2B5EF4-FFF2-40B4-BE49-F238E27FC236}">
+              <a16:creationId xmlns:a16="http://schemas.microsoft.com/office/drawing/2014/main" id="{580BC784-978C-E98D-C712-8B33E3A6E18F}"/>
+            </a:ext>
+          </a:extLst>
+        </p:cNvPr>
+        <p:cNvGrpSpPr/>
+        <p:nvPr/>
+      </p:nvGrpSpPr>
+      <p:grpSpPr>
+        <a:xfrm>
+          <a:off x="0" y="0"/>
+          <a:ext cx="0" cy="0"/>
+          <a:chOff x="0" y="0"/>
+          <a:chExt cx="0" cy="0"/>
+        </a:xfrm>
+      </p:grpSpPr>
+      <p:sp>
+        <p:nvSpPr>
+          <p:cNvPr id="5" name="Title 1">
+            <a:extLst>
+              <a:ext uri="{FF2B5EF4-FFF2-40B4-BE49-F238E27FC236}">
+                <a16:creationId xmlns:a16="http://schemas.microsoft.com/office/drawing/2014/main" id="{78D67318-0FF1-6BD3-6006-4E5CD28CE59B}"/>
+              </a:ext>
+            </a:extLst>
+          </p:cNvPr>
+          <p:cNvSpPr txBox="1">
+            <a:spLocks/>
+          </p:cNvSpPr>
+          <p:nvPr/>
+        </p:nvSpPr>
+        <p:spPr>
+          <a:xfrm>
+            <a:off x="782839" y="125675"/>
+            <a:ext cx="11025187" cy="793750"/>
+          </a:xfrm>
+          <a:prstGeom prst="rect">
+            <a:avLst/>
+          </a:prstGeom>
+          <a:noFill/>
+          <a:ln>
+            <a:noFill/>
+          </a:ln>
+        </p:spPr>
+        <p:txBody>
+          <a:bodyPr spcFirstLastPara="1" wrap="square" lIns="45700" tIns="45700" rIns="45700" bIns="45700" anchor="ctr" anchorCtr="0">
+            <a:normAutofit/>
+          </a:bodyPr>
+          <a:lstStyle>
+            <a:defPPr marR="0" lvl="0" algn="l" rtl="0">
+              <a:lnSpc>
+                <a:spcPct val="100000"/>
+              </a:lnSpc>
+              <a:spcBef>
+                <a:spcPts val="0"/>
+              </a:spcBef>
+              <a:spcAft>
+                <a:spcPts val="0"/>
+              </a:spcAft>
+            </a:defPPr>
+            <a:lvl1pPr marR="0" lvl="0" algn="l" rtl="0">
+              <a:lnSpc>
+                <a:spcPct val="90000"/>
+              </a:lnSpc>
+              <a:spcBef>
+                <a:spcPts val="0"/>
+              </a:spcBef>
+              <a:spcAft>
+                <a:spcPts val="0"/>
+              </a:spcAft>
+              <a:buClr>
+                <a:srgbClr val="292929"/>
+              </a:buClr>
+              <a:buSzPts val="3600"/>
+              <a:buFont typeface="Arial"/>
+              <a:buNone/>
+              <a:defRPr sz="3600" b="1" i="0" u="none" strike="noStrike" cap="none">
+                <a:solidFill>
+                  <a:srgbClr val="292929"/>
+                </a:solidFill>
+                <a:latin typeface="Arial"/>
+                <a:ea typeface="Arial"/>
+                <a:cs typeface="Arial"/>
+                <a:sym typeface="Arial"/>
+              </a:defRPr>
+            </a:lvl1pPr>
+            <a:lvl2pPr marR="0" lvl="1" algn="l" rtl="0">
+              <a:lnSpc>
+                <a:spcPct val="90000"/>
+              </a:lnSpc>
+              <a:spcBef>
+                <a:spcPts val="0"/>
+              </a:spcBef>
+              <a:spcAft>
+                <a:spcPts val="0"/>
+              </a:spcAft>
+              <a:buClr>
+                <a:srgbClr val="000000"/>
+              </a:buClr>
+              <a:buSzPts val="4400"/>
+              <a:buFont typeface="Calibri"/>
+              <a:buNone/>
+              <a:defRPr sz="4400" b="0" i="0" u="none" strike="noStrike" cap="none">
+                <a:solidFill>
+                  <a:srgbClr val="000000"/>
+                </a:solidFill>
+                <a:latin typeface="Calibri"/>
+                <a:ea typeface="Calibri"/>
+                <a:cs typeface="Calibri"/>
+                <a:sym typeface="Calibri"/>
+              </a:defRPr>
+            </a:lvl2pPr>
+            <a:lvl3pPr marR="0" lvl="2" algn="l" rtl="0">
+              <a:lnSpc>
+                <a:spcPct val="90000"/>
+              </a:lnSpc>
+              <a:spcBef>
+                <a:spcPts val="0"/>
+              </a:spcBef>
+              <a:spcAft>
+                <a:spcPts val="0"/>
+              </a:spcAft>
+              <a:buClr>
+                <a:srgbClr val="000000"/>
+              </a:buClr>
+              <a:buSzPts val="4400"/>
+              <a:buFont typeface="Calibri"/>
+              <a:buNone/>
+              <a:defRPr sz="4400" b="0" i="0" u="none" strike="noStrike" cap="none">
+                <a:solidFill>
+                  <a:srgbClr val="000000"/>
+                </a:solidFill>
+                <a:latin typeface="Calibri"/>
+                <a:ea typeface="Calibri"/>
+                <a:cs typeface="Calibri"/>
+                <a:sym typeface="Calibri"/>
+              </a:defRPr>
+            </a:lvl3pPr>
+            <a:lvl4pPr marR="0" lvl="3" algn="l" rtl="0">
+              <a:lnSpc>
+                <a:spcPct val="90000"/>
+              </a:lnSpc>
+              <a:spcBef>
+                <a:spcPts val="0"/>
+              </a:spcBef>
+              <a:spcAft>
+                <a:spcPts val="0"/>
+              </a:spcAft>
+              <a:buClr>
+                <a:srgbClr val="000000"/>
+              </a:buClr>
+              <a:buSzPts val="4400"/>
+              <a:buFont typeface="Calibri"/>
+              <a:buNone/>
+              <a:defRPr sz="4400" b="0" i="0" u="none" strike="noStrike" cap="none">
+                <a:solidFill>
+                  <a:srgbClr val="000000"/>
+                </a:solidFill>
+                <a:latin typeface="Calibri"/>
+                <a:ea typeface="Calibri"/>
+                <a:cs typeface="Calibri"/>
+                <a:sym typeface="Calibri"/>
+              </a:defRPr>
+            </a:lvl4pPr>
+            <a:lvl5pPr marR="0" lvl="4" algn="l" rtl="0">
+              <a:lnSpc>
+                <a:spcPct val="90000"/>
+              </a:lnSpc>
+              <a:spcBef>
+                <a:spcPts val="0"/>
+              </a:spcBef>
+              <a:spcAft>
+                <a:spcPts val="0"/>
+              </a:spcAft>
+              <a:buClr>
+                <a:srgbClr val="000000"/>
+              </a:buClr>
+              <a:buSzPts val="4400"/>
+              <a:buFont typeface="Calibri"/>
+              <a:buNone/>
+              <a:defRPr sz="4400" b="0" i="0" u="none" strike="noStrike" cap="none">
+                <a:solidFill>
+                  <a:srgbClr val="000000"/>
+                </a:solidFill>
+                <a:latin typeface="Calibri"/>
+                <a:ea typeface="Calibri"/>
+                <a:cs typeface="Calibri"/>
+                <a:sym typeface="Calibri"/>
+              </a:defRPr>
+            </a:lvl5pPr>
+            <a:lvl6pPr marR="0" lvl="5" algn="l" rtl="0">
+              <a:lnSpc>
+                <a:spcPct val="90000"/>
+              </a:lnSpc>
+              <a:spcBef>
+                <a:spcPts val="0"/>
+              </a:spcBef>
+              <a:spcAft>
+                <a:spcPts val="0"/>
+              </a:spcAft>
+              <a:buClr>
+                <a:srgbClr val="000000"/>
+              </a:buClr>
+              <a:buSzPts val="4400"/>
+              <a:buFont typeface="Calibri"/>
+              <a:buNone/>
+              <a:defRPr sz="4400" b="0" i="0" u="none" strike="noStrike" cap="none">
+                <a:solidFill>
+                  <a:srgbClr val="000000"/>
+                </a:solidFill>
+                <a:latin typeface="Calibri"/>
+                <a:ea typeface="Calibri"/>
+                <a:cs typeface="Calibri"/>
+                <a:sym typeface="Calibri"/>
+              </a:defRPr>
+            </a:lvl6pPr>
+            <a:lvl7pPr marR="0" lvl="6" algn="l" rtl="0">
+              <a:lnSpc>
+                <a:spcPct val="90000"/>
+              </a:lnSpc>
+              <a:spcBef>
+                <a:spcPts val="0"/>
+              </a:spcBef>
+              <a:spcAft>
+                <a:spcPts val="0"/>
+              </a:spcAft>
+              <a:buClr>
+                <a:srgbClr val="000000"/>
+              </a:buClr>
+              <a:buSzPts val="4400"/>
+              <a:buFont typeface="Calibri"/>
+              <a:buNone/>
+              <a:defRPr sz="4400" b="0" i="0" u="none" strike="noStrike" cap="none">
+                <a:solidFill>
+                  <a:srgbClr val="000000"/>
+                </a:solidFill>
+                <a:latin typeface="Calibri"/>
+                <a:ea typeface="Calibri"/>
+                <a:cs typeface="Calibri"/>
+                <a:sym typeface="Calibri"/>
+              </a:defRPr>
+            </a:lvl7pPr>
+            <a:lvl8pPr marR="0" lvl="7" algn="l" rtl="0">
+              <a:lnSpc>
+                <a:spcPct val="90000"/>
+              </a:lnSpc>
+              <a:spcBef>
+                <a:spcPts val="0"/>
+              </a:spcBef>
+              <a:spcAft>
+                <a:spcPts val="0"/>
+              </a:spcAft>
+              <a:buClr>
+                <a:srgbClr val="000000"/>
+              </a:buClr>
+              <a:buSzPts val="4400"/>
+              <a:buFont typeface="Calibri"/>
+              <a:buNone/>
+              <a:defRPr sz="4400" b="0" i="0" u="none" strike="noStrike" cap="none">
+                <a:solidFill>
+                  <a:srgbClr val="000000"/>
+                </a:solidFill>
+                <a:latin typeface="Calibri"/>
+                <a:ea typeface="Calibri"/>
+                <a:cs typeface="Calibri"/>
+                <a:sym typeface="Calibri"/>
+              </a:defRPr>
+            </a:lvl8pPr>
+            <a:lvl9pPr marR="0" lvl="8" algn="l" rtl="0">
+              <a:lnSpc>
+                <a:spcPct val="90000"/>
+              </a:lnSpc>
+              <a:spcBef>
+                <a:spcPts val="0"/>
+              </a:spcBef>
+              <a:spcAft>
+                <a:spcPts val="0"/>
+              </a:spcAft>
+              <a:buClr>
+                <a:srgbClr val="000000"/>
+              </a:buClr>
+              <a:buSzPts val="4400"/>
+              <a:buFont typeface="Calibri"/>
+              <a:buNone/>
+              <a:defRPr sz="4400" b="0" i="0" u="none" strike="noStrike" cap="none">
+                <a:solidFill>
+                  <a:srgbClr val="000000"/>
+                </a:solidFill>
+                <a:latin typeface="Calibri"/>
+                <a:ea typeface="Calibri"/>
+                <a:cs typeface="Calibri"/>
+                <a:sym typeface="Calibri"/>
+              </a:defRPr>
+            </a:lvl9pPr>
+          </a:lstStyle>
+          <a:p>
+            <a:pPr marL="0" marR="0" lvl="0" indent="0" algn="l" defTabSz="914400" rtl="0" eaLnBrk="1" fontAlgn="auto" latinLnBrk="0" hangingPunct="1">
+              <a:lnSpc>
+                <a:spcPct val="90000"/>
+              </a:lnSpc>
+              <a:spcBef>
+                <a:spcPts val="0"/>
+              </a:spcBef>
+              <a:spcAft>
+                <a:spcPts val="0"/>
+              </a:spcAft>
+              <a:buClr>
+                <a:srgbClr val="292929"/>
+              </a:buClr>
+              <a:buSzPts val="3600"/>
+              <a:buFont typeface="Arial"/>
+              <a:buNone/>
+              <a:tabLst/>
+              <a:defRPr/>
+            </a:pPr>
+            <a:r>
+              <a:rPr kumimoji="0" lang="en-US" sz="4000" b="1" i="0" u="none" strike="noStrike" kern="0" cap="none" spc="0" normalizeH="0" baseline="0" noProof="0" dirty="0">
+                <a:ln>
+                  <a:noFill/>
+                </a:ln>
+                <a:solidFill>
+                  <a:srgbClr val="292929"/>
+                </a:solidFill>
+                <a:effectLst/>
+                <a:uLnTx/>
+                <a:uFillTx/>
+                <a:latin typeface="+mn-lt"/>
+                <a:cs typeface="Arial"/>
+                <a:sym typeface="Arial"/>
+              </a:rPr>
+              <a:t>Overview</a:t>
+            </a:r>
+            <a:endParaRPr kumimoji="0" lang="en-US" sz="3200" b="1" i="0" u="none" strike="noStrike" kern="0" cap="none" spc="0" normalizeH="0" baseline="0" noProof="0" dirty="0">
+              <a:ln>
+                <a:noFill/>
+              </a:ln>
+              <a:solidFill>
+                <a:srgbClr val="292929"/>
+              </a:solidFill>
+              <a:effectLst/>
+              <a:uLnTx/>
+              <a:uFillTx/>
+              <a:latin typeface="+mn-lt"/>
+              <a:cs typeface="Arial"/>
+              <a:sym typeface="Arial"/>
+            </a:endParaRPr>
+          </a:p>
+        </p:txBody>
+      </p:sp>
+      <p:sp>
+        <p:nvSpPr>
+          <p:cNvPr id="6" name="Content Placeholder 7">
+            <a:extLst>
+              <a:ext uri="{FF2B5EF4-FFF2-40B4-BE49-F238E27FC236}">
+                <a16:creationId xmlns:a16="http://schemas.microsoft.com/office/drawing/2014/main" id="{48967AD5-A36B-253D-8993-A38D0214C9A5}"/>
+              </a:ext>
+            </a:extLst>
+          </p:cNvPr>
+          <p:cNvSpPr txBox="1">
+            <a:spLocks/>
+          </p:cNvSpPr>
+          <p:nvPr/>
+        </p:nvSpPr>
+        <p:spPr bwMode="ltGray">
+          <a:xfrm>
+            <a:off x="383974" y="919425"/>
+            <a:ext cx="11181311" cy="5305529"/>
+          </a:xfrm>
+          <a:prstGeom prst="rect">
+            <a:avLst/>
+          </a:prstGeom>
+          <a:noFill/>
+        </p:spPr>
+        <p:txBody>
+          <a:bodyPr vert="horz" lIns="365760" tIns="228600" rIns="228600" bIns="228600" rtlCol="0">
+            <a:noAutofit/>
+          </a:bodyPr>
+          <a:lstStyle>
+            <a:lvl1pPr marL="0" indent="0" algn="l" defTabSz="914400" rtl="0" eaLnBrk="1" latinLnBrk="0" hangingPunct="1">
+              <a:lnSpc>
+                <a:spcPct val="100000"/>
+              </a:lnSpc>
+              <a:spcBef>
+                <a:spcPts val="1200"/>
+              </a:spcBef>
+              <a:buClr>
+                <a:schemeClr val="tx1">
+                  <a:lumMod val="60000"/>
+                  <a:lumOff val="40000"/>
+                </a:schemeClr>
+              </a:buClr>
+              <a:buSzPct val="90000"/>
+              <a:buFont typeface="Arial" panose="020B0604020202020204" pitchFamily="34" charset="0"/>
+              <a:buChar char="​"/>
+              <a:defRPr lang="en-US" sz="1800" kern="1200" dirty="0">
+                <a:solidFill>
+                  <a:schemeClr val="tx1"/>
+                </a:solidFill>
+                <a:latin typeface="+mn-lt"/>
+                <a:ea typeface="+mn-ea"/>
+                <a:cs typeface="+mn-cs"/>
+              </a:defRPr>
+            </a:lvl1pPr>
+            <a:lvl2pPr marL="457200" indent="-184150" algn="l" defTabSz="914400" rtl="0" eaLnBrk="1" latinLnBrk="0" hangingPunct="1">
+              <a:lnSpc>
+                <a:spcPct val="100000"/>
+              </a:lnSpc>
+              <a:spcBef>
+                <a:spcPts val="1200"/>
+              </a:spcBef>
+              <a:buClr>
+                <a:schemeClr val="bg1"/>
+              </a:buClr>
+              <a:buSzPct val="90000"/>
+              <a:buFont typeface="Arial" panose="020B0604020202020204" pitchFamily="34" charset="0"/>
+              <a:buChar char="•"/>
+              <a:defRPr lang="en-US" sz="1600" kern="1200" dirty="0">
+                <a:solidFill>
+                  <a:schemeClr val="bg1"/>
+                </a:solidFill>
+                <a:latin typeface="+mn-lt"/>
+                <a:ea typeface="+mn-ea"/>
+                <a:cs typeface="+mn-cs"/>
+              </a:defRPr>
+            </a:lvl2pPr>
+            <a:lvl3pPr marL="744538" indent="-169863" algn="l" defTabSz="914400" rtl="0" eaLnBrk="1" latinLnBrk="0" hangingPunct="1">
+              <a:lnSpc>
+                <a:spcPct val="100000"/>
+              </a:lnSpc>
+              <a:spcBef>
+                <a:spcPts val="1200"/>
+              </a:spcBef>
+              <a:spcAft>
+                <a:spcPts val="0"/>
+              </a:spcAft>
+              <a:buClr>
+                <a:schemeClr val="bg1"/>
+              </a:buClr>
+              <a:buSzPct val="90000"/>
+              <a:buFont typeface="Camphor Std" panose="020B0504030404020204" pitchFamily="34" charset="0"/>
+              <a:buChar char="–"/>
+              <a:defRPr lang="en-US" sz="1400" kern="1200" dirty="0">
+                <a:solidFill>
+                  <a:schemeClr val="bg1"/>
+                </a:solidFill>
+                <a:latin typeface="+mn-lt"/>
+                <a:ea typeface="+mn-ea"/>
+                <a:cs typeface="+mn-cs"/>
+              </a:defRPr>
+            </a:lvl3pPr>
+            <a:lvl4pPr marL="969963" indent="-166688" algn="l" defTabSz="914400" rtl="0" eaLnBrk="1" latinLnBrk="0" hangingPunct="1">
+              <a:lnSpc>
+                <a:spcPct val="100000"/>
+              </a:lnSpc>
+              <a:spcBef>
+                <a:spcPts val="1200"/>
+              </a:spcBef>
+              <a:buClr>
+                <a:schemeClr val="bg1"/>
+              </a:buClr>
+              <a:buSzPct val="90000"/>
+              <a:buFont typeface="Arial" panose="020B0604020202020204" pitchFamily="34" charset="0"/>
+              <a:buChar char="•"/>
+              <a:defRPr lang="en-US" sz="1200" kern="1200" dirty="0">
+                <a:solidFill>
+                  <a:schemeClr val="bg1"/>
+                </a:solidFill>
+                <a:latin typeface="+mn-lt"/>
+                <a:ea typeface="+mn-ea"/>
+                <a:cs typeface="+mn-cs"/>
+              </a:defRPr>
+            </a:lvl4pPr>
+            <a:lvl5pPr marL="1143000" indent="-138113" algn="l" defTabSz="914400" rtl="0" eaLnBrk="1" latinLnBrk="0" hangingPunct="1">
+              <a:lnSpc>
+                <a:spcPct val="100000"/>
+              </a:lnSpc>
+              <a:spcBef>
+                <a:spcPts val="1200"/>
+              </a:spcBef>
+              <a:buClr>
+                <a:schemeClr val="bg1"/>
+              </a:buClr>
+              <a:buSzPct val="90000"/>
+              <a:buFont typeface="Camphor Std" panose="020B0504030404020204" pitchFamily="34" charset="0"/>
+              <a:buChar char="–"/>
+              <a:tabLst/>
+              <a:defRPr lang="en-US" sz="1200" kern="1200" dirty="0">
+                <a:solidFill>
+                  <a:schemeClr val="bg1"/>
+                </a:solidFill>
+                <a:latin typeface="+mn-lt"/>
+                <a:ea typeface="+mn-ea"/>
+                <a:cs typeface="+mn-cs"/>
+              </a:defRPr>
+            </a:lvl5pPr>
+            <a:lvl6pPr marL="1258888" indent="-111125" algn="l" defTabSz="914400" rtl="0" eaLnBrk="1" latinLnBrk="0" hangingPunct="1">
+              <a:lnSpc>
+                <a:spcPct val="100000"/>
+              </a:lnSpc>
+              <a:spcBef>
+                <a:spcPts val="1200"/>
+              </a:spcBef>
+              <a:buClrTx/>
+              <a:buSzPct val="90000"/>
+              <a:buFont typeface="Arial" panose="020B0604020202020204" pitchFamily="34" charset="0"/>
+              <a:buChar char="•"/>
+              <a:tabLst/>
+              <a:defRPr sz="1800" kern="1200">
+                <a:solidFill>
+                  <a:schemeClr val="bg1"/>
+                </a:solidFill>
+                <a:latin typeface="+mn-lt"/>
+                <a:ea typeface="+mn-ea"/>
+                <a:cs typeface="+mn-cs"/>
+              </a:defRPr>
+            </a:lvl6pPr>
+            <a:lvl7pPr marL="1379538" indent="-120650" algn="l" defTabSz="914400" rtl="0" eaLnBrk="1" latinLnBrk="0" hangingPunct="1">
+              <a:lnSpc>
+                <a:spcPct val="100000"/>
+              </a:lnSpc>
+              <a:spcBef>
+                <a:spcPts val="1200"/>
+              </a:spcBef>
+              <a:buClrTx/>
+              <a:buSzPct val="90000"/>
+              <a:buFont typeface="System Font Regular"/>
+              <a:buChar char="-"/>
+              <a:tabLst/>
+              <a:defRPr sz="1400" kern="1200">
+                <a:solidFill>
+                  <a:schemeClr val="bg1"/>
+                </a:solidFill>
+                <a:latin typeface="+mn-lt"/>
+                <a:ea typeface="+mn-ea"/>
+                <a:cs typeface="+mn-cs"/>
+              </a:defRPr>
+            </a:lvl7pPr>
+            <a:lvl8pPr marL="1550988" indent="-120650" algn="l" defTabSz="914400" rtl="0" eaLnBrk="1" latinLnBrk="0" hangingPunct="1">
+              <a:lnSpc>
+                <a:spcPct val="100000"/>
+              </a:lnSpc>
+              <a:spcBef>
+                <a:spcPts val="1200"/>
+              </a:spcBef>
+              <a:buClrTx/>
+              <a:buSzPct val="90000"/>
+              <a:buFont typeface="Arial" panose="020B0604020202020204" pitchFamily="34" charset="0"/>
+              <a:buChar char="•"/>
+              <a:tabLst/>
+              <a:defRPr sz="1200" kern="1200">
+                <a:solidFill>
+                  <a:schemeClr val="bg1"/>
+                </a:solidFill>
+                <a:latin typeface="+mn-lt"/>
+                <a:ea typeface="+mn-ea"/>
+                <a:cs typeface="+mn-cs"/>
+              </a:defRPr>
+            </a:lvl8pPr>
+            <a:lvl9pPr marL="1722438" indent="-120650" algn="l" defTabSz="914400" rtl="0" eaLnBrk="1" latinLnBrk="0" hangingPunct="1">
+              <a:lnSpc>
+                <a:spcPct val="100000"/>
+              </a:lnSpc>
+              <a:spcBef>
+                <a:spcPts val="1200"/>
+              </a:spcBef>
+              <a:buClrTx/>
+              <a:buSzPct val="90000"/>
+              <a:buFont typeface="System Font Regular"/>
+              <a:buChar char="-"/>
+              <a:tabLst/>
+              <a:defRPr sz="1800" kern="1200">
+                <a:solidFill>
+                  <a:schemeClr val="bg1"/>
+                </a:solidFill>
+                <a:latin typeface="+mn-lt"/>
+                <a:ea typeface="+mn-ea"/>
+                <a:cs typeface="+mn-cs"/>
+              </a:defRPr>
+            </a:lvl9pPr>
+          </a:lstStyle>
+          <a:p>
+            <a:pPr marL="342900" indent="-342900">
+              <a:spcBef>
+                <a:spcPts val="0"/>
+              </a:spcBef>
+              <a:spcAft>
+                <a:spcPts val="200"/>
+              </a:spcAft>
+              <a:buClr>
+                <a:srgbClr val="000000">
+                  <a:lumMod val="60000"/>
+                  <a:lumOff val="40000"/>
+                </a:srgbClr>
+              </a:buClr>
+              <a:buFont typeface="Arial" panose="020B0604020202020204" pitchFamily="34" charset="0"/>
+              <a:buChar char="•"/>
+            </a:pPr>
+            <a:r>
+              <a:rPr lang="en-US" sz="2000" dirty="0">
+                <a:solidFill>
+                  <a:srgbClr val="000000"/>
+                </a:solidFill>
+                <a:ea typeface="Times New Roman" panose="02020603050405020304" pitchFamily="18" charset="0"/>
+                <a:sym typeface="Arial"/>
+              </a:rPr>
+              <a:t>Organizational changes</a:t>
+            </a:r>
+          </a:p>
+          <a:p>
+            <a:pPr marL="800100" lvl="1" indent="-342900">
+              <a:spcBef>
+                <a:spcPts val="0"/>
+              </a:spcBef>
+              <a:spcAft>
+                <a:spcPts val="200"/>
+              </a:spcAft>
+              <a:buClr>
+                <a:srgbClr val="000000">
+                  <a:lumMod val="60000"/>
+                  <a:lumOff val="40000"/>
+                </a:srgbClr>
+              </a:buClr>
+            </a:pPr>
+            <a:r>
+              <a:rPr lang="en-US" sz="2000" dirty="0">
+                <a:solidFill>
+                  <a:srgbClr val="000000"/>
+                </a:solidFill>
+                <a:ea typeface="Times New Roman" panose="02020603050405020304" pitchFamily="18" charset="0"/>
+                <a:sym typeface="Arial"/>
+              </a:rPr>
+              <a:t>VMWare transitions project to open source but no ongoing work by Broadcom employees</a:t>
+            </a:r>
+          </a:p>
+          <a:p>
+            <a:pPr marL="800100" lvl="1" indent="-342900">
+              <a:spcBef>
+                <a:spcPts val="0"/>
+              </a:spcBef>
+              <a:spcAft>
+                <a:spcPts val="200"/>
+              </a:spcAft>
+              <a:buClr>
+                <a:srgbClr val="000000">
+                  <a:lumMod val="60000"/>
+                  <a:lumOff val="40000"/>
+                </a:srgbClr>
+              </a:buClr>
+            </a:pPr>
+            <a:r>
+              <a:rPr lang="en-US" sz="2000" dirty="0">
+                <a:solidFill>
+                  <a:srgbClr val="000000"/>
+                </a:solidFill>
+                <a:ea typeface="Times New Roman" panose="02020603050405020304" pitchFamily="18" charset="0"/>
+                <a:sym typeface="Arial"/>
+              </a:rPr>
+              <a:t>John maintaining and adding features, new participants and companies (</a:t>
+            </a:r>
+            <a:r>
+              <a:rPr lang="en-US" sz="2000" dirty="0" err="1">
+                <a:solidFill>
+                  <a:srgbClr val="000000"/>
+                </a:solidFill>
+                <a:ea typeface="Times New Roman" panose="02020603050405020304" pitchFamily="18" charset="0"/>
+                <a:sym typeface="Arial"/>
+              </a:rPr>
+              <a:t>Datica</a:t>
+            </a:r>
+            <a:r>
+              <a:rPr lang="en-US" sz="2000" dirty="0">
+                <a:solidFill>
+                  <a:srgbClr val="000000"/>
+                </a:solidFill>
+                <a:ea typeface="Times New Roman" panose="02020603050405020304" pitchFamily="18" charset="0"/>
+                <a:sym typeface="Arial"/>
+              </a:rPr>
+              <a:t>) and support</a:t>
+            </a:r>
+          </a:p>
+          <a:p>
+            <a:pPr marL="800100" lvl="1" indent="-342900">
+              <a:spcBef>
+                <a:spcPts val="0"/>
+              </a:spcBef>
+              <a:spcAft>
+                <a:spcPts val="200"/>
+              </a:spcAft>
+              <a:buClr>
+                <a:srgbClr val="000000">
+                  <a:lumMod val="60000"/>
+                  <a:lumOff val="40000"/>
+                </a:srgbClr>
+              </a:buClr>
+            </a:pPr>
+            <a:r>
+              <a:rPr lang="en-US" sz="2000" dirty="0">
+                <a:solidFill>
+                  <a:srgbClr val="000000"/>
+                </a:solidFill>
+                <a:ea typeface="Times New Roman" panose="02020603050405020304" pitchFamily="18" charset="0"/>
+                <a:sym typeface="Arial"/>
+              </a:rPr>
+              <a:t>New grants and collaborations (NSF and other USG)</a:t>
+            </a:r>
+          </a:p>
+          <a:p>
+            <a:pPr marL="342900" indent="-342900">
+              <a:spcBef>
+                <a:spcPts val="0"/>
+              </a:spcBef>
+              <a:spcAft>
+                <a:spcPts val="200"/>
+              </a:spcAft>
+              <a:buClr>
+                <a:srgbClr val="000000">
+                  <a:lumMod val="60000"/>
+                  <a:lumOff val="40000"/>
+                </a:srgbClr>
+              </a:buClr>
+              <a:buFont typeface="Arial" panose="020B0604020202020204" pitchFamily="34" charset="0"/>
+              <a:buChar char="•"/>
+            </a:pPr>
+            <a:r>
+              <a:rPr lang="en-US" sz="2000" dirty="0">
+                <a:solidFill>
+                  <a:srgbClr val="000000"/>
+                </a:solidFill>
+                <a:ea typeface="Times New Roman" panose="02020603050405020304" pitchFamily="18" charset="0"/>
+                <a:sym typeface="Arial"/>
+              </a:rPr>
+              <a:t>Review of goals</a:t>
+            </a:r>
+          </a:p>
+          <a:p>
+            <a:pPr marL="800100" lvl="1" indent="-342900">
+              <a:spcBef>
+                <a:spcPts val="0"/>
+              </a:spcBef>
+              <a:spcAft>
+                <a:spcPts val="200"/>
+              </a:spcAft>
+              <a:buClr>
+                <a:srgbClr val="000000">
+                  <a:lumMod val="60000"/>
+                  <a:lumOff val="40000"/>
+                </a:srgbClr>
+              </a:buClr>
+            </a:pPr>
+            <a:r>
+              <a:rPr lang="en-US" sz="2000" dirty="0">
+                <a:solidFill>
+                  <a:srgbClr val="000000"/>
+                </a:solidFill>
+                <a:ea typeface="Times New Roman" panose="02020603050405020304" pitchFamily="18" charset="0"/>
+                <a:sym typeface="Arial"/>
+              </a:rPr>
+              <a:t>Review of original architecture and goals</a:t>
+            </a:r>
+          </a:p>
+          <a:p>
+            <a:pPr marL="342900" indent="-342900">
+              <a:spcBef>
+                <a:spcPts val="0"/>
+              </a:spcBef>
+              <a:spcAft>
+                <a:spcPts val="200"/>
+              </a:spcAft>
+              <a:buClr>
+                <a:srgbClr val="000000">
+                  <a:lumMod val="60000"/>
+                  <a:lumOff val="40000"/>
+                </a:srgbClr>
+              </a:buClr>
+              <a:buFont typeface="Arial" panose="020B0604020202020204" pitchFamily="34" charset="0"/>
+              <a:buChar char="•"/>
+            </a:pPr>
+            <a:r>
+              <a:rPr lang="en-US" sz="2000" dirty="0">
+                <a:solidFill>
+                  <a:srgbClr val="000000"/>
+                </a:solidFill>
+                <a:ea typeface="Times New Roman" panose="02020603050405020304" pitchFamily="18" charset="0"/>
+                <a:sym typeface="Arial"/>
+              </a:rPr>
+              <a:t>New features</a:t>
+            </a:r>
+          </a:p>
+          <a:p>
+            <a:pPr marL="800100" lvl="1" indent="-342900">
+              <a:spcBef>
+                <a:spcPts val="0"/>
+              </a:spcBef>
+              <a:spcAft>
+                <a:spcPts val="200"/>
+              </a:spcAft>
+              <a:buClr>
+                <a:srgbClr val="000000">
+                  <a:lumMod val="60000"/>
+                  <a:lumOff val="40000"/>
+                </a:srgbClr>
+              </a:buClr>
+            </a:pPr>
+            <a:r>
+              <a:rPr lang="en-US" sz="2000" dirty="0">
+                <a:solidFill>
+                  <a:srgbClr val="000000"/>
+                </a:solidFill>
+                <a:ea typeface="Times New Roman" panose="02020603050405020304" pitchFamily="18" charset="0"/>
+                <a:sym typeface="Arial"/>
+              </a:rPr>
+              <a:t>Granular access control, VM tools, TPM support, bug fixes, Java</a:t>
+            </a:r>
+          </a:p>
+          <a:p>
+            <a:pPr marL="342900" indent="-342900">
+              <a:spcBef>
+                <a:spcPts val="0"/>
+              </a:spcBef>
+              <a:spcAft>
+                <a:spcPts val="200"/>
+              </a:spcAft>
+              <a:buClr>
+                <a:srgbClr val="000000">
+                  <a:lumMod val="60000"/>
+                  <a:lumOff val="40000"/>
+                </a:srgbClr>
+              </a:buClr>
+              <a:buFont typeface="Arial" panose="020B0604020202020204" pitchFamily="34" charset="0"/>
+              <a:buChar char="•"/>
+            </a:pPr>
+            <a:r>
+              <a:rPr lang="en-US" sz="2000" dirty="0">
+                <a:solidFill>
+                  <a:srgbClr val="000000"/>
+                </a:solidFill>
+                <a:ea typeface="Times New Roman" panose="02020603050405020304" pitchFamily="18" charset="0"/>
+                <a:sym typeface="Arial"/>
+              </a:rPr>
+              <a:t>New projects and research</a:t>
+            </a:r>
+          </a:p>
+          <a:p>
+            <a:pPr marL="800100" lvl="1" indent="-342900">
+              <a:spcBef>
+                <a:spcPts val="0"/>
+              </a:spcBef>
+              <a:spcAft>
+                <a:spcPts val="200"/>
+              </a:spcAft>
+              <a:buClr>
+                <a:srgbClr val="000000">
+                  <a:lumMod val="60000"/>
+                  <a:lumOff val="40000"/>
+                </a:srgbClr>
+              </a:buClr>
+            </a:pPr>
+            <a:r>
+              <a:rPr lang="en-US" sz="2000" dirty="0">
+                <a:solidFill>
+                  <a:srgbClr val="000000"/>
+                </a:solidFill>
+                <a:ea typeface="Times New Roman" panose="02020603050405020304" pitchFamily="18" charset="0"/>
+                <a:sym typeface="Arial"/>
+              </a:rPr>
+              <a:t>NSF, USC, UVA and other government agencies</a:t>
+            </a:r>
+          </a:p>
+          <a:p>
+            <a:pPr marL="342900" indent="-342900">
+              <a:spcBef>
+                <a:spcPts val="0"/>
+              </a:spcBef>
+              <a:spcAft>
+                <a:spcPts val="200"/>
+              </a:spcAft>
+              <a:buClr>
+                <a:srgbClr val="000000">
+                  <a:lumMod val="60000"/>
+                  <a:lumOff val="40000"/>
+                </a:srgbClr>
+              </a:buClr>
+              <a:buFont typeface="Arial" panose="020B0604020202020204" pitchFamily="34" charset="0"/>
+              <a:buChar char="•"/>
+            </a:pPr>
+            <a:r>
+              <a:rPr lang="en-US" sz="2000" dirty="0">
+                <a:solidFill>
+                  <a:srgbClr val="000000"/>
+                </a:solidFill>
+                <a:ea typeface="Times New Roman" panose="02020603050405020304" pitchFamily="18" charset="0"/>
+                <a:sym typeface="Arial"/>
+              </a:rPr>
+              <a:t>Aspirations and gaps</a:t>
+            </a:r>
+          </a:p>
+          <a:p>
+            <a:pPr marL="800100" lvl="1" indent="-342900">
+              <a:spcBef>
+                <a:spcPts val="0"/>
+              </a:spcBef>
+              <a:spcAft>
+                <a:spcPts val="200"/>
+              </a:spcAft>
+              <a:buClr>
+                <a:srgbClr val="000000">
+                  <a:lumMod val="60000"/>
+                  <a:lumOff val="40000"/>
+                </a:srgbClr>
+              </a:buClr>
+            </a:pPr>
+            <a:r>
+              <a:rPr lang="en-US" sz="2000" dirty="0">
+                <a:solidFill>
+                  <a:srgbClr val="000000"/>
+                </a:solidFill>
+                <a:ea typeface="Times New Roman" panose="02020603050405020304" pitchFamily="18" charset="0"/>
+                <a:sym typeface="Arial"/>
+              </a:rPr>
+              <a:t>Collaboration for new HW support: CCA, TDX, Google phone, Apple, Raspberry Pi, GPU, accelerators --- we welcome support and collaboration on these, anyone?</a:t>
+            </a:r>
+          </a:p>
+          <a:p>
+            <a:pPr marL="800100" lvl="1" indent="-342900">
+              <a:spcBef>
+                <a:spcPts val="0"/>
+              </a:spcBef>
+              <a:spcAft>
+                <a:spcPts val="200"/>
+              </a:spcAft>
+              <a:buClr>
+                <a:srgbClr val="000000">
+                  <a:lumMod val="60000"/>
+                  <a:lumOff val="40000"/>
+                </a:srgbClr>
+              </a:buClr>
+            </a:pPr>
+            <a:r>
+              <a:rPr lang="en-US" sz="2000" dirty="0">
+                <a:solidFill>
+                  <a:srgbClr val="000000"/>
+                </a:solidFill>
+                <a:ea typeface="Times New Roman" panose="02020603050405020304" pitchFamily="18" charset="0"/>
+                <a:sym typeface="Arial"/>
+              </a:rPr>
+              <a:t>Standard VM appliances</a:t>
+            </a:r>
+          </a:p>
+          <a:p>
+            <a:pPr marL="800100" lvl="1" indent="-342900">
+              <a:spcBef>
+                <a:spcPts val="0"/>
+              </a:spcBef>
+              <a:spcAft>
+                <a:spcPts val="200"/>
+              </a:spcAft>
+              <a:buClr>
+                <a:srgbClr val="000000">
+                  <a:lumMod val="60000"/>
+                  <a:lumOff val="40000"/>
+                </a:srgbClr>
+              </a:buClr>
+            </a:pPr>
+            <a:r>
+              <a:rPr lang="en-US" sz="2000" dirty="0">
+                <a:solidFill>
+                  <a:srgbClr val="000000"/>
+                </a:solidFill>
+                <a:ea typeface="Times New Roman" panose="02020603050405020304" pitchFamily="18" charset="0"/>
+                <a:sym typeface="Arial"/>
+              </a:rPr>
+              <a:t>Research: side channel protection, automated partitioning and formal method verification …</a:t>
+            </a:r>
+          </a:p>
+        </p:txBody>
+      </p:sp>
+    </p:spTree>
+    <p:extLst>
+      <p:ext uri="{BB962C8B-B14F-4D97-AF65-F5344CB8AC3E}">
+        <p14:creationId xmlns:p14="http://schemas.microsoft.com/office/powerpoint/2010/main" val="197780443"/>
+      </p:ext>
+    </p:extLst>
+  </p:cSld>
+  <p:clrMapOvr>
+    <a:masterClrMapping/>
+  </p:clrMapOvr>
+</p:sld>
+</file>
+
+<file path=ppt/slides/slide3.xml><?xml version="1.0" encoding="utf-8"?>
+<p:sld xmlns:a="http://schemas.openxmlformats.org/drawingml/2006/main" xmlns:r="http://schemas.openxmlformats.org/officeDocument/2006/relationships" xmlns:p="http://schemas.openxmlformats.org/presentationml/2006/main">
+  <p:cSld>
+    <p:spTree>
+      <p:nvGrpSpPr>
         <p:cNvPr id="1" name=""/>
         <p:cNvGrpSpPr/>
         <p:nvPr/>
@@ -13830,7 +16529,7 @@
         </p:nvSpPr>
         <p:spPr>
           <a:xfrm>
-            <a:off x="655816" y="329894"/>
+            <a:off x="655816" y="279654"/>
             <a:ext cx="10863263" cy="739051"/>
           </a:xfrm>
           <a:prstGeom prst="rect">
@@ -14094,11 +16793,11 @@
           </a:lstStyle>
           <a:p>
             <a:r>
-              <a:rPr lang="en-US" kern="0">
-                <a:latin typeface="Arial" panose="020B0604020202020204" pitchFamily="34" charset="0"/>
+              <a:rPr lang="en-US" kern="0" dirty="0">
+                <a:latin typeface="+mn-lt"/>
                 <a:cs typeface="Arial" panose="020B0604020202020204" pitchFamily="34" charset="0"/>
               </a:rPr>
-              <a:t>The certifier framework</a:t>
+              <a:t>The Certifier Framework</a:t>
             </a:r>
           </a:p>
         </p:txBody>
@@ -14119,8 +16818,8 @@
         </p:nvSpPr>
         <p:spPr>
           <a:xfrm>
-            <a:off x="664368" y="1483030"/>
-            <a:ext cx="10448132" cy="5045076"/>
+            <a:off x="302626" y="1653849"/>
+            <a:ext cx="11574526" cy="4756998"/>
           </a:xfrm>
           <a:prstGeom prst="rect">
             <a:avLst/>
@@ -14537,7 +17236,7 @@
                 <a:cs typeface="Calibri" panose="020F0502020204030204" pitchFamily="34" charset="0"/>
                 <a:sym typeface="Arial"/>
               </a:rPr>
-              <a:t>Already supports SGX (via Open Enclaves or Gramine), AMD-SEV-SNP, Arm CCA, RISC-V, TPM, Keystone, and soon TDX.  Also supports recursive enclaves (applications within VM’s)</a:t>
+              <a:t>Already supports SGX (via Open Enclaves or Gramine), AMD-SEV-SNP, Arm CCA (Islet), RISC-V, TPM, Keystone, and soon TDX.  Also supports recursive enclaves (applications within VM’s)</a:t>
             </a:r>
           </a:p>
           <a:p>
@@ -15072,8 +17771,8 @@
         </p:nvSpPr>
         <p:spPr>
           <a:xfrm>
-            <a:off x="655816" y="771933"/>
-            <a:ext cx="6111024" cy="521681"/>
+            <a:off x="655816" y="862366"/>
+            <a:ext cx="6111024" cy="535531"/>
           </a:xfrm>
           <a:prstGeom prst="rect">
             <a:avLst/>
@@ -15106,7 +17805,7 @@
               <a:defRPr/>
             </a:pPr>
             <a:r>
-              <a:rPr kumimoji="0" lang="en-US" sz="3100" b="0" i="0" u="none" strike="noStrike" kern="0" cap="none" spc="0" normalizeH="0" baseline="0" noProof="0">
+              <a:rPr kumimoji="0" lang="en-US" sz="3100" b="0" i="0" u="none" strike="noStrike" kern="0" cap="none" spc="0" normalizeH="0" baseline="0" noProof="0" dirty="0">
                 <a:ln>
                   <a:noFill/>
                 </a:ln>
@@ -15120,9 +17819,26 @@
                 <a:ea typeface="+mn-ea"/>
                 <a:cs typeface="+mn-cs"/>
               </a:rPr>
-              <a:t>Design goals</a:t>
-            </a:r>
-            <a:endParaRPr kumimoji="0" lang="en-US" sz="2000" b="0" i="0" u="none" strike="noStrike" kern="0" cap="none" spc="0" normalizeH="0" baseline="0" noProof="0">
+              <a:t>Design </a:t>
+            </a:r>
+            <a:r>
+              <a:rPr kumimoji="0" lang="en-US" sz="3200" b="0" i="0" u="none" strike="noStrike" kern="0" cap="none" spc="0" normalizeH="0" baseline="0" noProof="0" dirty="0">
+                <a:ln>
+                  <a:noFill/>
+                </a:ln>
+                <a:solidFill>
+                  <a:srgbClr val="4472C4"/>
+                </a:solidFill>
+                <a:effectLst/>
+                <a:uLnTx/>
+                <a:uFillTx/>
+                <a:latin typeface="Calibri" panose="020F0502020204030204"/>
+                <a:ea typeface="+mn-ea"/>
+                <a:cs typeface="+mn-cs"/>
+              </a:rPr>
+              <a:t>goals</a:t>
+            </a:r>
+            <a:endParaRPr kumimoji="0" lang="en-US" sz="2000" b="0" i="0" u="none" strike="noStrike" kern="0" cap="none" spc="0" normalizeH="0" baseline="0" noProof="0" dirty="0">
               <a:ln>
                 <a:noFill/>
               </a:ln>
@@ -15153,7 +17869,7 @@
 </p:sld>
 </file>
 
-<file path=ppt/slides/slide3.xml><?xml version="1.0" encoding="utf-8"?>
+<file path=ppt/slides/slide4.xml><?xml version="1.0" encoding="utf-8"?>
 <p:sld xmlns:a="http://schemas.openxmlformats.org/drawingml/2006/main" xmlns:r="http://schemas.openxmlformats.org/officeDocument/2006/relationships" xmlns:p="http://schemas.openxmlformats.org/presentationml/2006/main">
   <p:cSld>
     <p:spTree>
@@ -16518,7 +19234,7 @@
         </p:nvCxnSpPr>
         <p:spPr bwMode="gray">
           <a:xfrm flipH="1">
-            <a:off x="3752362" y="2019611"/>
+            <a:off x="3591593" y="2019611"/>
             <a:ext cx="2648" cy="417127"/>
           </a:xfrm>
           <a:prstGeom prst="straightConnector1">
@@ -16551,8 +19267,8 @@
         </p:nvSpPr>
         <p:spPr>
           <a:xfrm>
-            <a:off x="2336363" y="1366832"/>
-            <a:ext cx="2975427" cy="602140"/>
+            <a:off x="2077905" y="1366832"/>
+            <a:ext cx="3233885" cy="602140"/>
           </a:xfrm>
           <a:prstGeom prst="rect">
             <a:avLst/>
@@ -16599,7 +19315,7 @@
               <a:defRPr/>
             </a:pPr>
             <a:r>
-              <a:rPr kumimoji="0" lang="en-US" sz="1600" b="0" i="0" u="none" strike="noStrike" kern="0" cap="none" spc="0" normalizeH="0" baseline="0" noProof="0" dirty="0">
+              <a:rPr kumimoji="0" lang="en-US" b="0" i="0" u="none" strike="noStrike" kern="0" cap="none" spc="0" normalizeH="0" baseline="0" noProof="0" dirty="0">
                 <a:ln>
                   <a:noFill/>
                 </a:ln>
@@ -16609,12 +19325,45 @@
                 <a:effectLst/>
                 <a:uLnTx/>
                 <a:uFillTx/>
-                <a:latin typeface="Arial"/>
                 <a:ea typeface="+mn-ea"/>
                 <a:cs typeface="+mn-cs"/>
                 <a:sym typeface="Arial"/>
               </a:rPr>
-              <a:t>Application (or VM-wide)</a:t>
+              <a:t>Application (</a:t>
+            </a:r>
+            <a:r>
+              <a:rPr kumimoji="0" lang="en-US" b="0" i="1" u="none" strike="noStrike" kern="0" cap="none" spc="0" normalizeH="0" baseline="0" noProof="0" dirty="0">
+                <a:ln>
+                  <a:noFill/>
+                </a:ln>
+                <a:solidFill>
+                  <a:srgbClr val="535353"/>
+                </a:solidFill>
+                <a:effectLst/>
+                <a:uLnTx/>
+                <a:uFillTx/>
+                <a:ea typeface="+mn-ea"/>
+                <a:cs typeface="+mn-cs"/>
+                <a:sym typeface="Arial"/>
+              </a:rPr>
+              <a:t>or VM-wide tools</a:t>
+            </a:r>
+            <a:r>
+              <a:rPr kumimoji="0" lang="en-US" b="0" i="0" u="none" strike="noStrike" kern="0" cap="none" spc="0" normalizeH="0" baseline="0" noProof="0" dirty="0">
+                <a:ln>
+                  <a:noFill/>
+                </a:ln>
+                <a:solidFill>
+                  <a:srgbClr val="535353"/>
+                </a:solidFill>
+                <a:effectLst/>
+                <a:uLnTx/>
+                <a:uFillTx/>
+                <a:ea typeface="+mn-ea"/>
+                <a:cs typeface="+mn-cs"/>
+                <a:sym typeface="Arial"/>
+              </a:rPr>
+              <a:t>)</a:t>
             </a:r>
           </a:p>
           <a:p>
@@ -16638,7 +19387,7 @@
               <a:defRPr/>
             </a:pPr>
             <a:r>
-              <a:rPr kumimoji="0" lang="en-US" sz="1600" b="0" i="0" u="none" strike="noStrike" kern="0" cap="none" spc="0" normalizeH="0" baseline="0" noProof="0" dirty="0">
+              <a:rPr kumimoji="0" lang="en-US" b="0" i="0" u="none" strike="noStrike" kern="0" cap="none" spc="0" normalizeH="0" baseline="0" noProof="0" dirty="0">
                 <a:ln>
                   <a:noFill/>
                 </a:ln>
@@ -16648,7 +19397,6 @@
                 <a:effectLst/>
                 <a:uLnTx/>
                 <a:uFillTx/>
-                <a:latin typeface="Arial"/>
                 <a:ea typeface="+mn-ea"/>
                 <a:cs typeface="+mn-cs"/>
                 <a:sym typeface="Arial"/>
@@ -18352,7 +21100,7 @@
 </p:sld>
 </file>
 
-<file path=ppt/slides/slide4.xml><?xml version="1.0" encoding="utf-8"?>
+<file path=ppt/slides/slide5.xml><?xml version="1.0" encoding="utf-8"?>
 <p:sld xmlns:a="http://schemas.openxmlformats.org/drawingml/2006/main" xmlns:r="http://schemas.openxmlformats.org/officeDocument/2006/relationships" xmlns:p="http://schemas.openxmlformats.org/presentationml/2006/main">
   <p:cSld>
     <p:spTree>
@@ -18709,8 +21457,8 @@
         </p:nvSpPr>
         <p:spPr bwMode="ltGray">
           <a:xfrm>
-            <a:off x="415700" y="1362587"/>
-            <a:ext cx="11181311" cy="4575988"/>
+            <a:off x="415700" y="1252054"/>
+            <a:ext cx="11181311" cy="5078407"/>
           </a:xfrm>
           <a:prstGeom prst="rect">
             <a:avLst/>
@@ -18976,7 +21724,7 @@
                 <a:ea typeface="Times New Roman" panose="02020603050405020304" pitchFamily="18" charset="0"/>
                 <a:sym typeface="Arial"/>
               </a:rPr>
-              <a:t>New ACL library for “granular” resource protection including web API interfaces</a:t>
+              <a:t>New ACL library for “granular” resource protection including web API interfaces for secure data sharing</a:t>
             </a:r>
           </a:p>
           <a:p>
@@ -19241,7 +21989,7 @@
 </p:sld>
 </file>
 
-<file path=ppt/slides/slide5.xml><?xml version="1.0" encoding="utf-8"?>
+<file path=ppt/slides/slide6.xml><?xml version="1.0" encoding="utf-8"?>
 <p:sld xmlns:a="http://schemas.openxmlformats.org/drawingml/2006/main" xmlns:r="http://schemas.openxmlformats.org/officeDocument/2006/relationships" xmlns:p="http://schemas.openxmlformats.org/presentationml/2006/main">
   <p:cSld>
     <p:spTree>
@@ -19598,7 +22346,7 @@
         </p:nvSpPr>
         <p:spPr bwMode="ltGray">
           <a:xfrm>
-            <a:off x="405650" y="1282200"/>
+            <a:off x="385553" y="1191765"/>
             <a:ext cx="11025187" cy="4716666"/>
           </a:xfrm>
           <a:prstGeom prst="rect">
@@ -19891,7 +22639,7 @@
                 <a:ea typeface="Times New Roman" panose="02020603050405020304" pitchFamily="18" charset="0"/>
                 <a:sym typeface="Arial"/>
               </a:rPr>
-              <a:t>Potential grant for app development</a:t>
+              <a:t>Grants for app/VM appliance development</a:t>
             </a:r>
           </a:p>
           <a:p>
@@ -19918,7 +22666,7 @@
                 <a:ea typeface="Times New Roman" panose="02020603050405020304" pitchFamily="18" charset="0"/>
                 <a:sym typeface="Arial"/>
               </a:rPr>
-              <a:t>Research partnerships</a:t>
+              <a:t>Research partnerships (USG) --- looking for others</a:t>
             </a:r>
           </a:p>
           <a:p>
@@ -20023,7 +22771,7 @@
                 <a:ea typeface="Times New Roman" panose="02020603050405020304" pitchFamily="18" charset="0"/>
                 <a:sym typeface="Arial"/>
               </a:rPr>
-              <a:t>Prototype application</a:t>
+              <a:t>Automated container specification, measurement and deployment</a:t>
             </a:r>
           </a:p>
           <a:p>
@@ -20050,7 +22798,7 @@
                 <a:ea typeface="Times New Roman" panose="02020603050405020304" pitchFamily="18" charset="0"/>
                 <a:sym typeface="Arial"/>
               </a:rPr>
-              <a:t>Automated container specification, measurement and deployment</a:t>
+              <a:t>Automated formal methods integration</a:t>
             </a:r>
           </a:p>
           <a:p>
@@ -20077,7 +22825,7 @@
                 <a:ea typeface="Times New Roman" panose="02020603050405020304" pitchFamily="18" charset="0"/>
                 <a:sym typeface="Arial"/>
               </a:rPr>
-              <a:t>Automated formal methods integration</a:t>
+              <a:t>Side channel protection</a:t>
             </a:r>
             <a:endParaRPr lang="en-US" sz="2600" dirty="0">
               <a:solidFill>
@@ -20126,7 +22874,7 @@
 </p:sld>
 </file>
 
-<file path=ppt/slides/slide6.xml><?xml version="1.0" encoding="utf-8"?>
+<file path=ppt/slides/slide7.xml><?xml version="1.0" encoding="utf-8"?>
 <p:sld xmlns:a="http://schemas.openxmlformats.org/drawingml/2006/main" xmlns:r="http://schemas.openxmlformats.org/officeDocument/2006/relationships" xmlns:p="http://schemas.openxmlformats.org/presentationml/2006/main">
   <p:cSld>
     <p:spTree>
@@ -22734,7 +25482,7 @@
 </p:sld>
 </file>
 
-<file path=ppt/slides/slide7.xml><?xml version="1.0" encoding="utf-8"?>
+<file path=ppt/slides/slide8.xml><?xml version="1.0" encoding="utf-8"?>
 <p:sld xmlns:a="http://schemas.openxmlformats.org/drawingml/2006/main" xmlns:r="http://schemas.openxmlformats.org/officeDocument/2006/relationships" xmlns:p="http://schemas.openxmlformats.org/presentationml/2006/main">
   <p:cSld>
     <p:spTree>
@@ -22765,7 +25513,7 @@
         </p:nvSpPr>
         <p:spPr>
           <a:xfrm>
-            <a:off x="643404" y="2448911"/>
+            <a:off x="643404" y="2830746"/>
             <a:ext cx="10790714" cy="1397876"/>
           </a:xfrm>
           <a:prstGeom prst="roundRect">
@@ -22842,7 +25590,7 @@
         <p:spPr>
           <a:xfrm>
             <a:off x="419100" y="375639"/>
-            <a:ext cx="11353800" cy="606167"/>
+            <a:ext cx="11353800" cy="890453"/>
           </a:xfrm>
           <a:prstGeom prst="rect">
             <a:avLst/>
@@ -22854,7 +25602,7 @@
         </p:spPr>
         <p:txBody>
           <a:bodyPr spcFirstLastPara="1" wrap="square" lIns="45700" tIns="45700" rIns="45700" bIns="45700" anchor="ctr" anchorCtr="0">
-            <a:normAutofit fontScale="75000" lnSpcReduction="20000"/>
+            <a:normAutofit fontScale="90000" lnSpcReduction="10000"/>
           </a:bodyPr>
           <a:lstStyle>
             <a:defPPr marR="0" lvl="0" algn="l" rtl="0">
@@ -23104,7 +25852,7 @@
             </a:lvl9pPr>
           </a:lstStyle>
           <a:p>
-            <a:pPr marL="0" marR="0" lvl="0" indent="0" algn="l" defTabSz="914400" rtl="0" eaLnBrk="1" fontAlgn="auto" latinLnBrk="0" hangingPunct="1">
+            <a:pPr marL="0" marR="0" lvl="0" indent="0" algn="ctr" defTabSz="914400" rtl="0" eaLnBrk="1" fontAlgn="auto" latinLnBrk="0" hangingPunct="1">
               <a:lnSpc>
                 <a:spcPct val="90000"/>
               </a:lnSpc>
@@ -23134,7 +25882,7 @@
                 <a:effectLst/>
                 <a:uLnTx/>
                 <a:uFillTx/>
-                <a:latin typeface="Arial"/>
+                <a:latin typeface="+mn-lt"/>
                 <a:cs typeface="Arial"/>
                 <a:sym typeface="Arial"/>
               </a:rPr>
@@ -23157,7 +25905,7 @@
         </p:nvSpPr>
         <p:spPr>
           <a:xfrm>
-            <a:off x="643404" y="1720840"/>
+            <a:off x="757882" y="2102675"/>
             <a:ext cx="11015018" cy="3416320"/>
           </a:xfrm>
           <a:prstGeom prst="rect">
@@ -23179,167 +25927,167 @@
               <a:buNone/>
             </a:pPr>
             <a:r>
-              <a:rPr lang="en-US" kern="0" dirty="0">
+              <a:rPr lang="en-US" b="1" kern="0" dirty="0">
                 <a:solidFill>
                   <a:srgbClr val="4EC9B0"/>
                 </a:solidFill>
-                <a:latin typeface="Menlo" panose="020B0609030804020204" pitchFamily="49" charset="0"/>
-                <a:cs typeface="Arial"/>
+                <a:latin typeface="Courier New" panose="02070309020205020404" pitchFamily="49" charset="0"/>
+                <a:cs typeface="Courier New" panose="02070309020205020404" pitchFamily="49" charset="0"/>
                 <a:sym typeface="Arial"/>
               </a:rPr>
               <a:t>string</a:t>
             </a:r>
             <a:r>
-              <a:rPr lang="en-US" kern="0" dirty="0">
+              <a:rPr lang="en-US" b="1" kern="0" dirty="0">
                 <a:solidFill>
                   <a:srgbClr val="CCCCCC"/>
                 </a:solidFill>
-                <a:latin typeface="Menlo" panose="020B0609030804020204" pitchFamily="49" charset="0"/>
-                <a:cs typeface="Arial"/>
+                <a:latin typeface="Courier New" panose="02070309020205020404" pitchFamily="49" charset="0"/>
+                <a:cs typeface="Courier New" panose="02070309020205020404" pitchFamily="49" charset="0"/>
                 <a:sym typeface="Arial"/>
               </a:rPr>
               <a:t> </a:t>
             </a:r>
             <a:r>
-              <a:rPr lang="en-US" kern="0" dirty="0" err="1">
+              <a:rPr lang="en-US" b="1" kern="0" dirty="0" err="1">
                 <a:solidFill>
                   <a:srgbClr val="ED7D31"/>
                 </a:solidFill>
-                <a:latin typeface="Menlo" panose="020B0609030804020204" pitchFamily="49" charset="0"/>
-                <a:cs typeface="Arial"/>
+                <a:latin typeface="Courier New" panose="02070309020205020404" pitchFamily="49" charset="0"/>
+                <a:cs typeface="Courier New" panose="02070309020205020404" pitchFamily="49" charset="0"/>
                 <a:sym typeface="Arial"/>
               </a:rPr>
               <a:t>public_key_alg</a:t>
             </a:r>
             <a:r>
-              <a:rPr lang="en-US" kern="0" dirty="0">
+              <a:rPr lang="en-US" b="1" kern="0" dirty="0">
                 <a:solidFill>
                   <a:srgbClr val="000000">
                     <a:lumMod val="50000"/>
                     <a:lumOff val="50000"/>
                   </a:srgbClr>
                 </a:solidFill>
-                <a:latin typeface="Menlo" panose="020B0609030804020204" pitchFamily="49" charset="0"/>
-                <a:cs typeface="Arial"/>
+                <a:latin typeface="Courier New" panose="02070309020205020404" pitchFamily="49" charset="0"/>
+                <a:cs typeface="Courier New" panose="02070309020205020404" pitchFamily="49" charset="0"/>
                 <a:sym typeface="Arial"/>
               </a:rPr>
               <a:t>(</a:t>
             </a:r>
             <a:r>
-              <a:rPr lang="en-US" kern="0" dirty="0">
+              <a:rPr lang="en-US" b="1" kern="0" dirty="0">
                 <a:solidFill>
                   <a:srgbClr val="CE9178"/>
                 </a:solidFill>
-                <a:latin typeface="Menlo" panose="020B0609030804020204" pitchFamily="49" charset="0"/>
-                <a:cs typeface="Arial"/>
+                <a:latin typeface="Courier New" panose="02070309020205020404" pitchFamily="49" charset="0"/>
+                <a:cs typeface="Courier New" panose="02070309020205020404" pitchFamily="49" charset="0"/>
                 <a:sym typeface="Arial"/>
               </a:rPr>
               <a:t>"rsa-2048"</a:t>
             </a:r>
             <a:r>
-              <a:rPr lang="en-US" kern="0" dirty="0">
+              <a:rPr lang="en-US" b="1" kern="0" dirty="0">
                 <a:solidFill>
                   <a:srgbClr val="000000">
                     <a:lumMod val="50000"/>
                     <a:lumOff val="50000"/>
                   </a:srgbClr>
                 </a:solidFill>
-                <a:latin typeface="Menlo" panose="020B0609030804020204" pitchFamily="49" charset="0"/>
-                <a:cs typeface="Arial"/>
+                <a:latin typeface="Courier New" panose="02070309020205020404" pitchFamily="49" charset="0"/>
+                <a:cs typeface="Courier New" panose="02070309020205020404" pitchFamily="49" charset="0"/>
                 <a:sym typeface="Arial"/>
               </a:rPr>
               <a:t>);</a:t>
             </a:r>
             <a:r>
-              <a:rPr lang="en-US" kern="0" dirty="0">
+              <a:rPr lang="en-US" b="1" kern="0" dirty="0">
                 <a:solidFill>
                   <a:srgbClr val="CCCCCC"/>
                 </a:solidFill>
-                <a:latin typeface="Menlo" panose="020B0609030804020204" pitchFamily="49" charset="0"/>
-                <a:cs typeface="Arial"/>
+                <a:latin typeface="Courier New" panose="02070309020205020404" pitchFamily="49" charset="0"/>
+                <a:cs typeface="Courier New" panose="02070309020205020404" pitchFamily="49" charset="0"/>
                 <a:sym typeface="Arial"/>
               </a:rPr>
               <a:t> </a:t>
             </a:r>
             <a:r>
-              <a:rPr lang="en-US" kern="0" dirty="0">
+              <a:rPr lang="en-US" b="1" kern="0" dirty="0">
                 <a:solidFill>
                   <a:srgbClr val="4EC9B0"/>
                 </a:solidFill>
-                <a:latin typeface="Menlo" panose="020B0609030804020204" pitchFamily="49" charset="0"/>
-                <a:cs typeface="Arial"/>
+                <a:latin typeface="Courier New" panose="02070309020205020404" pitchFamily="49" charset="0"/>
+                <a:cs typeface="Courier New" panose="02070309020205020404" pitchFamily="49" charset="0"/>
                 <a:sym typeface="Arial"/>
               </a:rPr>
               <a:t>string</a:t>
             </a:r>
             <a:r>
-              <a:rPr lang="en-US" kern="0" dirty="0">
+              <a:rPr lang="en-US" b="1" kern="0" dirty="0">
                 <a:solidFill>
                   <a:srgbClr val="CCCCCC"/>
                 </a:solidFill>
-                <a:latin typeface="Menlo" panose="020B0609030804020204" pitchFamily="49" charset="0"/>
-                <a:cs typeface="Arial"/>
+                <a:latin typeface="Courier New" panose="02070309020205020404" pitchFamily="49" charset="0"/>
+                <a:cs typeface="Courier New" panose="02070309020205020404" pitchFamily="49" charset="0"/>
                 <a:sym typeface="Arial"/>
               </a:rPr>
               <a:t> </a:t>
             </a:r>
             <a:r>
-              <a:rPr lang="en-US" kern="0" dirty="0" err="1">
+              <a:rPr lang="en-US" b="1" kern="0" dirty="0" err="1">
                 <a:solidFill>
                   <a:srgbClr val="ED7D31"/>
                 </a:solidFill>
-                <a:latin typeface="Menlo" panose="020B0609030804020204" pitchFamily="49" charset="0"/>
-                <a:cs typeface="Arial"/>
+                <a:latin typeface="Courier New" panose="02070309020205020404" pitchFamily="49" charset="0"/>
+                <a:cs typeface="Courier New" panose="02070309020205020404" pitchFamily="49" charset="0"/>
                 <a:sym typeface="Arial"/>
               </a:rPr>
               <a:t>symmetric_key_alg</a:t>
             </a:r>
             <a:r>
-              <a:rPr lang="en-US" kern="0" dirty="0">
+              <a:rPr lang="en-US" b="1" kern="0" dirty="0">
                 <a:solidFill>
                   <a:srgbClr val="000000">
                     <a:lumMod val="50000"/>
                     <a:lumOff val="50000"/>
                   </a:srgbClr>
                 </a:solidFill>
-                <a:latin typeface="Menlo" panose="020B0609030804020204" pitchFamily="49" charset="0"/>
-                <a:cs typeface="Arial"/>
+                <a:latin typeface="Courier New" panose="02070309020205020404" pitchFamily="49" charset="0"/>
+                <a:cs typeface="Courier New" panose="02070309020205020404" pitchFamily="49" charset="0"/>
                 <a:sym typeface="Arial"/>
               </a:rPr>
               <a:t>(</a:t>
             </a:r>
             <a:r>
-              <a:rPr lang="en-US" kern="0" dirty="0">
+              <a:rPr lang="en-US" b="1" kern="0" dirty="0">
                 <a:solidFill>
                   <a:srgbClr val="CE9178"/>
                 </a:solidFill>
-                <a:latin typeface="Menlo" panose="020B0609030804020204" pitchFamily="49" charset="0"/>
-                <a:cs typeface="Arial"/>
+                <a:latin typeface="Courier New" panose="02070309020205020404" pitchFamily="49" charset="0"/>
+                <a:cs typeface="Courier New" panose="02070309020205020404" pitchFamily="49" charset="0"/>
                 <a:sym typeface="Arial"/>
               </a:rPr>
               <a:t>"aes-256-gcm"</a:t>
             </a:r>
             <a:r>
-              <a:rPr lang="en-US" kern="0" dirty="0">
+              <a:rPr lang="en-US" b="1" kern="0" dirty="0">
                 <a:solidFill>
                   <a:srgbClr val="000000">
                     <a:lumMod val="50000"/>
                     <a:lumOff val="50000"/>
                   </a:srgbClr>
                 </a:solidFill>
-                <a:latin typeface="Menlo" panose="020B0609030804020204" pitchFamily="49" charset="0"/>
-                <a:cs typeface="Arial"/>
+                <a:latin typeface="Courier New" panose="02070309020205020404" pitchFamily="49" charset="0"/>
+                <a:cs typeface="Courier New" panose="02070309020205020404" pitchFamily="49" charset="0"/>
                 <a:sym typeface="Arial"/>
               </a:rPr>
               <a:t>);</a:t>
             </a:r>
             <a:r>
-              <a:rPr lang="en-US" kern="0" dirty="0">
+              <a:rPr lang="en-US" b="1" kern="0" dirty="0">
                 <a:solidFill>
                   <a:srgbClr val="CCCCCC"/>
                 </a:solidFill>
-                <a:latin typeface="Menlo" panose="020B0609030804020204" pitchFamily="49" charset="0"/>
-                <a:cs typeface="Arial"/>
+                <a:latin typeface="Courier New" panose="02070309020205020404" pitchFamily="49" charset="0"/>
+                <a:cs typeface="Courier New" panose="02070309020205020404" pitchFamily="49" charset="0"/>
                 <a:sym typeface="Arial"/>
               </a:rPr>
               <a:t> </a:t>
@@ -23354,159 +26102,159 @@
               <a:buNone/>
             </a:pPr>
             <a:r>
-              <a:rPr lang="en-US" kern="0" dirty="0" err="1">
+              <a:rPr lang="en-US" b="1" kern="0" dirty="0" err="1">
                 <a:solidFill>
                   <a:srgbClr val="4EC9B0"/>
                 </a:solidFill>
-                <a:latin typeface="Menlo" panose="020B0609030804020204" pitchFamily="49" charset="0"/>
-                <a:cs typeface="Arial"/>
+                <a:latin typeface="Courier New" panose="02070309020205020404" pitchFamily="49" charset="0"/>
+                <a:cs typeface="Courier New" panose="02070309020205020404" pitchFamily="49" charset="0"/>
                 <a:sym typeface="Arial"/>
               </a:rPr>
               <a:t>cc_trust_manager</a:t>
             </a:r>
             <a:r>
-              <a:rPr lang="en-US" kern="0" dirty="0">
+              <a:rPr lang="en-US" b="1" kern="0" dirty="0">
                 <a:solidFill>
                   <a:srgbClr val="4EC9B0"/>
                 </a:solidFill>
-                <a:latin typeface="Menlo" panose="020B0609030804020204" pitchFamily="49" charset="0"/>
-                <a:cs typeface="Arial"/>
+                <a:latin typeface="Courier New" panose="02070309020205020404" pitchFamily="49" charset="0"/>
+                <a:cs typeface="Courier New" panose="02070309020205020404" pitchFamily="49" charset="0"/>
                 <a:sym typeface="Arial"/>
               </a:rPr>
               <a:t> </a:t>
             </a:r>
             <a:r>
-              <a:rPr lang="en-US" kern="0" dirty="0" err="1">
+              <a:rPr lang="en-US" b="1" kern="0" dirty="0" err="1">
                 <a:solidFill>
                   <a:srgbClr val="ED7D31"/>
                 </a:solidFill>
-                <a:latin typeface="Menlo" panose="020B0609030804020204" pitchFamily="49" charset="0"/>
-                <a:cs typeface="Arial"/>
+                <a:latin typeface="Courier New" panose="02070309020205020404" pitchFamily="49" charset="0"/>
+                <a:cs typeface="Courier New" panose="02070309020205020404" pitchFamily="49" charset="0"/>
                 <a:sym typeface="Arial"/>
               </a:rPr>
               <a:t>trust_mgr</a:t>
             </a:r>
             <a:r>
-              <a:rPr lang="en-US" kern="0" dirty="0">
+              <a:rPr lang="en-US" b="1" kern="0" dirty="0">
                 <a:solidFill>
                   <a:srgbClr val="000000">
                     <a:lumMod val="50000"/>
                     <a:lumOff val="50000"/>
                   </a:srgbClr>
                 </a:solidFill>
-                <a:latin typeface="Menlo" panose="020B0609030804020204" pitchFamily="49" charset="0"/>
-                <a:cs typeface="Arial"/>
+                <a:latin typeface="Courier New" panose="02070309020205020404" pitchFamily="49" charset="0"/>
+                <a:cs typeface="Courier New" panose="02070309020205020404" pitchFamily="49" charset="0"/>
                 <a:sym typeface="Arial"/>
               </a:rPr>
               <a:t>(“</a:t>
             </a:r>
             <a:r>
-              <a:rPr lang="en-US" kern="0" dirty="0" err="1">
+              <a:rPr lang="en-US" b="1" kern="0" dirty="0" err="1">
                 <a:solidFill>
                   <a:srgbClr val="4EC9B0"/>
                 </a:solidFill>
-                <a:latin typeface="Menlo" panose="020B0609030804020204" pitchFamily="49" charset="0"/>
-                <a:cs typeface="Arial"/>
+                <a:latin typeface="Courier New" panose="02070309020205020404" pitchFamily="49" charset="0"/>
+                <a:cs typeface="Courier New" panose="02070309020205020404" pitchFamily="49" charset="0"/>
                 <a:sym typeface="Arial"/>
               </a:rPr>
               <a:t>sev</a:t>
             </a:r>
             <a:r>
-              <a:rPr lang="en-US" kern="0" dirty="0">
+              <a:rPr lang="en-US" b="1" kern="0" dirty="0">
                 <a:solidFill>
                   <a:srgbClr val="000000">
                     <a:lumMod val="50000"/>
                     <a:lumOff val="50000"/>
                   </a:srgbClr>
                 </a:solidFill>
-                <a:latin typeface="Menlo" panose="020B0609030804020204" pitchFamily="49" charset="0"/>
-                <a:cs typeface="Arial"/>
+                <a:latin typeface="Courier New" panose="02070309020205020404" pitchFamily="49" charset="0"/>
+                <a:cs typeface="Courier New" panose="02070309020205020404" pitchFamily="49" charset="0"/>
                 <a:sym typeface="Arial"/>
               </a:rPr>
               <a:t>-</a:t>
             </a:r>
             <a:r>
-              <a:rPr lang="en-US" kern="0" dirty="0">
+              <a:rPr lang="en-US" b="1" kern="0" dirty="0">
                 <a:solidFill>
                   <a:srgbClr val="4EC9B0"/>
                 </a:solidFill>
-                <a:latin typeface="Menlo" panose="020B0609030804020204" pitchFamily="49" charset="0"/>
-                <a:cs typeface="Arial"/>
+                <a:latin typeface="Courier New" panose="02070309020205020404" pitchFamily="49" charset="0"/>
+                <a:cs typeface="Courier New" panose="02070309020205020404" pitchFamily="49" charset="0"/>
                 <a:sym typeface="Arial"/>
               </a:rPr>
               <a:t>enclave</a:t>
             </a:r>
             <a:r>
-              <a:rPr lang="en-US" kern="0" dirty="0">
+              <a:rPr lang="en-US" b="1" kern="0" dirty="0">
                 <a:solidFill>
                   <a:srgbClr val="000000">
                     <a:lumMod val="50000"/>
                     <a:lumOff val="50000"/>
                   </a:srgbClr>
                 </a:solidFill>
-                <a:latin typeface="Menlo" panose="020B0609030804020204" pitchFamily="49" charset="0"/>
-                <a:cs typeface="Arial"/>
+                <a:latin typeface="Courier New" panose="02070309020205020404" pitchFamily="49" charset="0"/>
+                <a:cs typeface="Courier New" panose="02070309020205020404" pitchFamily="49" charset="0"/>
                 <a:sym typeface="Arial"/>
               </a:rPr>
               <a:t>”, “</a:t>
             </a:r>
             <a:r>
-              <a:rPr lang="en-US" kern="0" dirty="0">
+              <a:rPr lang="en-US" b="1" kern="0" dirty="0">
                 <a:solidFill>
                   <a:srgbClr val="4EC9B0"/>
                 </a:solidFill>
-                <a:latin typeface="Menlo" panose="020B0609030804020204" pitchFamily="49" charset="0"/>
-                <a:cs typeface="Arial"/>
+                <a:latin typeface="Courier New" panose="02070309020205020404" pitchFamily="49" charset="0"/>
+                <a:cs typeface="Courier New" panose="02070309020205020404" pitchFamily="49" charset="0"/>
                 <a:sym typeface="Arial"/>
               </a:rPr>
               <a:t>authentication</a:t>
             </a:r>
             <a:r>
-              <a:rPr lang="en-US" kern="0" dirty="0">
+              <a:rPr lang="en-US" b="1" kern="0" dirty="0">
                 <a:solidFill>
                   <a:srgbClr val="000000">
                     <a:lumMod val="50000"/>
                     <a:lumOff val="50000"/>
                   </a:srgbClr>
                 </a:solidFill>
-                <a:latin typeface="Menlo" panose="020B0609030804020204" pitchFamily="49" charset="0"/>
-                <a:cs typeface="Arial"/>
+                <a:latin typeface="Courier New" panose="02070309020205020404" pitchFamily="49" charset="0"/>
+                <a:cs typeface="Courier New" panose="02070309020205020404" pitchFamily="49" charset="0"/>
                 <a:sym typeface="Arial"/>
               </a:rPr>
               <a:t>”, “</a:t>
             </a:r>
             <a:r>
-              <a:rPr lang="en-US" kern="0" dirty="0">
+              <a:rPr lang="en-US" b="1" kern="0" dirty="0">
                 <a:solidFill>
                   <a:srgbClr val="4EC9B0"/>
                 </a:solidFill>
-                <a:latin typeface="Menlo" panose="020B0609030804020204" pitchFamily="49" charset="0"/>
-                <a:cs typeface="Arial"/>
+                <a:latin typeface="Courier New" panose="02070309020205020404" pitchFamily="49" charset="0"/>
+                <a:cs typeface="Courier New" panose="02070309020205020404" pitchFamily="49" charset="0"/>
                 <a:sym typeface="Arial"/>
               </a:rPr>
               <a:t>store</a:t>
             </a:r>
             <a:r>
-              <a:rPr lang="en-US" kern="0" dirty="0">
+              <a:rPr lang="en-US" b="1" kern="0" dirty="0">
                 <a:solidFill>
                   <a:srgbClr val="000000">
                     <a:lumMod val="50000"/>
                     <a:lumOff val="50000"/>
                   </a:srgbClr>
                 </a:solidFill>
-                <a:latin typeface="Menlo" panose="020B0609030804020204" pitchFamily="49" charset="0"/>
-                <a:cs typeface="Arial"/>
+                <a:latin typeface="Courier New" panose="02070309020205020404" pitchFamily="49" charset="0"/>
+                <a:cs typeface="Courier New" panose="02070309020205020404" pitchFamily="49" charset="0"/>
                 <a:sym typeface="Arial"/>
               </a:rPr>
               <a:t>”);</a:t>
             </a:r>
             <a:r>
-              <a:rPr lang="en-US" kern="0" dirty="0">
+              <a:rPr lang="en-US" b="1" kern="0" dirty="0">
                 <a:solidFill>
                   <a:srgbClr val="CCCCCC"/>
                 </a:solidFill>
-                <a:latin typeface="Menlo" panose="020B0609030804020204" pitchFamily="49" charset="0"/>
-                <a:cs typeface="Arial"/>
+                <a:latin typeface="Courier New" panose="02070309020205020404" pitchFamily="49" charset="0"/>
+                <a:cs typeface="Courier New" panose="02070309020205020404" pitchFamily="49" charset="0"/>
                 <a:sym typeface="Arial"/>
               </a:rPr>
               <a:t> </a:t>
@@ -23521,108 +26269,108 @@
               <a:buNone/>
             </a:pPr>
             <a:br>
-              <a:rPr lang="en-US" kern="0" dirty="0">
+              <a:rPr lang="en-US" b="1" kern="0" dirty="0">
                 <a:solidFill>
                   <a:srgbClr val="CCCCCC"/>
                 </a:solidFill>
-                <a:latin typeface="Menlo" panose="020B0609030804020204" pitchFamily="49" charset="0"/>
-                <a:cs typeface="Arial"/>
+                <a:latin typeface="Courier New" panose="02070309020205020404" pitchFamily="49" charset="0"/>
+                <a:cs typeface="Courier New" panose="02070309020205020404" pitchFamily="49" charset="0"/>
                 <a:sym typeface="Arial"/>
               </a:rPr>
             </a:br>
             <a:r>
-              <a:rPr lang="en-US" kern="0" dirty="0" err="1">
+              <a:rPr lang="en-US" b="1" kern="0" dirty="0" err="1">
                 <a:solidFill>
                   <a:srgbClr val="9CDCFE"/>
                 </a:solidFill>
-                <a:latin typeface="Menlo" panose="020B0609030804020204" pitchFamily="49" charset="0"/>
-                <a:cs typeface="Arial"/>
+                <a:latin typeface="Courier New" panose="02070309020205020404" pitchFamily="49" charset="0"/>
+                <a:cs typeface="Courier New" panose="02070309020205020404" pitchFamily="49" charset="0"/>
                 <a:sym typeface="Arial"/>
               </a:rPr>
               <a:t>trust_mgr</a:t>
             </a:r>
             <a:r>
-              <a:rPr lang="en-US" kern="0" dirty="0" err="1">
+              <a:rPr lang="en-US" b="1" kern="0" dirty="0" err="1">
                 <a:solidFill>
                   <a:srgbClr val="CCCCCC"/>
                 </a:solidFill>
-                <a:latin typeface="Menlo" panose="020B0609030804020204" pitchFamily="49" charset="0"/>
-                <a:cs typeface="Arial"/>
+                <a:latin typeface="Courier New" panose="02070309020205020404" pitchFamily="49" charset="0"/>
+                <a:cs typeface="Courier New" panose="02070309020205020404" pitchFamily="49" charset="0"/>
                 <a:sym typeface="Arial"/>
               </a:rPr>
               <a:t>.</a:t>
             </a:r>
             <a:r>
-              <a:rPr lang="en-US" kern="0" dirty="0" err="1">
+              <a:rPr lang="en-US" b="1" kern="0" dirty="0" err="1">
                 <a:solidFill>
                   <a:srgbClr val="DCDCAA"/>
                 </a:solidFill>
-                <a:latin typeface="Menlo" panose="020B0609030804020204" pitchFamily="49" charset="0"/>
-                <a:cs typeface="Arial"/>
+                <a:latin typeface="Courier New" panose="02070309020205020404" pitchFamily="49" charset="0"/>
+                <a:cs typeface="Courier New" panose="02070309020205020404" pitchFamily="49" charset="0"/>
                 <a:sym typeface="Arial"/>
               </a:rPr>
               <a:t>initialize_enclave</a:t>
             </a:r>
             <a:r>
-              <a:rPr lang="en-US" kern="0" dirty="0">
+              <a:rPr lang="en-US" b="1" kern="0" dirty="0">
                 <a:solidFill>
                   <a:srgbClr val="CCCCCC"/>
                 </a:solidFill>
-                <a:latin typeface="Menlo" panose="020B0609030804020204" pitchFamily="49" charset="0"/>
-                <a:cs typeface="Arial"/>
+                <a:latin typeface="Courier New" panose="02070309020205020404" pitchFamily="49" charset="0"/>
+                <a:cs typeface="Courier New" panose="02070309020205020404" pitchFamily="49" charset="0"/>
                 <a:sym typeface="Arial"/>
               </a:rPr>
               <a:t>(NULL);</a:t>
             </a:r>
             <a:r>
-              <a:rPr lang="en-US" kern="0" dirty="0">
+              <a:rPr lang="en-US" b="1" kern="0" dirty="0">
                 <a:solidFill>
                   <a:srgbClr val="6A9955"/>
                 </a:solidFill>
-                <a:latin typeface="Menlo" panose="020B0609030804020204" pitchFamily="49" charset="0"/>
-                <a:cs typeface="Arial"/>
+                <a:latin typeface="Courier New" panose="02070309020205020404" pitchFamily="49" charset="0"/>
+                <a:cs typeface="Courier New" panose="02070309020205020404" pitchFamily="49" charset="0"/>
                 <a:sym typeface="Arial"/>
               </a:rPr>
               <a:t> </a:t>
             </a:r>
             <a:r>
-              <a:rPr lang="en-US" kern="0" dirty="0">
+              <a:rPr lang="en-US" b="1" kern="0" dirty="0">
                 <a:solidFill>
                   <a:srgbClr val="70AD47">
                     <a:lumMod val="40000"/>
                     <a:lumOff val="60000"/>
                   </a:srgbClr>
                 </a:solidFill>
-                <a:latin typeface="Menlo" panose="020B0609030804020204" pitchFamily="49" charset="0"/>
-                <a:cs typeface="Arial"/>
+                <a:latin typeface="Courier New" panose="02070309020205020404" pitchFamily="49" charset="0"/>
+                <a:cs typeface="Courier New" panose="02070309020205020404" pitchFamily="49" charset="0"/>
                 <a:sym typeface="Arial"/>
               </a:rPr>
               <a:t>// </a:t>
             </a:r>
             <a:r>
-              <a:rPr lang="en-US" kern="0" dirty="0" err="1">
+              <a:rPr lang="en-US" b="1" kern="0" dirty="0" err="1">
                 <a:solidFill>
                   <a:srgbClr val="70AD47">
                     <a:lumMod val="40000"/>
                     <a:lumOff val="60000"/>
                   </a:srgbClr>
                 </a:solidFill>
-                <a:latin typeface="Menlo" panose="020B0609030804020204" pitchFamily="49" charset="0"/>
-                <a:cs typeface="Arial"/>
+                <a:latin typeface="Courier New" panose="02070309020205020404" pitchFamily="49" charset="0"/>
+                <a:cs typeface="Courier New" panose="02070309020205020404" pitchFamily="49" charset="0"/>
                 <a:sym typeface="Arial"/>
               </a:rPr>
               <a:t>init</a:t>
             </a:r>
             <a:r>
-              <a:rPr lang="en-US" kern="0" dirty="0">
+              <a:rPr lang="en-US" b="1" kern="0" dirty="0">
                 <a:solidFill>
                   <a:srgbClr val="70AD47">
                     <a:lumMod val="40000"/>
                     <a:lumOff val="60000"/>
                   </a:srgbClr>
                 </a:solidFill>
-                <a:latin typeface="Menlo" panose="020B0609030804020204" pitchFamily="49" charset="0"/>
-                <a:cs typeface="Arial"/>
+                <a:latin typeface="Courier New" panose="02070309020205020404" pitchFamily="49" charset="0"/>
+                <a:cs typeface="Courier New" panose="02070309020205020404" pitchFamily="49" charset="0"/>
                 <a:sym typeface="Arial"/>
               </a:rPr>
               <a:t> enclave</a:t>
@@ -23637,89 +26385,89 @@
               <a:buNone/>
             </a:pPr>
             <a:r>
-              <a:rPr lang="en-US" kern="0" dirty="0" err="1">
+              <a:rPr lang="en-US" b="1" kern="0" dirty="0" err="1">
                 <a:solidFill>
                   <a:srgbClr val="9CDCFE"/>
                 </a:solidFill>
-                <a:latin typeface="Menlo" panose="020B0609030804020204" pitchFamily="49" charset="0"/>
-                <a:cs typeface="Arial"/>
+                <a:latin typeface="Courier New" panose="02070309020205020404" pitchFamily="49" charset="0"/>
+                <a:cs typeface="Courier New" panose="02070309020205020404" pitchFamily="49" charset="0"/>
                 <a:sym typeface="Arial"/>
               </a:rPr>
               <a:t>trust_mgr</a:t>
             </a:r>
             <a:r>
-              <a:rPr lang="en-US" kern="0" dirty="0" err="1">
+              <a:rPr lang="en-US" b="1" kern="0" dirty="0" err="1">
                 <a:solidFill>
                   <a:srgbClr val="CCCCCC"/>
                 </a:solidFill>
-                <a:latin typeface="Menlo" panose="020B0609030804020204" pitchFamily="49" charset="0"/>
-                <a:cs typeface="Arial"/>
+                <a:latin typeface="Courier New" panose="02070309020205020404" pitchFamily="49" charset="0"/>
+                <a:cs typeface="Courier New" panose="02070309020205020404" pitchFamily="49" charset="0"/>
                 <a:sym typeface="Arial"/>
               </a:rPr>
               <a:t>.</a:t>
             </a:r>
             <a:r>
-              <a:rPr lang="en-US" kern="0" dirty="0" err="1">
+              <a:rPr lang="en-US" b="1" kern="0" dirty="0" err="1">
                 <a:solidFill>
                   <a:srgbClr val="DCDCAA"/>
                 </a:solidFill>
-                <a:latin typeface="Menlo" panose="020B0609030804020204" pitchFamily="49" charset="0"/>
-                <a:cs typeface="Arial"/>
+                <a:latin typeface="Courier New" panose="02070309020205020404" pitchFamily="49" charset="0"/>
+                <a:cs typeface="Courier New" panose="02070309020205020404" pitchFamily="49" charset="0"/>
                 <a:sym typeface="Arial"/>
               </a:rPr>
               <a:t>init_policy_key</a:t>
             </a:r>
             <a:r>
-              <a:rPr lang="en-US" kern="0" dirty="0">
+              <a:rPr lang="en-US" b="1" kern="0" dirty="0">
                 <a:solidFill>
                   <a:srgbClr val="CCCCCC"/>
                 </a:solidFill>
-                <a:latin typeface="Menlo" panose="020B0609030804020204" pitchFamily="49" charset="0"/>
-                <a:cs typeface="Arial"/>
+                <a:latin typeface="Courier New" panose="02070309020205020404" pitchFamily="49" charset="0"/>
+                <a:cs typeface="Courier New" panose="02070309020205020404" pitchFamily="49" charset="0"/>
                 <a:sym typeface="Arial"/>
               </a:rPr>
               <a:t>(</a:t>
             </a:r>
             <a:r>
-              <a:rPr lang="en-US" kern="0" dirty="0" err="1">
+              <a:rPr lang="en-US" b="1" kern="0" dirty="0" err="1">
                 <a:solidFill>
                   <a:srgbClr val="CCCCCC"/>
                 </a:solidFill>
-                <a:latin typeface="Menlo" panose="020B0609030804020204" pitchFamily="49" charset="0"/>
-                <a:cs typeface="Arial"/>
+                <a:latin typeface="Courier New" panose="02070309020205020404" pitchFamily="49" charset="0"/>
+                <a:cs typeface="Courier New" panose="02070309020205020404" pitchFamily="49" charset="0"/>
                 <a:sym typeface="Arial"/>
               </a:rPr>
               <a:t>initialized_cert_size</a:t>
             </a:r>
             <a:r>
-              <a:rPr lang="en-US" kern="0" dirty="0">
+              <a:rPr lang="en-US" b="1" kern="0" dirty="0">
                 <a:solidFill>
                   <a:srgbClr val="CCCCCC"/>
                 </a:solidFill>
-                <a:latin typeface="Menlo" panose="020B0609030804020204" pitchFamily="49" charset="0"/>
-                <a:cs typeface="Arial"/>
+                <a:latin typeface="Courier New" panose="02070309020205020404" pitchFamily="49" charset="0"/>
+                <a:cs typeface="Courier New" panose="02070309020205020404" pitchFamily="49" charset="0"/>
                 <a:sym typeface="Arial"/>
               </a:rPr>
               <a:t>, </a:t>
             </a:r>
             <a:r>
-              <a:rPr lang="en-US" kern="0" dirty="0" err="1">
+              <a:rPr lang="en-US" b="1" kern="0" dirty="0" err="1">
                 <a:solidFill>
                   <a:srgbClr val="CCCCCC"/>
                 </a:solidFill>
-                <a:latin typeface="Menlo" panose="020B0609030804020204" pitchFamily="49" charset="0"/>
-                <a:cs typeface="Arial"/>
+                <a:latin typeface="Courier New" panose="02070309020205020404" pitchFamily="49" charset="0"/>
+                <a:cs typeface="Courier New" panose="02070309020205020404" pitchFamily="49" charset="0"/>
                 <a:sym typeface="Arial"/>
               </a:rPr>
               <a:t>initialized_cert</a:t>
             </a:r>
             <a:r>
-              <a:rPr lang="en-US" kern="0" dirty="0">
+              <a:rPr lang="en-US" b="1" kern="0" dirty="0">
                 <a:solidFill>
                   <a:srgbClr val="CCCCCC"/>
                 </a:solidFill>
-                <a:latin typeface="Menlo" panose="020B0609030804020204" pitchFamily="49" charset="0"/>
-                <a:cs typeface="Arial"/>
+                <a:latin typeface="Courier New" panose="02070309020205020404" pitchFamily="49" charset="0"/>
+                <a:cs typeface="Courier New" panose="02070309020205020404" pitchFamily="49" charset="0"/>
                 <a:sym typeface="Arial"/>
               </a:rPr>
               <a:t>)</a:t>
@@ -23734,89 +26482,89 @@
               <a:buNone/>
             </a:pPr>
             <a:r>
-              <a:rPr lang="en-US" kern="0" dirty="0" err="1">
+              <a:rPr lang="en-US" b="1" kern="0" dirty="0" err="1">
                 <a:solidFill>
                   <a:srgbClr val="9CDCFE"/>
                 </a:solidFill>
-                <a:latin typeface="Menlo" panose="020B0609030804020204" pitchFamily="49" charset="0"/>
-                <a:cs typeface="Arial"/>
+                <a:latin typeface="Courier New" panose="02070309020205020404" pitchFamily="49" charset="0"/>
+                <a:cs typeface="Courier New" panose="02070309020205020404" pitchFamily="49" charset="0"/>
                 <a:sym typeface="Arial"/>
               </a:rPr>
               <a:t>trust_mgr</a:t>
             </a:r>
             <a:r>
-              <a:rPr lang="en-US" kern="0" dirty="0" err="1">
+              <a:rPr lang="en-US" b="1" kern="0" dirty="0" err="1">
                 <a:solidFill>
                   <a:srgbClr val="CCCCCC"/>
                 </a:solidFill>
-                <a:latin typeface="Menlo" panose="020B0609030804020204" pitchFamily="49" charset="0"/>
-                <a:cs typeface="Arial"/>
+                <a:latin typeface="Courier New" panose="02070309020205020404" pitchFamily="49" charset="0"/>
+                <a:cs typeface="Courier New" panose="02070309020205020404" pitchFamily="49" charset="0"/>
                 <a:sym typeface="Arial"/>
               </a:rPr>
               <a:t>.</a:t>
             </a:r>
             <a:r>
-              <a:rPr lang="en-US" kern="0" dirty="0" err="1">
+              <a:rPr lang="en-US" b="1" kern="0" dirty="0" err="1">
                 <a:solidFill>
                   <a:srgbClr val="DCDCAA"/>
                 </a:solidFill>
-                <a:latin typeface="Menlo" panose="020B0609030804020204" pitchFamily="49" charset="0"/>
-                <a:cs typeface="Arial"/>
+                <a:latin typeface="Courier New" panose="02070309020205020404" pitchFamily="49" charset="0"/>
+                <a:cs typeface="Courier New" panose="02070309020205020404" pitchFamily="49" charset="0"/>
                 <a:sym typeface="Arial"/>
               </a:rPr>
               <a:t>cold_init</a:t>
             </a:r>
             <a:r>
-              <a:rPr lang="en-US" kern="0" dirty="0">
+              <a:rPr lang="en-US" b="1" kern="0" dirty="0">
                 <a:solidFill>
                   <a:srgbClr val="CCCCCC"/>
                 </a:solidFill>
-                <a:latin typeface="Menlo" panose="020B0609030804020204" pitchFamily="49" charset="0"/>
-                <a:cs typeface="Arial"/>
+                <a:latin typeface="Courier New" panose="02070309020205020404" pitchFamily="49" charset="0"/>
+                <a:cs typeface="Courier New" panose="02070309020205020404" pitchFamily="49" charset="0"/>
                 <a:sym typeface="Arial"/>
               </a:rPr>
               <a:t>(</a:t>
             </a:r>
             <a:r>
-              <a:rPr lang="en-US" kern="0" dirty="0" err="1">
+              <a:rPr lang="en-US" b="1" kern="0" dirty="0" err="1">
                 <a:solidFill>
                   <a:srgbClr val="CCCCCC"/>
                 </a:solidFill>
-                <a:latin typeface="Menlo" panose="020B0609030804020204" pitchFamily="49" charset="0"/>
-                <a:cs typeface="Arial"/>
+                <a:latin typeface="Courier New" panose="02070309020205020404" pitchFamily="49" charset="0"/>
+                <a:cs typeface="Courier New" panose="02070309020205020404" pitchFamily="49" charset="0"/>
                 <a:sym typeface="Arial"/>
               </a:rPr>
               <a:t>public_key_alg</a:t>
             </a:r>
             <a:r>
-              <a:rPr lang="en-US" kern="0" dirty="0">
+              <a:rPr lang="en-US" b="1" kern="0" dirty="0">
                 <a:solidFill>
                   <a:srgbClr val="CCCCCC"/>
                 </a:solidFill>
-                <a:latin typeface="Menlo" panose="020B0609030804020204" pitchFamily="49" charset="0"/>
-                <a:cs typeface="Arial"/>
+                <a:latin typeface="Courier New" panose="02070309020205020404" pitchFamily="49" charset="0"/>
+                <a:cs typeface="Courier New" panose="02070309020205020404" pitchFamily="49" charset="0"/>
                 <a:sym typeface="Arial"/>
               </a:rPr>
               <a:t>, </a:t>
             </a:r>
             <a:r>
-              <a:rPr lang="en-US" kern="0" dirty="0" err="1">
+              <a:rPr lang="en-US" b="1" kern="0" dirty="0" err="1">
                 <a:solidFill>
                   <a:srgbClr val="CCCCCC"/>
                 </a:solidFill>
-                <a:latin typeface="Menlo" panose="020B0609030804020204" pitchFamily="49" charset="0"/>
-                <a:cs typeface="Arial"/>
+                <a:latin typeface="Courier New" panose="02070309020205020404" pitchFamily="49" charset="0"/>
+                <a:cs typeface="Courier New" panose="02070309020205020404" pitchFamily="49" charset="0"/>
                 <a:sym typeface="Arial"/>
               </a:rPr>
               <a:t>symmetric_key_alg</a:t>
             </a:r>
             <a:r>
-              <a:rPr lang="en-US" kern="0" dirty="0">
+              <a:rPr lang="en-US" b="1" kern="0" dirty="0">
                 <a:solidFill>
                   <a:srgbClr val="CCCCCC"/>
                 </a:solidFill>
-                <a:latin typeface="Menlo" panose="020B0609030804020204" pitchFamily="49" charset="0"/>
-                <a:cs typeface="Arial"/>
+                <a:latin typeface="Courier New" panose="02070309020205020404" pitchFamily="49" charset="0"/>
+                <a:cs typeface="Courier New" panose="02070309020205020404" pitchFamily="49" charset="0"/>
                 <a:sym typeface="Arial"/>
               </a:rPr>
               <a:t>, …);</a:t>
@@ -23831,70 +26579,70 @@
               <a:buNone/>
             </a:pPr>
             <a:r>
-              <a:rPr lang="en-US" kern="0" dirty="0" err="1">
+              <a:rPr lang="en-US" b="1" kern="0" dirty="0" err="1">
                 <a:solidFill>
                   <a:srgbClr val="9CDCFE"/>
                 </a:solidFill>
-                <a:latin typeface="Menlo" panose="020B0609030804020204" pitchFamily="49" charset="0"/>
-                <a:cs typeface="Arial"/>
+                <a:latin typeface="Courier New" panose="02070309020205020404" pitchFamily="49" charset="0"/>
+                <a:cs typeface="Courier New" panose="02070309020205020404" pitchFamily="49" charset="0"/>
                 <a:sym typeface="Arial"/>
               </a:rPr>
               <a:t>trust_mgr</a:t>
             </a:r>
             <a:r>
-              <a:rPr lang="en-US" kern="0" dirty="0" err="1">
+              <a:rPr lang="en-US" b="1" kern="0" dirty="0" err="1">
                 <a:solidFill>
                   <a:srgbClr val="CCCCCC"/>
                 </a:solidFill>
-                <a:latin typeface="Menlo" panose="020B0609030804020204" pitchFamily="49" charset="0"/>
-                <a:cs typeface="Arial"/>
+                <a:latin typeface="Courier New" panose="02070309020205020404" pitchFamily="49" charset="0"/>
+                <a:cs typeface="Courier New" panose="02070309020205020404" pitchFamily="49" charset="0"/>
                 <a:sym typeface="Arial"/>
               </a:rPr>
               <a:t>.</a:t>
             </a:r>
             <a:r>
-              <a:rPr lang="en-US" kern="0" dirty="0" err="1">
+              <a:rPr lang="en-US" b="1" kern="0" dirty="0" err="1">
                 <a:solidFill>
                   <a:srgbClr val="DCDCAA"/>
                 </a:solidFill>
-                <a:latin typeface="Menlo" panose="020B0609030804020204" pitchFamily="49" charset="0"/>
-                <a:cs typeface="Arial"/>
+                <a:latin typeface="Courier New" panose="02070309020205020404" pitchFamily="49" charset="0"/>
+                <a:cs typeface="Courier New" panose="02070309020205020404" pitchFamily="49" charset="0"/>
                 <a:sym typeface="Arial"/>
               </a:rPr>
               <a:t>certify_me</a:t>
             </a:r>
             <a:r>
-              <a:rPr lang="en-US" kern="0" dirty="0">
+              <a:rPr lang="en-US" b="1" kern="0" dirty="0">
                 <a:solidFill>
                   <a:srgbClr val="CCCCCC"/>
                 </a:solidFill>
-                <a:latin typeface="Menlo" panose="020B0609030804020204" pitchFamily="49" charset="0"/>
-                <a:cs typeface="Arial"/>
+                <a:latin typeface="Courier New" panose="02070309020205020404" pitchFamily="49" charset="0"/>
+                <a:cs typeface="Courier New" panose="02070309020205020404" pitchFamily="49" charset="0"/>
                 <a:sym typeface="Arial"/>
               </a:rPr>
               <a:t>();</a:t>
             </a:r>
             <a:r>
-              <a:rPr lang="en-US" kern="0" dirty="0">
+              <a:rPr lang="en-US" b="1" kern="0" dirty="0">
                 <a:solidFill>
                   <a:srgbClr val="6A9955"/>
                 </a:solidFill>
-                <a:latin typeface="Menlo" panose="020B0609030804020204" pitchFamily="49" charset="0"/>
-                <a:cs typeface="Arial"/>
+                <a:latin typeface="Courier New" panose="02070309020205020404" pitchFamily="49" charset="0"/>
+                <a:cs typeface="Courier New" panose="02070309020205020404" pitchFamily="49" charset="0"/>
                 <a:sym typeface="Arial"/>
               </a:rPr>
               <a:t> </a:t>
             </a:r>
             <a:r>
-              <a:rPr lang="en-US" kern="0" dirty="0">
+              <a:rPr lang="en-US" b="1" kern="0" dirty="0">
                 <a:solidFill>
                   <a:srgbClr val="70AD47">
                     <a:lumMod val="40000"/>
                     <a:lumOff val="60000"/>
                   </a:srgbClr>
                 </a:solidFill>
-                <a:latin typeface="Menlo" panose="020B0609030804020204" pitchFamily="49" charset="0"/>
-                <a:cs typeface="Arial"/>
+                <a:latin typeface="Courier New" panose="02070309020205020404" pitchFamily="49" charset="0"/>
+                <a:cs typeface="Courier New" panose="02070309020205020404" pitchFamily="49" charset="0"/>
                 <a:sym typeface="Arial"/>
               </a:rPr>
               <a:t>// Get admission certificate</a:t>
@@ -23909,94 +26657,94 @@
               <a:buNone/>
             </a:pPr>
             <a:br>
-              <a:rPr lang="en-US" kern="0" dirty="0">
+              <a:rPr lang="en-US" b="1" kern="0" dirty="0">
                 <a:solidFill>
                   <a:srgbClr val="CCCCCC"/>
                 </a:solidFill>
-                <a:latin typeface="Menlo" panose="020B0609030804020204" pitchFamily="49" charset="0"/>
-                <a:cs typeface="Arial"/>
+                <a:latin typeface="Courier New" panose="02070309020205020404" pitchFamily="49" charset="0"/>
+                <a:cs typeface="Courier New" panose="02070309020205020404" pitchFamily="49" charset="0"/>
                 <a:sym typeface="Arial"/>
               </a:rPr>
             </a:br>
             <a:r>
-              <a:rPr lang="en-US" kern="0" dirty="0" err="1">
+              <a:rPr lang="en-US" b="1" kern="0" dirty="0" err="1">
                 <a:solidFill>
                   <a:srgbClr val="4EC9B0"/>
                 </a:solidFill>
-                <a:latin typeface="Menlo" panose="020B0609030804020204" pitchFamily="49" charset="0"/>
-                <a:cs typeface="Arial"/>
+                <a:latin typeface="Courier New" panose="02070309020205020404" pitchFamily="49" charset="0"/>
+                <a:cs typeface="Courier New" panose="02070309020205020404" pitchFamily="49" charset="0"/>
                 <a:sym typeface="Arial"/>
               </a:rPr>
               <a:t>secure_authenticated_channel</a:t>
             </a:r>
             <a:r>
-              <a:rPr lang="en-US" kern="0" dirty="0">
+              <a:rPr lang="en-US" b="1" kern="0" dirty="0">
                 <a:solidFill>
                   <a:srgbClr val="CCCCCC"/>
                 </a:solidFill>
-                <a:latin typeface="Menlo" panose="020B0609030804020204" pitchFamily="49" charset="0"/>
-                <a:cs typeface="Arial"/>
+                <a:latin typeface="Courier New" panose="02070309020205020404" pitchFamily="49" charset="0"/>
+                <a:cs typeface="Courier New" panose="02070309020205020404" pitchFamily="49" charset="0"/>
                 <a:sym typeface="Arial"/>
               </a:rPr>
               <a:t> </a:t>
             </a:r>
             <a:r>
-              <a:rPr lang="en-US" kern="0" dirty="0">
+              <a:rPr lang="en-US" b="1" kern="0" dirty="0">
                 <a:solidFill>
                   <a:srgbClr val="ED7D31"/>
                 </a:solidFill>
-                <a:latin typeface="Menlo" panose="020B0609030804020204" pitchFamily="49" charset="0"/>
-                <a:cs typeface="Arial"/>
+                <a:latin typeface="Courier New" panose="02070309020205020404" pitchFamily="49" charset="0"/>
+                <a:cs typeface="Courier New" panose="02070309020205020404" pitchFamily="49" charset="0"/>
                 <a:sym typeface="Arial"/>
               </a:rPr>
               <a:t>channel</a:t>
             </a:r>
             <a:r>
-              <a:rPr lang="en-US" kern="0" dirty="0">
+              <a:rPr lang="en-US" b="1" kern="0" dirty="0">
                 <a:solidFill>
                   <a:srgbClr val="000000">
                     <a:lumMod val="50000"/>
                     <a:lumOff val="50000"/>
                   </a:srgbClr>
                 </a:solidFill>
-                <a:latin typeface="Menlo" panose="020B0609030804020204" pitchFamily="49" charset="0"/>
-                <a:cs typeface="Arial"/>
+                <a:latin typeface="Courier New" panose="02070309020205020404" pitchFamily="49" charset="0"/>
+                <a:cs typeface="Courier New" panose="02070309020205020404" pitchFamily="49" charset="0"/>
                 <a:sym typeface="Arial"/>
               </a:rPr>
               <a:t>(“</a:t>
             </a:r>
             <a:r>
-              <a:rPr lang="en-US" kern="0" dirty="0">
+              <a:rPr lang="en-US" b="1" kern="0" dirty="0">
                 <a:solidFill>
                   <a:srgbClr val="4EC9B0"/>
                 </a:solidFill>
-                <a:latin typeface="Menlo" panose="020B0609030804020204" pitchFamily="49" charset="0"/>
-                <a:cs typeface="Arial"/>
+                <a:latin typeface="Courier New" panose="02070309020205020404" pitchFamily="49" charset="0"/>
+                <a:cs typeface="Courier New" panose="02070309020205020404" pitchFamily="49" charset="0"/>
                 <a:sym typeface="Arial"/>
               </a:rPr>
               <a:t>client</a:t>
             </a:r>
             <a:r>
-              <a:rPr lang="en-US" kern="0" dirty="0">
+              <a:rPr lang="en-US" b="1" kern="0" dirty="0">
                 <a:solidFill>
                   <a:srgbClr val="000000">
                     <a:lumMod val="50000"/>
                     <a:lumOff val="50000"/>
                   </a:srgbClr>
                 </a:solidFill>
-                <a:latin typeface="Menlo" panose="020B0609030804020204" pitchFamily="49" charset="0"/>
-                <a:cs typeface="Arial"/>
+                <a:latin typeface="Courier New" panose="02070309020205020404" pitchFamily="49" charset="0"/>
+                <a:cs typeface="Courier New" panose="02070309020205020404" pitchFamily="49" charset="0"/>
                 <a:sym typeface="Arial"/>
               </a:rPr>
               <a:t>”);</a:t>
             </a:r>
             <a:r>
-              <a:rPr lang="en-US" kern="0" dirty="0">
+              <a:rPr lang="en-US" b="1" kern="0" dirty="0">
                 <a:solidFill>
                   <a:srgbClr val="CCCCCC"/>
                 </a:solidFill>
-                <a:latin typeface="Menlo" panose="020B0609030804020204" pitchFamily="49" charset="0"/>
-                <a:cs typeface="Arial"/>
+                <a:latin typeface="Courier New" panose="02070309020205020404" pitchFamily="49" charset="0"/>
+                <a:cs typeface="Courier New" panose="02070309020205020404" pitchFamily="49" charset="0"/>
                 <a:sym typeface="Arial"/>
               </a:rPr>
               <a:t> </a:t>
@@ -24011,79 +26759,79 @@
               <a:buNone/>
             </a:pPr>
             <a:r>
-              <a:rPr lang="en-US" kern="0" dirty="0" err="1">
+              <a:rPr lang="en-US" b="1" kern="0" dirty="0" err="1">
                 <a:solidFill>
                   <a:srgbClr val="4472C4"/>
                 </a:solidFill>
-                <a:latin typeface="Menlo" panose="020B0609030804020204" pitchFamily="49" charset="0"/>
-                <a:cs typeface="Arial"/>
+                <a:latin typeface="Courier New" panose="02070309020205020404" pitchFamily="49" charset="0"/>
+                <a:cs typeface="Courier New" panose="02070309020205020404" pitchFamily="49" charset="0"/>
                 <a:sym typeface="Arial"/>
               </a:rPr>
               <a:t>channel</a:t>
             </a:r>
             <a:r>
-              <a:rPr lang="en-US" kern="0" dirty="0" err="1">
+              <a:rPr lang="en-US" b="1" kern="0" dirty="0" err="1">
                 <a:solidFill>
                   <a:srgbClr val="000000">
                     <a:lumMod val="50000"/>
                     <a:lumOff val="50000"/>
                   </a:srgbClr>
                 </a:solidFill>
-                <a:latin typeface="Menlo" panose="020B0609030804020204" pitchFamily="49" charset="0"/>
-                <a:cs typeface="Arial"/>
+                <a:latin typeface="Courier New" panose="02070309020205020404" pitchFamily="49" charset="0"/>
+                <a:cs typeface="Courier New" panose="02070309020205020404" pitchFamily="49" charset="0"/>
                 <a:sym typeface="Arial"/>
               </a:rPr>
               <a:t>.</a:t>
             </a:r>
             <a:r>
-              <a:rPr lang="en-US" kern="0" dirty="0" err="1">
+              <a:rPr lang="en-US" b="1" kern="0" dirty="0" err="1">
                 <a:solidFill>
                   <a:srgbClr val="ED7D31"/>
                 </a:solidFill>
-                <a:latin typeface="Menlo" panose="020B0609030804020204" pitchFamily="49" charset="0"/>
-                <a:cs typeface="Arial"/>
+                <a:latin typeface="Courier New" panose="02070309020205020404" pitchFamily="49" charset="0"/>
+                <a:cs typeface="Courier New" panose="02070309020205020404" pitchFamily="49" charset="0"/>
                 <a:sym typeface="Arial"/>
               </a:rPr>
               <a:t>init_client_ssl</a:t>
             </a:r>
             <a:r>
-              <a:rPr lang="en-US" kern="0" dirty="0">
+              <a:rPr lang="en-US" b="1" kern="0" dirty="0">
                 <a:solidFill>
                   <a:srgbClr val="000000">
                     <a:lumMod val="50000"/>
                     <a:lumOff val="50000"/>
                   </a:srgbClr>
                 </a:solidFill>
-                <a:latin typeface="Menlo" panose="020B0609030804020204" pitchFamily="49" charset="0"/>
-                <a:cs typeface="Arial"/>
+                <a:latin typeface="Courier New" panose="02070309020205020404" pitchFamily="49" charset="0"/>
+                <a:cs typeface="Courier New" panose="02070309020205020404" pitchFamily="49" charset="0"/>
                 <a:sym typeface="Arial"/>
               </a:rPr>
               <a:t>(host, port, policy-key, </a:t>
             </a:r>
             <a:r>
-              <a:rPr lang="en-US" kern="0" dirty="0" err="1">
+              <a:rPr lang="en-US" b="1" kern="0" dirty="0" err="1">
                 <a:solidFill>
                   <a:srgbClr val="000000">
                     <a:lumMod val="50000"/>
                     <a:lumOff val="50000"/>
                   </a:srgbClr>
                 </a:solidFill>
-                <a:latin typeface="Menlo" panose="020B0609030804020204" pitchFamily="49" charset="0"/>
-                <a:cs typeface="Arial"/>
+                <a:latin typeface="Courier New" panose="02070309020205020404" pitchFamily="49" charset="0"/>
+                <a:cs typeface="Courier New" panose="02070309020205020404" pitchFamily="49" charset="0"/>
                 <a:sym typeface="Arial"/>
               </a:rPr>
               <a:t>auth_key</a:t>
             </a:r>
             <a:r>
-              <a:rPr lang="en-US" kern="0" dirty="0">
+              <a:rPr lang="en-US" b="1" kern="0" dirty="0">
                 <a:solidFill>
                   <a:srgbClr val="000000">
                     <a:lumMod val="50000"/>
                     <a:lumOff val="50000"/>
                   </a:srgbClr>
                 </a:solidFill>
-                <a:latin typeface="Menlo" panose="020B0609030804020204" pitchFamily="49" charset="0"/>
-                <a:cs typeface="Arial"/>
+                <a:latin typeface="Courier New" panose="02070309020205020404" pitchFamily="49" charset="0"/>
+                <a:cs typeface="Courier New" panose="02070309020205020404" pitchFamily="49" charset="0"/>
                 <a:sym typeface="Arial"/>
               </a:rPr>
               <a:t>, admissions-cert);</a:t>
@@ -24098,46 +26846,57 @@
               <a:buNone/>
             </a:pPr>
             <a:br>
-              <a:rPr lang="en-US" kern="0" dirty="0">
+              <a:rPr lang="en-US" b="1" kern="0" dirty="0">
                 <a:solidFill>
                   <a:srgbClr val="000000">
                     <a:lumMod val="50000"/>
                     <a:lumOff val="50000"/>
                   </a:srgbClr>
                 </a:solidFill>
-                <a:latin typeface="Menlo" panose="020B0609030804020204" pitchFamily="49" charset="0"/>
-                <a:cs typeface="Arial"/>
+                <a:latin typeface="Courier New" panose="02070309020205020404" pitchFamily="49" charset="0"/>
+                <a:cs typeface="Courier New" panose="02070309020205020404" pitchFamily="49" charset="0"/>
                 <a:sym typeface="Arial"/>
               </a:rPr>
             </a:br>
             <a:r>
-              <a:rPr lang="en-US" kern="0" dirty="0">
+              <a:rPr lang="en-US" b="1" kern="0" dirty="0">
                 <a:solidFill>
                   <a:srgbClr val="6A9955"/>
                 </a:solidFill>
-                <a:latin typeface="Menlo" panose="020B0609030804020204" pitchFamily="49" charset="0"/>
-                <a:cs typeface="Arial"/>
+                <a:latin typeface="Courier New" panose="02070309020205020404" pitchFamily="49" charset="0"/>
+                <a:cs typeface="Courier New" panose="02070309020205020404" pitchFamily="49" charset="0"/>
                 <a:sym typeface="Arial"/>
               </a:rPr>
               <a:t>// Your application </a:t>
             </a:r>
             <a:r>
-              <a:rPr lang="en-US" kern="0" dirty="0" err="1">
+              <a:rPr lang="en-US" b="1" kern="0" dirty="0" err="1">
                 <a:solidFill>
                   <a:srgbClr val="6A9955"/>
                 </a:solidFill>
-                <a:latin typeface="Menlo" panose="020B0609030804020204" pitchFamily="49" charset="0"/>
-                <a:cs typeface="Arial"/>
-                <a:sym typeface="Arial"/>
-              </a:rPr>
-              <a:t>service_attestation_cert.binhere</a:t>
-            </a:r>
-            <a:endParaRPr lang="en-US" kern="0" dirty="0">
+                <a:latin typeface="Courier New" panose="02070309020205020404" pitchFamily="49" charset="0"/>
+                <a:cs typeface="Courier New" panose="02070309020205020404" pitchFamily="49" charset="0"/>
+                <a:sym typeface="Arial"/>
+              </a:rPr>
+              <a:t>service_attestation_cert.bin</a:t>
+            </a:r>
+            <a:r>
+              <a:rPr lang="en-US" b="1" kern="0" dirty="0">
+                <a:solidFill>
+                  <a:srgbClr val="6A9955"/>
+                </a:solidFill>
+                <a:latin typeface="Courier New" panose="02070309020205020404" pitchFamily="49" charset="0"/>
+                <a:cs typeface="Courier New" panose="02070309020205020404" pitchFamily="49" charset="0"/>
+                <a:sym typeface="Arial"/>
+              </a:rPr>
+              <a:t> here</a:t>
+            </a:r>
+            <a:endParaRPr lang="en-US" b="1" kern="0" dirty="0">
               <a:solidFill>
                 <a:srgbClr val="CCCCCC"/>
               </a:solidFill>
-              <a:latin typeface="Menlo" panose="020B0609030804020204" pitchFamily="49" charset="0"/>
-              <a:cs typeface="Arial"/>
+              <a:latin typeface="Courier New" panose="02070309020205020404" pitchFamily="49" charset="0"/>
+              <a:cs typeface="Courier New" panose="02070309020205020404" pitchFamily="49" charset="0"/>
               <a:sym typeface="Arial"/>
             </a:endParaRPr>
           </a:p>
@@ -24156,7 +26915,7 @@
 </p:sld>
 </file>
 
-<file path=ppt/slides/slide8.xml><?xml version="1.0" encoding="utf-8"?>
+<file path=ppt/slides/slide9.xml><?xml version="1.0" encoding="utf-8"?>
 <p:sld xmlns:a="http://schemas.openxmlformats.org/drawingml/2006/main" xmlns:r="http://schemas.openxmlformats.org/officeDocument/2006/relationships" xmlns:p="http://schemas.openxmlformats.org/presentationml/2006/main">
   <p:cSld>
     <p:spTree>
@@ -25132,1900 +27891,6 @@
     <p:extLst>
       <p:ext uri="{BB962C8B-B14F-4D97-AF65-F5344CB8AC3E}">
         <p14:creationId xmlns:p14="http://schemas.microsoft.com/office/powerpoint/2010/main" val="2923602000"/>
-      </p:ext>
-    </p:extLst>
-  </p:cSld>
-  <p:clrMapOvr>
-    <a:masterClrMapping/>
-  </p:clrMapOvr>
-</p:sld>
-</file>
-
-<file path=ppt/slides/slide9.xml><?xml version="1.0" encoding="utf-8"?>
-<p:sld xmlns:a="http://schemas.openxmlformats.org/drawingml/2006/main" xmlns:r="http://schemas.openxmlformats.org/officeDocument/2006/relationships" xmlns:p="http://schemas.openxmlformats.org/presentationml/2006/main">
-  <p:cSld>
-    <p:spTree>
-      <p:nvGrpSpPr>
-        <p:cNvPr id="1" name=""/>
-        <p:cNvGrpSpPr/>
-        <p:nvPr/>
-      </p:nvGrpSpPr>
-      <p:grpSpPr>
-        <a:xfrm>
-          <a:off x="0" y="0"/>
-          <a:ext cx="0" cy="0"/>
-          <a:chOff x="0" y="0"/>
-          <a:chExt cx="0" cy="0"/>
-        </a:xfrm>
-      </p:grpSpPr>
-      <p:sp>
-        <p:nvSpPr>
-          <p:cNvPr id="12" name="Rectangle 11">
-            <a:extLst>
-              <a:ext uri="{FF2B5EF4-FFF2-40B4-BE49-F238E27FC236}">
-                <a16:creationId xmlns:a16="http://schemas.microsoft.com/office/drawing/2014/main" id="{FACE02C8-3CAD-5ADB-A492-5FD5F36F243F}"/>
-              </a:ext>
-            </a:extLst>
-          </p:cNvPr>
-          <p:cNvSpPr/>
-          <p:nvPr/>
-        </p:nvSpPr>
-        <p:spPr>
-          <a:xfrm>
-            <a:off x="6912024" y="3831053"/>
-            <a:ext cx="3249097" cy="2481660"/>
-          </a:xfrm>
-          <a:prstGeom prst="rect">
-            <a:avLst/>
-          </a:prstGeom>
-          <a:solidFill>
-            <a:srgbClr val="FFFFFF"/>
-          </a:solidFill>
-          <a:ln w="19050" cap="flat" cmpd="sng" algn="ctr">
-            <a:solidFill>
-              <a:srgbClr val="000000"/>
-            </a:solidFill>
-            <a:prstDash val="solid"/>
-            <a:headEnd type="none" w="med" len="med"/>
-            <a:tailEnd type="none" w="med" len="med"/>
-          </a:ln>
-          <a:effectLst/>
-        </p:spPr>
-        <p:txBody>
-          <a:bodyPr rot="0" spcFirstLastPara="0" vertOverflow="overflow" horzOverflow="overflow" vert="horz" wrap="square" lIns="91440" tIns="45720" rIns="91440" bIns="45720" numCol="1" spcCol="0" rtlCol="0" fromWordArt="0" anchor="ctr" anchorCtr="0" forceAA="0" compatLnSpc="1">
-            <a:prstTxWarp prst="textNoShape">
-              <a:avLst/>
-            </a:prstTxWarp>
-            <a:noAutofit/>
-          </a:bodyPr>
-          <a:lstStyle/>
-          <a:p>
-            <a:pPr marL="0" marR="0" lvl="0" indent="0" defTabSz="914400" eaLnBrk="1" fontAlgn="auto" latinLnBrk="0" hangingPunct="1">
-              <a:lnSpc>
-                <a:spcPct val="100000"/>
-              </a:lnSpc>
-              <a:spcBef>
-                <a:spcPts val="300"/>
-              </a:spcBef>
-              <a:spcAft>
-                <a:spcPts val="0"/>
-              </a:spcAft>
-              <a:buClr>
-                <a:srgbClr val="000000"/>
-              </a:buClr>
-              <a:buSzTx/>
-              <a:buFont typeface="Arial"/>
-              <a:buNone/>
-              <a:tabLst/>
-              <a:defRPr/>
-            </a:pPr>
-            <a:r>
-              <a:rPr kumimoji="0" lang="en-US" sz="1600" b="1" i="0" u="none" strike="noStrike" kern="0" cap="none" spc="0" normalizeH="0" baseline="0" noProof="0" dirty="0">
-                <a:ln>
-                  <a:noFill/>
-                </a:ln>
-                <a:solidFill>
-                  <a:srgbClr val="535353"/>
-                </a:solidFill>
-                <a:effectLst/>
-                <a:uLnTx/>
-                <a:uFillTx/>
-                <a:latin typeface="Arial"/>
-                <a:ea typeface="+mn-ea"/>
-                <a:cs typeface="Calibri" panose="020F0502020204030204" pitchFamily="34" charset="0"/>
-                <a:sym typeface="Arial"/>
-              </a:rPr>
-              <a:t>Works on all CC platforms:</a:t>
-            </a:r>
-          </a:p>
-          <a:p>
-            <a:pPr marL="285750" marR="0" lvl="0" indent="-285750" defTabSz="914400" eaLnBrk="1" fontAlgn="auto" latinLnBrk="0" hangingPunct="1">
-              <a:lnSpc>
-                <a:spcPct val="100000"/>
-              </a:lnSpc>
-              <a:spcBef>
-                <a:spcPts val="300"/>
-              </a:spcBef>
-              <a:spcAft>
-                <a:spcPts val="0"/>
-              </a:spcAft>
-              <a:buClr>
-                <a:srgbClr val="000000"/>
-              </a:buClr>
-              <a:buSzTx/>
-              <a:buFont typeface="Arial" panose="020B0604020202020204" pitchFamily="34" charset="0"/>
-              <a:buChar char="•"/>
-              <a:tabLst/>
-              <a:defRPr/>
-            </a:pPr>
-            <a:r>
-              <a:rPr kumimoji="0" lang="en-US" sz="1600" b="0" i="0" u="none" strike="noStrike" kern="0" cap="none" spc="0" normalizeH="0" baseline="0" noProof="0" dirty="0">
-                <a:ln>
-                  <a:noFill/>
-                </a:ln>
-                <a:solidFill>
-                  <a:srgbClr val="535353"/>
-                </a:solidFill>
-                <a:effectLst/>
-                <a:uLnTx/>
-                <a:uFillTx/>
-                <a:latin typeface="Arial"/>
-                <a:ea typeface="+mn-ea"/>
-                <a:cs typeface="Calibri" panose="020F0502020204030204" pitchFamily="34" charset="0"/>
-                <a:sym typeface="Arial"/>
-              </a:rPr>
-              <a:t>Simulated enclave</a:t>
-            </a:r>
-          </a:p>
-          <a:p>
-            <a:pPr marL="285750" marR="0" lvl="0" indent="-285750" defTabSz="914400" eaLnBrk="1" fontAlgn="auto" latinLnBrk="0" hangingPunct="1">
-              <a:lnSpc>
-                <a:spcPct val="100000"/>
-              </a:lnSpc>
-              <a:spcBef>
-                <a:spcPts val="300"/>
-              </a:spcBef>
-              <a:spcAft>
-                <a:spcPts val="0"/>
-              </a:spcAft>
-              <a:buClr>
-                <a:srgbClr val="000000"/>
-              </a:buClr>
-              <a:buSzTx/>
-              <a:buFont typeface="Arial" panose="020B0604020202020204" pitchFamily="34" charset="0"/>
-              <a:buChar char="•"/>
-              <a:tabLst/>
-              <a:defRPr/>
-            </a:pPr>
-            <a:r>
-              <a:rPr kumimoji="0" lang="en-US" sz="1600" b="0" i="0" u="none" strike="noStrike" kern="0" cap="none" spc="0" normalizeH="0" baseline="0" noProof="0" dirty="0">
-                <a:ln>
-                  <a:noFill/>
-                </a:ln>
-                <a:solidFill>
-                  <a:srgbClr val="535353"/>
-                </a:solidFill>
-                <a:effectLst/>
-                <a:uLnTx/>
-                <a:uFillTx/>
-                <a:latin typeface="Arial"/>
-                <a:ea typeface="+mn-ea"/>
-                <a:cs typeface="Calibri" panose="020F0502020204030204" pitchFamily="34" charset="0"/>
-                <a:sym typeface="Arial"/>
-              </a:rPr>
-              <a:t>AMD SEV-SNP</a:t>
-            </a:r>
-          </a:p>
-          <a:p>
-            <a:pPr marL="285750" marR="0" lvl="0" indent="-285750" defTabSz="914400" eaLnBrk="1" fontAlgn="auto" latinLnBrk="0" hangingPunct="1">
-              <a:lnSpc>
-                <a:spcPct val="100000"/>
-              </a:lnSpc>
-              <a:spcBef>
-                <a:spcPts val="300"/>
-              </a:spcBef>
-              <a:spcAft>
-                <a:spcPts val="0"/>
-              </a:spcAft>
-              <a:buClr>
-                <a:srgbClr val="000000"/>
-              </a:buClr>
-              <a:buSzTx/>
-              <a:buFont typeface="Arial" panose="020B0604020202020204" pitchFamily="34" charset="0"/>
-              <a:buChar char="•"/>
-              <a:tabLst/>
-              <a:defRPr/>
-            </a:pPr>
-            <a:r>
-              <a:rPr kumimoji="0" lang="en-US" sz="1600" b="0" i="0" u="none" strike="noStrike" kern="0" cap="none" spc="0" normalizeH="0" baseline="0" noProof="0" dirty="0">
-                <a:ln>
-                  <a:noFill/>
-                </a:ln>
-                <a:solidFill>
-                  <a:srgbClr val="535353"/>
-                </a:solidFill>
-                <a:effectLst/>
-                <a:uLnTx/>
-                <a:uFillTx/>
-                <a:latin typeface="Arial"/>
-                <a:ea typeface="+mn-ea"/>
-                <a:cs typeface="Calibri" panose="020F0502020204030204" pitchFamily="34" charset="0"/>
-                <a:sym typeface="Arial"/>
-              </a:rPr>
-              <a:t>Intel SGX (Gramine and OE)</a:t>
-            </a:r>
-          </a:p>
-          <a:p>
-            <a:pPr marL="285750" marR="0" lvl="0" indent="-285750" defTabSz="914400" eaLnBrk="1" fontAlgn="auto" latinLnBrk="0" hangingPunct="1">
-              <a:lnSpc>
-                <a:spcPct val="100000"/>
-              </a:lnSpc>
-              <a:spcBef>
-                <a:spcPts val="300"/>
-              </a:spcBef>
-              <a:spcAft>
-                <a:spcPts val="0"/>
-              </a:spcAft>
-              <a:buClr>
-                <a:srgbClr val="000000"/>
-              </a:buClr>
-              <a:buSzTx/>
-              <a:buFont typeface="Arial" panose="020B0604020202020204" pitchFamily="34" charset="0"/>
-              <a:buChar char="•"/>
-              <a:tabLst/>
-              <a:defRPr/>
-            </a:pPr>
-            <a:r>
-              <a:rPr kumimoji="0" lang="en-US" sz="1600" b="0" i="0" u="none" strike="noStrike" kern="0" cap="none" spc="0" normalizeH="0" baseline="0" noProof="0" dirty="0">
-                <a:ln>
-                  <a:noFill/>
-                </a:ln>
-                <a:solidFill>
-                  <a:srgbClr val="535353"/>
-                </a:solidFill>
-                <a:effectLst/>
-                <a:uLnTx/>
-                <a:uFillTx/>
-                <a:latin typeface="Arial"/>
-                <a:ea typeface="+mn-ea"/>
-                <a:cs typeface="Calibri" panose="020F0502020204030204" pitchFamily="34" charset="0"/>
-                <a:sym typeface="Arial"/>
-              </a:rPr>
-              <a:t>Arm CCA (Samsung Islet)</a:t>
-            </a:r>
-          </a:p>
-          <a:p>
-            <a:pPr marL="285750" marR="0" lvl="0" indent="-285750" defTabSz="914400" eaLnBrk="1" fontAlgn="auto" latinLnBrk="0" hangingPunct="1">
-              <a:lnSpc>
-                <a:spcPct val="100000"/>
-              </a:lnSpc>
-              <a:spcBef>
-                <a:spcPts val="300"/>
-              </a:spcBef>
-              <a:spcAft>
-                <a:spcPts val="0"/>
-              </a:spcAft>
-              <a:buClr>
-                <a:srgbClr val="000000"/>
-              </a:buClr>
-              <a:buSzTx/>
-              <a:buFont typeface="Arial" panose="020B0604020202020204" pitchFamily="34" charset="0"/>
-              <a:buChar char="•"/>
-              <a:tabLst/>
-              <a:defRPr/>
-            </a:pPr>
-            <a:r>
-              <a:rPr kumimoji="0" lang="en-US" sz="1600" b="0" i="0" u="none" strike="noStrike" kern="0" cap="none" spc="0" normalizeH="0" baseline="0" noProof="0" dirty="0">
-                <a:ln>
-                  <a:noFill/>
-                </a:ln>
-                <a:solidFill>
-                  <a:srgbClr val="535353"/>
-                </a:solidFill>
-                <a:effectLst/>
-                <a:uLnTx/>
-                <a:uFillTx/>
-                <a:latin typeface="Arial"/>
-                <a:ea typeface="+mn-ea"/>
-                <a:cs typeface="Calibri" panose="020F0502020204030204" pitchFamily="34" charset="0"/>
-                <a:sym typeface="Arial"/>
-              </a:rPr>
-              <a:t>RISC-V Keystone</a:t>
-            </a:r>
-          </a:p>
-          <a:p>
-            <a:pPr marL="285750" marR="0" lvl="0" indent="-285750" defTabSz="914400" eaLnBrk="1" fontAlgn="auto" latinLnBrk="0" hangingPunct="1">
-              <a:lnSpc>
-                <a:spcPct val="100000"/>
-              </a:lnSpc>
-              <a:spcBef>
-                <a:spcPts val="300"/>
-              </a:spcBef>
-              <a:spcAft>
-                <a:spcPts val="0"/>
-              </a:spcAft>
-              <a:buClr>
-                <a:srgbClr val="000000"/>
-              </a:buClr>
-              <a:buSzTx/>
-              <a:buFont typeface="Arial" panose="020B0604020202020204" pitchFamily="34" charset="0"/>
-              <a:buChar char="•"/>
-              <a:tabLst/>
-              <a:defRPr/>
-            </a:pPr>
-            <a:r>
-              <a:rPr kumimoji="0" lang="en-US" sz="1600" b="0" i="0" u="none" strike="noStrike" kern="0" cap="none" spc="0" normalizeH="0" baseline="0" noProof="0" dirty="0">
-                <a:ln>
-                  <a:noFill/>
-                </a:ln>
-                <a:solidFill>
-                  <a:srgbClr val="535353"/>
-                </a:solidFill>
-                <a:effectLst/>
-                <a:uLnTx/>
-                <a:uFillTx/>
-                <a:latin typeface="Arial"/>
-                <a:ea typeface="+mn-ea"/>
-                <a:cs typeface="Calibri" panose="020F0502020204030204" pitchFamily="34" charset="0"/>
-                <a:sym typeface="Arial"/>
-              </a:rPr>
-              <a:t>TPM</a:t>
-            </a:r>
-          </a:p>
-          <a:p>
-            <a:pPr marL="285750" marR="0" lvl="0" indent="-285750" defTabSz="914400" eaLnBrk="1" fontAlgn="auto" latinLnBrk="0" hangingPunct="1">
-              <a:lnSpc>
-                <a:spcPct val="100000"/>
-              </a:lnSpc>
-              <a:spcBef>
-                <a:spcPts val="300"/>
-              </a:spcBef>
-              <a:spcAft>
-                <a:spcPts val="0"/>
-              </a:spcAft>
-              <a:buClr>
-                <a:srgbClr val="000000"/>
-              </a:buClr>
-              <a:buSzTx/>
-              <a:buFont typeface="Arial" panose="020B0604020202020204" pitchFamily="34" charset="0"/>
-              <a:buChar char="•"/>
-              <a:tabLst/>
-              <a:defRPr/>
-            </a:pPr>
-            <a:r>
-              <a:rPr kumimoji="0" lang="en-US" sz="1600" b="1" i="0" u="none" strike="noStrike" kern="0" cap="none" spc="0" normalizeH="0" baseline="0" noProof="0" dirty="0">
-                <a:ln>
-                  <a:noFill/>
-                </a:ln>
-                <a:solidFill>
-                  <a:srgbClr val="535353"/>
-                </a:solidFill>
-                <a:effectLst/>
-                <a:uLnTx/>
-                <a:uFillTx/>
-                <a:latin typeface="Arial"/>
-                <a:ea typeface="+mn-ea"/>
-                <a:cs typeface="Calibri" panose="020F0502020204030204" pitchFamily="34" charset="0"/>
-                <a:sym typeface="Arial"/>
-              </a:rPr>
-              <a:t>Application enclave service</a:t>
-            </a:r>
-          </a:p>
-        </p:txBody>
-      </p:sp>
-      <p:sp>
-        <p:nvSpPr>
-          <p:cNvPr id="13" name="Title 1">
-            <a:extLst>
-              <a:ext uri="{FF2B5EF4-FFF2-40B4-BE49-F238E27FC236}">
-                <a16:creationId xmlns:a16="http://schemas.microsoft.com/office/drawing/2014/main" id="{B9916862-CC8D-D00A-ADAA-CE15F575CE8B}"/>
-              </a:ext>
-            </a:extLst>
-          </p:cNvPr>
-          <p:cNvSpPr txBox="1">
-            <a:spLocks/>
-          </p:cNvSpPr>
-          <p:nvPr/>
-        </p:nvSpPr>
-        <p:spPr>
-          <a:xfrm>
-            <a:off x="511333" y="267178"/>
-            <a:ext cx="11169333" cy="793751"/>
-          </a:xfrm>
-          <a:prstGeom prst="rect">
-            <a:avLst/>
-          </a:prstGeom>
-        </p:spPr>
-        <p:txBody>
-          <a:bodyPr/>
-          <a:lstStyle>
-            <a:defPPr marR="0" lvl="0" algn="l" rtl="0">
-              <a:lnSpc>
-                <a:spcPct val="100000"/>
-              </a:lnSpc>
-              <a:spcBef>
-                <a:spcPts val="0"/>
-              </a:spcBef>
-              <a:spcAft>
-                <a:spcPts val="0"/>
-              </a:spcAft>
-            </a:defPPr>
-            <a:lvl1pPr marR="0" lvl="0" algn="l" rtl="0">
-              <a:lnSpc>
-                <a:spcPct val="100000"/>
-              </a:lnSpc>
-              <a:spcBef>
-                <a:spcPts val="0"/>
-              </a:spcBef>
-              <a:spcAft>
-                <a:spcPts val="0"/>
-              </a:spcAft>
-              <a:buClr>
-                <a:srgbClr val="000000"/>
-              </a:buClr>
-              <a:buFont typeface="Arial"/>
-              <a:defRPr sz="1400" b="0" i="0" u="none" strike="noStrike" cap="none">
-                <a:solidFill>
-                  <a:srgbClr val="000000"/>
-                </a:solidFill>
-                <a:latin typeface="Arial"/>
-                <a:ea typeface="Arial"/>
-                <a:cs typeface="Arial"/>
-                <a:sym typeface="Arial"/>
-              </a:defRPr>
-            </a:lvl1pPr>
-            <a:lvl2pPr marR="0" lvl="1" algn="l" rtl="0">
-              <a:lnSpc>
-                <a:spcPct val="100000"/>
-              </a:lnSpc>
-              <a:spcBef>
-                <a:spcPts val="0"/>
-              </a:spcBef>
-              <a:spcAft>
-                <a:spcPts val="0"/>
-              </a:spcAft>
-              <a:buClr>
-                <a:srgbClr val="000000"/>
-              </a:buClr>
-              <a:buFont typeface="Arial"/>
-              <a:defRPr sz="1400" b="0" i="0" u="none" strike="noStrike" cap="none">
-                <a:solidFill>
-                  <a:srgbClr val="000000"/>
-                </a:solidFill>
-                <a:latin typeface="Arial"/>
-                <a:ea typeface="Arial"/>
-                <a:cs typeface="Arial"/>
-                <a:sym typeface="Arial"/>
-              </a:defRPr>
-            </a:lvl2pPr>
-            <a:lvl3pPr marR="0" lvl="2" algn="l" rtl="0">
-              <a:lnSpc>
-                <a:spcPct val="100000"/>
-              </a:lnSpc>
-              <a:spcBef>
-                <a:spcPts val="0"/>
-              </a:spcBef>
-              <a:spcAft>
-                <a:spcPts val="0"/>
-              </a:spcAft>
-              <a:buClr>
-                <a:srgbClr val="000000"/>
-              </a:buClr>
-              <a:buFont typeface="Arial"/>
-              <a:defRPr sz="1400" b="0" i="0" u="none" strike="noStrike" cap="none">
-                <a:solidFill>
-                  <a:srgbClr val="000000"/>
-                </a:solidFill>
-                <a:latin typeface="Arial"/>
-                <a:ea typeface="Arial"/>
-                <a:cs typeface="Arial"/>
-                <a:sym typeface="Arial"/>
-              </a:defRPr>
-            </a:lvl3pPr>
-            <a:lvl4pPr marR="0" lvl="3" algn="l" rtl="0">
-              <a:lnSpc>
-                <a:spcPct val="100000"/>
-              </a:lnSpc>
-              <a:spcBef>
-                <a:spcPts val="0"/>
-              </a:spcBef>
-              <a:spcAft>
-                <a:spcPts val="0"/>
-              </a:spcAft>
-              <a:buClr>
-                <a:srgbClr val="000000"/>
-              </a:buClr>
-              <a:buFont typeface="Arial"/>
-              <a:defRPr sz="1400" b="0" i="0" u="none" strike="noStrike" cap="none">
-                <a:solidFill>
-                  <a:srgbClr val="000000"/>
-                </a:solidFill>
-                <a:latin typeface="Arial"/>
-                <a:ea typeface="Arial"/>
-                <a:cs typeface="Arial"/>
-                <a:sym typeface="Arial"/>
-              </a:defRPr>
-            </a:lvl4pPr>
-            <a:lvl5pPr marR="0" lvl="4" algn="l" rtl="0">
-              <a:lnSpc>
-                <a:spcPct val="100000"/>
-              </a:lnSpc>
-              <a:spcBef>
-                <a:spcPts val="0"/>
-              </a:spcBef>
-              <a:spcAft>
-                <a:spcPts val="0"/>
-              </a:spcAft>
-              <a:buClr>
-                <a:srgbClr val="000000"/>
-              </a:buClr>
-              <a:buFont typeface="Arial"/>
-              <a:defRPr sz="1400" b="0" i="0" u="none" strike="noStrike" cap="none">
-                <a:solidFill>
-                  <a:srgbClr val="000000"/>
-                </a:solidFill>
-                <a:latin typeface="Arial"/>
-                <a:ea typeface="Arial"/>
-                <a:cs typeface="Arial"/>
-                <a:sym typeface="Arial"/>
-              </a:defRPr>
-            </a:lvl5pPr>
-            <a:lvl6pPr marR="0" lvl="5" algn="l" rtl="0">
-              <a:lnSpc>
-                <a:spcPct val="100000"/>
-              </a:lnSpc>
-              <a:spcBef>
-                <a:spcPts val="0"/>
-              </a:spcBef>
-              <a:spcAft>
-                <a:spcPts val="0"/>
-              </a:spcAft>
-              <a:buClr>
-                <a:srgbClr val="000000"/>
-              </a:buClr>
-              <a:buFont typeface="Arial"/>
-              <a:defRPr sz="1400" b="0" i="0" u="none" strike="noStrike" cap="none">
-                <a:solidFill>
-                  <a:srgbClr val="000000"/>
-                </a:solidFill>
-                <a:latin typeface="Arial"/>
-                <a:ea typeface="Arial"/>
-                <a:cs typeface="Arial"/>
-                <a:sym typeface="Arial"/>
-              </a:defRPr>
-            </a:lvl6pPr>
-            <a:lvl7pPr marR="0" lvl="6" algn="l" rtl="0">
-              <a:lnSpc>
-                <a:spcPct val="100000"/>
-              </a:lnSpc>
-              <a:spcBef>
-                <a:spcPts val="0"/>
-              </a:spcBef>
-              <a:spcAft>
-                <a:spcPts val="0"/>
-              </a:spcAft>
-              <a:buClr>
-                <a:srgbClr val="000000"/>
-              </a:buClr>
-              <a:buFont typeface="Arial"/>
-              <a:defRPr sz="1400" b="0" i="0" u="none" strike="noStrike" cap="none">
-                <a:solidFill>
-                  <a:srgbClr val="000000"/>
-                </a:solidFill>
-                <a:latin typeface="Arial"/>
-                <a:ea typeface="Arial"/>
-                <a:cs typeface="Arial"/>
-                <a:sym typeface="Arial"/>
-              </a:defRPr>
-            </a:lvl7pPr>
-            <a:lvl8pPr marR="0" lvl="7" algn="l" rtl="0">
-              <a:lnSpc>
-                <a:spcPct val="100000"/>
-              </a:lnSpc>
-              <a:spcBef>
-                <a:spcPts val="0"/>
-              </a:spcBef>
-              <a:spcAft>
-                <a:spcPts val="0"/>
-              </a:spcAft>
-              <a:buClr>
-                <a:srgbClr val="000000"/>
-              </a:buClr>
-              <a:buFont typeface="Arial"/>
-              <a:defRPr sz="1400" b="0" i="0" u="none" strike="noStrike" cap="none">
-                <a:solidFill>
-                  <a:srgbClr val="000000"/>
-                </a:solidFill>
-                <a:latin typeface="Arial"/>
-                <a:ea typeface="Arial"/>
-                <a:cs typeface="Arial"/>
-                <a:sym typeface="Arial"/>
-              </a:defRPr>
-            </a:lvl8pPr>
-            <a:lvl9pPr marR="0" lvl="8" algn="l" rtl="0">
-              <a:lnSpc>
-                <a:spcPct val="100000"/>
-              </a:lnSpc>
-              <a:spcBef>
-                <a:spcPts val="0"/>
-              </a:spcBef>
-              <a:spcAft>
-                <a:spcPts val="0"/>
-              </a:spcAft>
-              <a:buClr>
-                <a:srgbClr val="000000"/>
-              </a:buClr>
-              <a:buFont typeface="Arial"/>
-              <a:defRPr sz="1400" b="0" i="0" u="none" strike="noStrike" cap="none">
-                <a:solidFill>
-                  <a:srgbClr val="000000"/>
-                </a:solidFill>
-                <a:latin typeface="Arial"/>
-                <a:ea typeface="Arial"/>
-                <a:cs typeface="Arial"/>
-                <a:sym typeface="Arial"/>
-              </a:defRPr>
-            </a:lvl9pPr>
-          </a:lstStyle>
-          <a:p>
-            <a:pPr marL="0" marR="0" lvl="0" indent="0" algn="l" defTabSz="914400" rtl="0" eaLnBrk="1" fontAlgn="auto" latinLnBrk="0" hangingPunct="1">
-              <a:lnSpc>
-                <a:spcPct val="100000"/>
-              </a:lnSpc>
-              <a:spcBef>
-                <a:spcPts val="0"/>
-              </a:spcBef>
-              <a:spcAft>
-                <a:spcPts val="0"/>
-              </a:spcAft>
-              <a:buClr>
-                <a:srgbClr val="000000"/>
-              </a:buClr>
-              <a:buSzTx/>
-              <a:buFont typeface="Arial"/>
-              <a:buNone/>
-              <a:tabLst/>
-              <a:defRPr/>
-            </a:pPr>
-            <a:r>
-              <a:rPr kumimoji="0" lang="en-US" sz="3200" b="1" i="0" u="none" strike="noStrike" kern="0" cap="none" spc="0" normalizeH="0" baseline="0" noProof="0">
-                <a:ln>
-                  <a:noFill/>
-                </a:ln>
-                <a:solidFill>
-                  <a:srgbClr val="000000"/>
-                </a:solidFill>
-                <a:effectLst/>
-                <a:uLnTx/>
-                <a:uFillTx/>
-                <a:latin typeface="Arial"/>
-                <a:cs typeface="Arial"/>
-                <a:sym typeface="Arial"/>
-              </a:rPr>
-              <a:t>Certifier: “Simple Example” App</a:t>
-            </a:r>
-          </a:p>
-        </p:txBody>
-      </p:sp>
-      <p:sp>
-        <p:nvSpPr>
-          <p:cNvPr id="14" name="Content Placeholder 7">
-            <a:extLst>
-              <a:ext uri="{FF2B5EF4-FFF2-40B4-BE49-F238E27FC236}">
-                <a16:creationId xmlns:a16="http://schemas.microsoft.com/office/drawing/2014/main" id="{1831A8AD-0FD9-EA12-EA7C-A6CAF957C40F}"/>
-              </a:ext>
-            </a:extLst>
-          </p:cNvPr>
-          <p:cNvSpPr txBox="1">
-            <a:spLocks/>
-          </p:cNvSpPr>
-          <p:nvPr/>
-        </p:nvSpPr>
-        <p:spPr>
-          <a:xfrm>
-            <a:off x="842158" y="1118136"/>
-            <a:ext cx="8552969" cy="1178640"/>
-          </a:xfrm>
-          <a:prstGeom prst="rect">
-            <a:avLst/>
-          </a:prstGeom>
-          <a:solidFill>
-            <a:srgbClr val="70AD47">
-              <a:lumMod val="20000"/>
-              <a:lumOff val="80000"/>
-            </a:srgbClr>
-          </a:solidFill>
-          <a:ln>
-            <a:solidFill>
-              <a:srgbClr val="000000"/>
-            </a:solidFill>
-          </a:ln>
-        </p:spPr>
-        <p:txBody>
-          <a:bodyPr spcFirstLastPara="1" wrap="square" lIns="45700" tIns="45700" rIns="45700" bIns="45700" anchor="t" anchorCtr="0">
-            <a:noAutofit/>
-          </a:bodyPr>
-          <a:lstStyle>
-            <a:defPPr marR="0" lvl="0" algn="l" rtl="0">
-              <a:lnSpc>
-                <a:spcPct val="100000"/>
-              </a:lnSpc>
-              <a:spcBef>
-                <a:spcPts val="0"/>
-              </a:spcBef>
-              <a:spcAft>
-                <a:spcPts val="0"/>
-              </a:spcAft>
-            </a:defPPr>
-            <a:lvl1pPr marL="457200" marR="0" lvl="0" indent="-228600" algn="l" rtl="0">
-              <a:lnSpc>
-                <a:spcPct val="90000"/>
-              </a:lnSpc>
-              <a:spcBef>
-                <a:spcPts val="1200"/>
-              </a:spcBef>
-              <a:spcAft>
-                <a:spcPts val="0"/>
-              </a:spcAft>
-              <a:buClr>
-                <a:schemeClr val="lt2"/>
-              </a:buClr>
-              <a:buSzPts val="2800"/>
-              <a:buFont typeface="Arial"/>
-              <a:buNone/>
-              <a:defRPr sz="2800" b="0" i="0" u="none" strike="noStrike" cap="none">
-                <a:solidFill>
-                  <a:schemeClr val="lt2"/>
-                </a:solidFill>
-                <a:latin typeface="Arial"/>
-                <a:ea typeface="Arial"/>
-                <a:cs typeface="Arial"/>
-                <a:sym typeface="Arial"/>
-              </a:defRPr>
-            </a:lvl1pPr>
-            <a:lvl2pPr marL="914400" marR="0" lvl="1" indent="-228600" algn="l" rtl="0">
-              <a:lnSpc>
-                <a:spcPct val="90000"/>
-              </a:lnSpc>
-              <a:spcBef>
-                <a:spcPts val="1200"/>
-              </a:spcBef>
-              <a:spcAft>
-                <a:spcPts val="0"/>
-              </a:spcAft>
-              <a:buClr>
-                <a:srgbClr val="000000"/>
-              </a:buClr>
-              <a:buSzPts val="2800"/>
-              <a:buFont typeface="Arial"/>
-              <a:buNone/>
-              <a:defRPr sz="2800" b="0" i="0" u="none" strike="noStrike" cap="none">
-                <a:solidFill>
-                  <a:srgbClr val="000000"/>
-                </a:solidFill>
-                <a:latin typeface="Arial"/>
-                <a:ea typeface="Arial"/>
-                <a:cs typeface="Arial"/>
-                <a:sym typeface="Arial"/>
-              </a:defRPr>
-            </a:lvl2pPr>
-            <a:lvl3pPr marL="1371600" marR="0" lvl="2" indent="-228600" algn="l" rtl="0">
-              <a:lnSpc>
-                <a:spcPct val="90000"/>
-              </a:lnSpc>
-              <a:spcBef>
-                <a:spcPts val="1200"/>
-              </a:spcBef>
-              <a:spcAft>
-                <a:spcPts val="0"/>
-              </a:spcAft>
-              <a:buClr>
-                <a:srgbClr val="000000"/>
-              </a:buClr>
-              <a:buSzPts val="2800"/>
-              <a:buFont typeface="Arial"/>
-              <a:buNone/>
-              <a:defRPr sz="2800" b="0" i="0" u="none" strike="noStrike" cap="none">
-                <a:solidFill>
-                  <a:srgbClr val="000000"/>
-                </a:solidFill>
-                <a:latin typeface="Arial"/>
-                <a:ea typeface="Arial"/>
-                <a:cs typeface="Arial"/>
-                <a:sym typeface="Arial"/>
-              </a:defRPr>
-            </a:lvl3pPr>
-            <a:lvl4pPr marL="1828800" marR="0" lvl="3" indent="-228600" algn="l" rtl="0">
-              <a:lnSpc>
-                <a:spcPct val="90000"/>
-              </a:lnSpc>
-              <a:spcBef>
-                <a:spcPts val="1200"/>
-              </a:spcBef>
-              <a:spcAft>
-                <a:spcPts val="0"/>
-              </a:spcAft>
-              <a:buClr>
-                <a:srgbClr val="000000"/>
-              </a:buClr>
-              <a:buSzPts val="2800"/>
-              <a:buFont typeface="Arial"/>
-              <a:buNone/>
-              <a:defRPr sz="2800" b="0" i="0" u="none" strike="noStrike" cap="none">
-                <a:solidFill>
-                  <a:srgbClr val="000000"/>
-                </a:solidFill>
-                <a:latin typeface="Arial"/>
-                <a:ea typeface="Arial"/>
-                <a:cs typeface="Arial"/>
-                <a:sym typeface="Arial"/>
-              </a:defRPr>
-            </a:lvl4pPr>
-            <a:lvl5pPr marL="2286000" marR="0" lvl="4" indent="-228600" algn="l" rtl="0">
-              <a:lnSpc>
-                <a:spcPct val="90000"/>
-              </a:lnSpc>
-              <a:spcBef>
-                <a:spcPts val="1200"/>
-              </a:spcBef>
-              <a:spcAft>
-                <a:spcPts val="0"/>
-              </a:spcAft>
-              <a:buClr>
-                <a:srgbClr val="000000"/>
-              </a:buClr>
-              <a:buSzPts val="2800"/>
-              <a:buFont typeface="Arial"/>
-              <a:buNone/>
-              <a:defRPr sz="2800" b="0" i="0" u="none" strike="noStrike" cap="none">
-                <a:solidFill>
-                  <a:srgbClr val="000000"/>
-                </a:solidFill>
-                <a:latin typeface="Arial"/>
-                <a:ea typeface="Arial"/>
-                <a:cs typeface="Arial"/>
-                <a:sym typeface="Arial"/>
-              </a:defRPr>
-            </a:lvl5pPr>
-            <a:lvl6pPr marL="2743200" marR="0" lvl="5" indent="-406400" algn="l" rtl="0">
-              <a:lnSpc>
-                <a:spcPct val="90000"/>
-              </a:lnSpc>
-              <a:spcBef>
-                <a:spcPts val="1200"/>
-              </a:spcBef>
-              <a:spcAft>
-                <a:spcPts val="0"/>
-              </a:spcAft>
-              <a:buClr>
-                <a:srgbClr val="000000"/>
-              </a:buClr>
-              <a:buSzPts val="2800"/>
-              <a:buFont typeface="Arial"/>
-              <a:buChar char="•"/>
-              <a:defRPr sz="2800" b="0" i="0" u="none" strike="noStrike" cap="none">
-                <a:solidFill>
-                  <a:srgbClr val="000000"/>
-                </a:solidFill>
-                <a:latin typeface="Arial"/>
-                <a:ea typeface="Arial"/>
-                <a:cs typeface="Arial"/>
-                <a:sym typeface="Arial"/>
-              </a:defRPr>
-            </a:lvl6pPr>
-            <a:lvl7pPr marL="3200400" marR="0" lvl="6" indent="-406400" algn="l" rtl="0">
-              <a:lnSpc>
-                <a:spcPct val="90000"/>
-              </a:lnSpc>
-              <a:spcBef>
-                <a:spcPts val="1200"/>
-              </a:spcBef>
-              <a:spcAft>
-                <a:spcPts val="0"/>
-              </a:spcAft>
-              <a:buClr>
-                <a:srgbClr val="000000"/>
-              </a:buClr>
-              <a:buSzPts val="2800"/>
-              <a:buFont typeface="Arial"/>
-              <a:buChar char="•"/>
-              <a:defRPr sz="2800" b="0" i="0" u="none" strike="noStrike" cap="none">
-                <a:solidFill>
-                  <a:srgbClr val="000000"/>
-                </a:solidFill>
-                <a:latin typeface="Arial"/>
-                <a:ea typeface="Arial"/>
-                <a:cs typeface="Arial"/>
-                <a:sym typeface="Arial"/>
-              </a:defRPr>
-            </a:lvl7pPr>
-            <a:lvl8pPr marL="3657600" marR="0" lvl="7" indent="-406400" algn="l" rtl="0">
-              <a:lnSpc>
-                <a:spcPct val="90000"/>
-              </a:lnSpc>
-              <a:spcBef>
-                <a:spcPts val="1200"/>
-              </a:spcBef>
-              <a:spcAft>
-                <a:spcPts val="0"/>
-              </a:spcAft>
-              <a:buClr>
-                <a:srgbClr val="000000"/>
-              </a:buClr>
-              <a:buSzPts val="2800"/>
-              <a:buFont typeface="Arial"/>
-              <a:buChar char="•"/>
-              <a:defRPr sz="2800" b="0" i="0" u="none" strike="noStrike" cap="none">
-                <a:solidFill>
-                  <a:srgbClr val="000000"/>
-                </a:solidFill>
-                <a:latin typeface="Arial"/>
-                <a:ea typeface="Arial"/>
-                <a:cs typeface="Arial"/>
-                <a:sym typeface="Arial"/>
-              </a:defRPr>
-            </a:lvl8pPr>
-            <a:lvl9pPr marL="4114800" marR="0" lvl="8" indent="-406400" algn="l" rtl="0">
-              <a:lnSpc>
-                <a:spcPct val="90000"/>
-              </a:lnSpc>
-              <a:spcBef>
-                <a:spcPts val="1000"/>
-              </a:spcBef>
-              <a:spcAft>
-                <a:spcPts val="0"/>
-              </a:spcAft>
-              <a:buClr>
-                <a:srgbClr val="000000"/>
-              </a:buClr>
-              <a:buSzPts val="2800"/>
-              <a:buFont typeface="Arial"/>
-              <a:buChar char="•"/>
-              <a:defRPr sz="2800" b="0" i="0" u="none" strike="noStrike" cap="none">
-                <a:solidFill>
-                  <a:srgbClr val="000000"/>
-                </a:solidFill>
-                <a:latin typeface="Arial"/>
-                <a:ea typeface="Arial"/>
-                <a:cs typeface="Arial"/>
-                <a:sym typeface="Arial"/>
-              </a:defRPr>
-            </a:lvl9pPr>
-          </a:lstStyle>
-          <a:p>
-            <a:pPr marL="6350" marR="0" lvl="0" indent="0" algn="l" defTabSz="914400" rtl="0" eaLnBrk="1" fontAlgn="auto" latinLnBrk="0" hangingPunct="1">
-              <a:lnSpc>
-                <a:spcPct val="90000"/>
-              </a:lnSpc>
-              <a:spcBef>
-                <a:spcPts val="200"/>
-              </a:spcBef>
-              <a:spcAft>
-                <a:spcPts val="0"/>
-              </a:spcAft>
-              <a:buClr>
-                <a:srgbClr val="535353"/>
-              </a:buClr>
-              <a:buSzPts val="2800"/>
-              <a:buFont typeface="Arial"/>
-              <a:buNone/>
-              <a:tabLst/>
-              <a:defRPr/>
-            </a:pPr>
-            <a:r>
-              <a:rPr kumimoji="0" lang="en-US" sz="1600" b="0" i="0" u="none" strike="noStrike" kern="0" cap="none" spc="0" normalizeH="0" baseline="0" noProof="0">
-                <a:ln>
-                  <a:noFill/>
-                </a:ln>
-                <a:solidFill>
-                  <a:srgbClr val="000000"/>
-                </a:solidFill>
-                <a:effectLst/>
-                <a:uLnTx/>
-                <a:uFillTx/>
-                <a:latin typeface="Courier New" panose="02070309020205020404" pitchFamily="49" charset="0"/>
-                <a:cs typeface="Courier New" panose="02070309020205020404" pitchFamily="49" charset="0"/>
-                <a:sym typeface="Arial"/>
-              </a:rPr>
-              <a:t>Running App as server</a:t>
-            </a:r>
-          </a:p>
-          <a:p>
-            <a:pPr marL="463550" marR="0" lvl="1" indent="0" algn="l" defTabSz="914400" rtl="0" eaLnBrk="1" fontAlgn="auto" latinLnBrk="0" hangingPunct="1">
-              <a:lnSpc>
-                <a:spcPct val="90000"/>
-              </a:lnSpc>
-              <a:spcBef>
-                <a:spcPts val="200"/>
-              </a:spcBef>
-              <a:spcAft>
-                <a:spcPts val="0"/>
-              </a:spcAft>
-              <a:buClr>
-                <a:srgbClr val="000000"/>
-              </a:buClr>
-              <a:buSzPts val="2800"/>
-              <a:buFont typeface="Arial"/>
-              <a:buNone/>
-              <a:tabLst/>
-              <a:defRPr/>
-            </a:pPr>
-            <a:r>
-              <a:rPr kumimoji="0" lang="en-US" sz="1600" b="0" i="0" u="none" strike="noStrike" kern="0" cap="none" spc="0" normalizeH="0" baseline="0" noProof="0">
-                <a:ln>
-                  <a:noFill/>
-                </a:ln>
-                <a:solidFill>
-                  <a:srgbClr val="000000"/>
-                </a:solidFill>
-                <a:effectLst/>
-                <a:uLnTx/>
-                <a:uFillTx/>
-                <a:latin typeface="Courier New" panose="02070309020205020404" pitchFamily="49" charset="0"/>
-                <a:cs typeface="Courier New" panose="02070309020205020404" pitchFamily="49" charset="0"/>
-                <a:sym typeface="Arial"/>
-              </a:rPr>
-              <a:t>Client peer id is Measured</a:t>
-            </a:r>
-          </a:p>
-          <a:p>
-            <a:pPr marL="463550" marR="0" lvl="1" indent="0" algn="l" defTabSz="914400" rtl="0" eaLnBrk="1" fontAlgn="auto" latinLnBrk="0" hangingPunct="1">
-              <a:lnSpc>
-                <a:spcPct val="90000"/>
-              </a:lnSpc>
-              <a:spcBef>
-                <a:spcPts val="200"/>
-              </a:spcBef>
-              <a:spcAft>
-                <a:spcPts val="0"/>
-              </a:spcAft>
-              <a:buClr>
-                <a:srgbClr val="000000"/>
-              </a:buClr>
-              <a:buSzPts val="2800"/>
-              <a:buFont typeface="Arial"/>
-              <a:buNone/>
-              <a:tabLst/>
-              <a:defRPr/>
-            </a:pPr>
-            <a:r>
-              <a:rPr kumimoji="0" lang="en-US" sz="1600" b="0" i="0" u="none" strike="noStrike" kern="0" cap="none" spc="0" normalizeH="0" baseline="0" noProof="0">
-                <a:ln>
-                  <a:noFill/>
-                </a:ln>
-                <a:solidFill>
-                  <a:srgbClr val="000000"/>
-                </a:solidFill>
-                <a:effectLst/>
-                <a:uLnTx/>
-                <a:uFillTx/>
-                <a:latin typeface="Courier New" panose="02070309020205020404" pitchFamily="49" charset="0"/>
-                <a:cs typeface="Courier New" panose="02070309020205020404" pitchFamily="49" charset="0"/>
-                <a:sym typeface="Arial"/>
-              </a:rPr>
-              <a:t>8522d8e996e0089b26cb5dde06341c728e3017fa78974e3dce364bef56bdd307</a:t>
-            </a:r>
-          </a:p>
-          <a:p>
-            <a:pPr marL="463550" marR="0" lvl="1" indent="0" algn="l" defTabSz="914400" rtl="0" eaLnBrk="1" fontAlgn="auto" latinLnBrk="0" hangingPunct="1">
-              <a:lnSpc>
-                <a:spcPct val="90000"/>
-              </a:lnSpc>
-              <a:spcBef>
-                <a:spcPts val="200"/>
-              </a:spcBef>
-              <a:spcAft>
-                <a:spcPts val="0"/>
-              </a:spcAft>
-              <a:buClr>
-                <a:srgbClr val="000000"/>
-              </a:buClr>
-              <a:buSzPts val="2800"/>
-              <a:buFont typeface="Arial"/>
-              <a:buNone/>
-              <a:tabLst/>
-              <a:defRPr/>
-            </a:pPr>
-            <a:r>
-              <a:rPr kumimoji="0" lang="en-US" sz="1600" b="0" i="0" u="none" strike="noStrike" kern="0" cap="none" spc="0" normalizeH="0" baseline="0" noProof="0">
-                <a:ln>
-                  <a:noFill/>
-                </a:ln>
-                <a:solidFill>
-                  <a:srgbClr val="000000"/>
-                </a:solidFill>
-                <a:effectLst/>
-                <a:uLnTx/>
-                <a:uFillTx/>
-                <a:latin typeface="Courier New" panose="02070309020205020404" pitchFamily="49" charset="0"/>
-                <a:cs typeface="Courier New" panose="02070309020205020404" pitchFamily="49" charset="0"/>
-                <a:sym typeface="Arial"/>
-              </a:rPr>
-              <a:t>SSL server read: Hi from your secret client</a:t>
-            </a:r>
-          </a:p>
-        </p:txBody>
-      </p:sp>
-      <p:sp>
-        <p:nvSpPr>
-          <p:cNvPr id="15" name="Content Placeholder 7">
-            <a:extLst>
-              <a:ext uri="{FF2B5EF4-FFF2-40B4-BE49-F238E27FC236}">
-                <a16:creationId xmlns:a16="http://schemas.microsoft.com/office/drawing/2014/main" id="{FACB03FD-580D-0272-51E5-F593B8992383}"/>
-              </a:ext>
-            </a:extLst>
-          </p:cNvPr>
-          <p:cNvSpPr txBox="1">
-            <a:spLocks/>
-          </p:cNvSpPr>
-          <p:nvPr/>
-        </p:nvSpPr>
-        <p:spPr>
-          <a:xfrm>
-            <a:off x="842158" y="2346727"/>
-            <a:ext cx="8552969" cy="1178640"/>
-          </a:xfrm>
-          <a:prstGeom prst="rect">
-            <a:avLst/>
-          </a:prstGeom>
-          <a:solidFill>
-            <a:srgbClr val="70AD47">
-              <a:lumMod val="20000"/>
-              <a:lumOff val="80000"/>
-            </a:srgbClr>
-          </a:solidFill>
-          <a:ln>
-            <a:solidFill>
-              <a:srgbClr val="000000"/>
-            </a:solidFill>
-          </a:ln>
-        </p:spPr>
-        <p:txBody>
-          <a:bodyPr spcFirstLastPara="1" wrap="square" lIns="45700" tIns="45700" rIns="45700" bIns="45700" anchor="t" anchorCtr="0">
-            <a:noAutofit/>
-          </a:bodyPr>
-          <a:lstStyle>
-            <a:defPPr marR="0" lvl="0" algn="l" rtl="0">
-              <a:lnSpc>
-                <a:spcPct val="100000"/>
-              </a:lnSpc>
-              <a:spcBef>
-                <a:spcPts val="0"/>
-              </a:spcBef>
-              <a:spcAft>
-                <a:spcPts val="0"/>
-              </a:spcAft>
-            </a:defPPr>
-            <a:lvl1pPr marL="457200" marR="0" lvl="0" indent="-228600" algn="l" rtl="0">
-              <a:lnSpc>
-                <a:spcPct val="90000"/>
-              </a:lnSpc>
-              <a:spcBef>
-                <a:spcPts val="1200"/>
-              </a:spcBef>
-              <a:spcAft>
-                <a:spcPts val="0"/>
-              </a:spcAft>
-              <a:buClr>
-                <a:schemeClr val="lt2"/>
-              </a:buClr>
-              <a:buSzPts val="2800"/>
-              <a:buFont typeface="Arial"/>
-              <a:buNone/>
-              <a:defRPr sz="2800" b="0" i="0" u="none" strike="noStrike" cap="none">
-                <a:solidFill>
-                  <a:schemeClr val="lt2"/>
-                </a:solidFill>
-                <a:latin typeface="Arial"/>
-                <a:ea typeface="Arial"/>
-                <a:cs typeface="Arial"/>
-                <a:sym typeface="Arial"/>
-              </a:defRPr>
-            </a:lvl1pPr>
-            <a:lvl2pPr marL="914400" marR="0" lvl="1" indent="-228600" algn="l" rtl="0">
-              <a:lnSpc>
-                <a:spcPct val="90000"/>
-              </a:lnSpc>
-              <a:spcBef>
-                <a:spcPts val="1200"/>
-              </a:spcBef>
-              <a:spcAft>
-                <a:spcPts val="0"/>
-              </a:spcAft>
-              <a:buClr>
-                <a:srgbClr val="000000"/>
-              </a:buClr>
-              <a:buSzPts val="2800"/>
-              <a:buFont typeface="Arial"/>
-              <a:buNone/>
-              <a:defRPr sz="2800" b="0" i="0" u="none" strike="noStrike" cap="none">
-                <a:solidFill>
-                  <a:srgbClr val="000000"/>
-                </a:solidFill>
-                <a:latin typeface="Arial"/>
-                <a:ea typeface="Arial"/>
-                <a:cs typeface="Arial"/>
-                <a:sym typeface="Arial"/>
-              </a:defRPr>
-            </a:lvl2pPr>
-            <a:lvl3pPr marL="1371600" marR="0" lvl="2" indent="-228600" algn="l" rtl="0">
-              <a:lnSpc>
-                <a:spcPct val="90000"/>
-              </a:lnSpc>
-              <a:spcBef>
-                <a:spcPts val="1200"/>
-              </a:spcBef>
-              <a:spcAft>
-                <a:spcPts val="0"/>
-              </a:spcAft>
-              <a:buClr>
-                <a:srgbClr val="000000"/>
-              </a:buClr>
-              <a:buSzPts val="2800"/>
-              <a:buFont typeface="Arial"/>
-              <a:buNone/>
-              <a:defRPr sz="2800" b="0" i="0" u="none" strike="noStrike" cap="none">
-                <a:solidFill>
-                  <a:srgbClr val="000000"/>
-                </a:solidFill>
-                <a:latin typeface="Arial"/>
-                <a:ea typeface="Arial"/>
-                <a:cs typeface="Arial"/>
-                <a:sym typeface="Arial"/>
-              </a:defRPr>
-            </a:lvl3pPr>
-            <a:lvl4pPr marL="1828800" marR="0" lvl="3" indent="-228600" algn="l" rtl="0">
-              <a:lnSpc>
-                <a:spcPct val="90000"/>
-              </a:lnSpc>
-              <a:spcBef>
-                <a:spcPts val="1200"/>
-              </a:spcBef>
-              <a:spcAft>
-                <a:spcPts val="0"/>
-              </a:spcAft>
-              <a:buClr>
-                <a:srgbClr val="000000"/>
-              </a:buClr>
-              <a:buSzPts val="2800"/>
-              <a:buFont typeface="Arial"/>
-              <a:buNone/>
-              <a:defRPr sz="2800" b="0" i="0" u="none" strike="noStrike" cap="none">
-                <a:solidFill>
-                  <a:srgbClr val="000000"/>
-                </a:solidFill>
-                <a:latin typeface="Arial"/>
-                <a:ea typeface="Arial"/>
-                <a:cs typeface="Arial"/>
-                <a:sym typeface="Arial"/>
-              </a:defRPr>
-            </a:lvl4pPr>
-            <a:lvl5pPr marL="2286000" marR="0" lvl="4" indent="-228600" algn="l" rtl="0">
-              <a:lnSpc>
-                <a:spcPct val="90000"/>
-              </a:lnSpc>
-              <a:spcBef>
-                <a:spcPts val="1200"/>
-              </a:spcBef>
-              <a:spcAft>
-                <a:spcPts val="0"/>
-              </a:spcAft>
-              <a:buClr>
-                <a:srgbClr val="000000"/>
-              </a:buClr>
-              <a:buSzPts val="2800"/>
-              <a:buFont typeface="Arial"/>
-              <a:buNone/>
-              <a:defRPr sz="2800" b="0" i="0" u="none" strike="noStrike" cap="none">
-                <a:solidFill>
-                  <a:srgbClr val="000000"/>
-                </a:solidFill>
-                <a:latin typeface="Arial"/>
-                <a:ea typeface="Arial"/>
-                <a:cs typeface="Arial"/>
-                <a:sym typeface="Arial"/>
-              </a:defRPr>
-            </a:lvl5pPr>
-            <a:lvl6pPr marL="2743200" marR="0" lvl="5" indent="-406400" algn="l" rtl="0">
-              <a:lnSpc>
-                <a:spcPct val="90000"/>
-              </a:lnSpc>
-              <a:spcBef>
-                <a:spcPts val="1200"/>
-              </a:spcBef>
-              <a:spcAft>
-                <a:spcPts val="0"/>
-              </a:spcAft>
-              <a:buClr>
-                <a:srgbClr val="000000"/>
-              </a:buClr>
-              <a:buSzPts val="2800"/>
-              <a:buFont typeface="Arial"/>
-              <a:buChar char="•"/>
-              <a:defRPr sz="2800" b="0" i="0" u="none" strike="noStrike" cap="none">
-                <a:solidFill>
-                  <a:srgbClr val="000000"/>
-                </a:solidFill>
-                <a:latin typeface="Arial"/>
-                <a:ea typeface="Arial"/>
-                <a:cs typeface="Arial"/>
-                <a:sym typeface="Arial"/>
-              </a:defRPr>
-            </a:lvl6pPr>
-            <a:lvl7pPr marL="3200400" marR="0" lvl="6" indent="-406400" algn="l" rtl="0">
-              <a:lnSpc>
-                <a:spcPct val="90000"/>
-              </a:lnSpc>
-              <a:spcBef>
-                <a:spcPts val="1200"/>
-              </a:spcBef>
-              <a:spcAft>
-                <a:spcPts val="0"/>
-              </a:spcAft>
-              <a:buClr>
-                <a:srgbClr val="000000"/>
-              </a:buClr>
-              <a:buSzPts val="2800"/>
-              <a:buFont typeface="Arial"/>
-              <a:buChar char="•"/>
-              <a:defRPr sz="2800" b="0" i="0" u="none" strike="noStrike" cap="none">
-                <a:solidFill>
-                  <a:srgbClr val="000000"/>
-                </a:solidFill>
-                <a:latin typeface="Arial"/>
-                <a:ea typeface="Arial"/>
-                <a:cs typeface="Arial"/>
-                <a:sym typeface="Arial"/>
-              </a:defRPr>
-            </a:lvl7pPr>
-            <a:lvl8pPr marL="3657600" marR="0" lvl="7" indent="-406400" algn="l" rtl="0">
-              <a:lnSpc>
-                <a:spcPct val="90000"/>
-              </a:lnSpc>
-              <a:spcBef>
-                <a:spcPts val="1200"/>
-              </a:spcBef>
-              <a:spcAft>
-                <a:spcPts val="0"/>
-              </a:spcAft>
-              <a:buClr>
-                <a:srgbClr val="000000"/>
-              </a:buClr>
-              <a:buSzPts val="2800"/>
-              <a:buFont typeface="Arial"/>
-              <a:buChar char="•"/>
-              <a:defRPr sz="2800" b="0" i="0" u="none" strike="noStrike" cap="none">
-                <a:solidFill>
-                  <a:srgbClr val="000000"/>
-                </a:solidFill>
-                <a:latin typeface="Arial"/>
-                <a:ea typeface="Arial"/>
-                <a:cs typeface="Arial"/>
-                <a:sym typeface="Arial"/>
-              </a:defRPr>
-            </a:lvl8pPr>
-            <a:lvl9pPr marL="4114800" marR="0" lvl="8" indent="-406400" algn="l" rtl="0">
-              <a:lnSpc>
-                <a:spcPct val="90000"/>
-              </a:lnSpc>
-              <a:spcBef>
-                <a:spcPts val="1000"/>
-              </a:spcBef>
-              <a:spcAft>
-                <a:spcPts val="0"/>
-              </a:spcAft>
-              <a:buClr>
-                <a:srgbClr val="000000"/>
-              </a:buClr>
-              <a:buSzPts val="2800"/>
-              <a:buFont typeface="Arial"/>
-              <a:buChar char="•"/>
-              <a:defRPr sz="2800" b="0" i="0" u="none" strike="noStrike" cap="none">
-                <a:solidFill>
-                  <a:srgbClr val="000000"/>
-                </a:solidFill>
-                <a:latin typeface="Arial"/>
-                <a:ea typeface="Arial"/>
-                <a:cs typeface="Arial"/>
-                <a:sym typeface="Arial"/>
-              </a:defRPr>
-            </a:lvl9pPr>
-          </a:lstStyle>
-          <a:p>
-            <a:pPr marL="6350" marR="0" lvl="0" indent="0" algn="l" defTabSz="914400" rtl="0" eaLnBrk="1" fontAlgn="auto" latinLnBrk="0" hangingPunct="1">
-              <a:lnSpc>
-                <a:spcPct val="90000"/>
-              </a:lnSpc>
-              <a:spcBef>
-                <a:spcPts val="200"/>
-              </a:spcBef>
-              <a:spcAft>
-                <a:spcPts val="0"/>
-              </a:spcAft>
-              <a:buClr>
-                <a:srgbClr val="535353"/>
-              </a:buClr>
-              <a:buSzPts val="2800"/>
-              <a:buFont typeface="Arial"/>
-              <a:buNone/>
-              <a:tabLst/>
-              <a:defRPr/>
-            </a:pPr>
-            <a:r>
-              <a:rPr kumimoji="0" lang="en-US" sz="1600" b="0" i="0" u="none" strike="noStrike" kern="0" cap="none" spc="0" normalizeH="0" baseline="0" noProof="0">
-                <a:ln>
-                  <a:noFill/>
-                </a:ln>
-                <a:solidFill>
-                  <a:srgbClr val="000000"/>
-                </a:solidFill>
-                <a:effectLst/>
-                <a:uLnTx/>
-                <a:uFillTx/>
-                <a:latin typeface="Courier New" panose="02070309020205020404" pitchFamily="49" charset="0"/>
-                <a:cs typeface="Courier New" panose="02070309020205020404" pitchFamily="49" charset="0"/>
-                <a:sym typeface="Arial"/>
-              </a:rPr>
-              <a:t>Running App as client</a:t>
-            </a:r>
-          </a:p>
-          <a:p>
-            <a:pPr marL="463550" marR="0" lvl="1" indent="0" algn="l" defTabSz="914400" rtl="0" eaLnBrk="1" fontAlgn="auto" latinLnBrk="0" hangingPunct="1">
-              <a:lnSpc>
-                <a:spcPct val="90000"/>
-              </a:lnSpc>
-              <a:spcBef>
-                <a:spcPts val="200"/>
-              </a:spcBef>
-              <a:spcAft>
-                <a:spcPts val="0"/>
-              </a:spcAft>
-              <a:buClr>
-                <a:srgbClr val="000000"/>
-              </a:buClr>
-              <a:buSzPts val="2800"/>
-              <a:buFont typeface="Arial"/>
-              <a:buNone/>
-              <a:tabLst/>
-              <a:defRPr/>
-            </a:pPr>
-            <a:r>
-              <a:rPr kumimoji="0" lang="en-US" sz="1600" b="0" i="0" u="none" strike="noStrike" kern="0" cap="none" spc="0" normalizeH="0" baseline="0" noProof="0">
-                <a:ln>
-                  <a:noFill/>
-                </a:ln>
-                <a:solidFill>
-                  <a:srgbClr val="000000"/>
-                </a:solidFill>
-                <a:effectLst/>
-                <a:uLnTx/>
-                <a:uFillTx/>
-                <a:latin typeface="Courier New" panose="02070309020205020404" pitchFamily="49" charset="0"/>
-                <a:cs typeface="Courier New" panose="02070309020205020404" pitchFamily="49" charset="0"/>
-                <a:sym typeface="Arial"/>
-              </a:rPr>
-              <a:t>Server peer id : Measured</a:t>
-            </a:r>
-          </a:p>
-          <a:p>
-            <a:pPr marL="463550" marR="0" lvl="1" indent="0" algn="l" defTabSz="914400" rtl="0" eaLnBrk="1" fontAlgn="auto" latinLnBrk="0" hangingPunct="1">
-              <a:lnSpc>
-                <a:spcPct val="90000"/>
-              </a:lnSpc>
-              <a:spcBef>
-                <a:spcPts val="200"/>
-              </a:spcBef>
-              <a:spcAft>
-                <a:spcPts val="0"/>
-              </a:spcAft>
-              <a:buClr>
-                <a:srgbClr val="000000"/>
-              </a:buClr>
-              <a:buSzPts val="2800"/>
-              <a:buFont typeface="Arial"/>
-              <a:buNone/>
-              <a:tabLst/>
-              <a:defRPr/>
-            </a:pPr>
-            <a:r>
-              <a:rPr kumimoji="0" lang="en-US" sz="1600" b="0" i="0" u="none" strike="noStrike" kern="0" cap="none" spc="0" normalizeH="0" baseline="0" noProof="0">
-                <a:ln>
-                  <a:noFill/>
-                </a:ln>
-                <a:solidFill>
-                  <a:srgbClr val="000000"/>
-                </a:solidFill>
-                <a:effectLst/>
-                <a:uLnTx/>
-                <a:uFillTx/>
-                <a:latin typeface="Courier New" panose="02070309020205020404" pitchFamily="49" charset="0"/>
-                <a:cs typeface="Courier New" panose="02070309020205020404" pitchFamily="49" charset="0"/>
-                <a:sym typeface="Arial"/>
-              </a:rPr>
-              <a:t>8522d8e996e0089b26cb5dde06341c728e3017fa78974e3dce364bef56bdd307</a:t>
-            </a:r>
-          </a:p>
-          <a:p>
-            <a:pPr marL="463550" marR="0" lvl="1" indent="0" algn="l" defTabSz="914400" rtl="0" eaLnBrk="1" fontAlgn="auto" latinLnBrk="0" hangingPunct="1">
-              <a:lnSpc>
-                <a:spcPct val="90000"/>
-              </a:lnSpc>
-              <a:spcBef>
-                <a:spcPts val="200"/>
-              </a:spcBef>
-              <a:spcAft>
-                <a:spcPts val="0"/>
-              </a:spcAft>
-              <a:buClr>
-                <a:srgbClr val="000000"/>
-              </a:buClr>
-              <a:buSzPts val="2800"/>
-              <a:buFont typeface="Arial"/>
-              <a:buNone/>
-              <a:tabLst/>
-              <a:defRPr/>
-            </a:pPr>
-            <a:r>
-              <a:rPr kumimoji="0" lang="en-US" sz="1600" b="0" i="0" u="none" strike="noStrike" kern="0" cap="none" spc="0" normalizeH="0" baseline="0" noProof="0">
-                <a:ln>
-                  <a:noFill/>
-                </a:ln>
-                <a:solidFill>
-                  <a:srgbClr val="000000"/>
-                </a:solidFill>
-                <a:effectLst/>
-                <a:uLnTx/>
-                <a:uFillTx/>
-                <a:latin typeface="Courier New" panose="02070309020205020404" pitchFamily="49" charset="0"/>
-                <a:cs typeface="Courier New" panose="02070309020205020404" pitchFamily="49" charset="0"/>
-                <a:sym typeface="Arial"/>
-              </a:rPr>
-              <a:t>SSL client read: Hi from your secret server</a:t>
-            </a:r>
-          </a:p>
-        </p:txBody>
-      </p:sp>
-      <p:sp>
-        <p:nvSpPr>
-          <p:cNvPr id="16" name="Content Placeholder 7">
-            <a:extLst>
-              <a:ext uri="{FF2B5EF4-FFF2-40B4-BE49-F238E27FC236}">
-                <a16:creationId xmlns:a16="http://schemas.microsoft.com/office/drawing/2014/main" id="{D8BF95BA-D581-ABA1-C857-5D4B968FA4BE}"/>
-              </a:ext>
-            </a:extLst>
-          </p:cNvPr>
-          <p:cNvSpPr txBox="1">
-            <a:spLocks/>
-          </p:cNvSpPr>
-          <p:nvPr/>
-        </p:nvSpPr>
-        <p:spPr bwMode="ltGray">
-          <a:xfrm>
-            <a:off x="542276" y="3786835"/>
-            <a:ext cx="5881051" cy="1682670"/>
-          </a:xfrm>
-          <a:prstGeom prst="rect">
-            <a:avLst/>
-          </a:prstGeom>
-          <a:noFill/>
-        </p:spPr>
-        <p:txBody>
-          <a:bodyPr vert="horz" lIns="365760" tIns="228600" rIns="228600" bIns="228600" rtlCol="0">
-            <a:noAutofit/>
-          </a:bodyPr>
-          <a:lstStyle>
-            <a:lvl1pPr marL="0" indent="0" algn="l" defTabSz="914400" rtl="0" eaLnBrk="1" latinLnBrk="0" hangingPunct="1">
-              <a:lnSpc>
-                <a:spcPct val="100000"/>
-              </a:lnSpc>
-              <a:spcBef>
-                <a:spcPts val="1200"/>
-              </a:spcBef>
-              <a:buClr>
-                <a:schemeClr val="tx1">
-                  <a:lumMod val="60000"/>
-                  <a:lumOff val="40000"/>
-                </a:schemeClr>
-              </a:buClr>
-              <a:buSzPct val="90000"/>
-              <a:buFont typeface="Arial" panose="020B0604020202020204" pitchFamily="34" charset="0"/>
-              <a:buChar char="​"/>
-              <a:defRPr lang="en-US" sz="1800" kern="1200" dirty="0">
-                <a:solidFill>
-                  <a:schemeClr val="tx1"/>
-                </a:solidFill>
-                <a:latin typeface="+mn-lt"/>
-                <a:ea typeface="+mn-ea"/>
-                <a:cs typeface="+mn-cs"/>
-              </a:defRPr>
-            </a:lvl1pPr>
-            <a:lvl2pPr marL="457200" indent="-184150" algn="l" defTabSz="914400" rtl="0" eaLnBrk="1" latinLnBrk="0" hangingPunct="1">
-              <a:lnSpc>
-                <a:spcPct val="100000"/>
-              </a:lnSpc>
-              <a:spcBef>
-                <a:spcPts val="1200"/>
-              </a:spcBef>
-              <a:buClr>
-                <a:schemeClr val="bg1"/>
-              </a:buClr>
-              <a:buSzPct val="90000"/>
-              <a:buFont typeface="Arial" panose="020B0604020202020204" pitchFamily="34" charset="0"/>
-              <a:buChar char="•"/>
-              <a:defRPr lang="en-US" sz="1600" kern="1200" dirty="0">
-                <a:solidFill>
-                  <a:schemeClr val="bg1"/>
-                </a:solidFill>
-                <a:latin typeface="+mn-lt"/>
-                <a:ea typeface="+mn-ea"/>
-                <a:cs typeface="+mn-cs"/>
-              </a:defRPr>
-            </a:lvl2pPr>
-            <a:lvl3pPr marL="744538" indent="-169863" algn="l" defTabSz="914400" rtl="0" eaLnBrk="1" latinLnBrk="0" hangingPunct="1">
-              <a:lnSpc>
-                <a:spcPct val="100000"/>
-              </a:lnSpc>
-              <a:spcBef>
-                <a:spcPts val="1200"/>
-              </a:spcBef>
-              <a:spcAft>
-                <a:spcPts val="0"/>
-              </a:spcAft>
-              <a:buClr>
-                <a:schemeClr val="bg1"/>
-              </a:buClr>
-              <a:buSzPct val="90000"/>
-              <a:buFont typeface="Camphor Std" panose="020B0504030404020204" pitchFamily="34" charset="0"/>
-              <a:buChar char="–"/>
-              <a:defRPr lang="en-US" sz="1400" kern="1200" dirty="0">
-                <a:solidFill>
-                  <a:schemeClr val="bg1"/>
-                </a:solidFill>
-                <a:latin typeface="+mn-lt"/>
-                <a:ea typeface="+mn-ea"/>
-                <a:cs typeface="+mn-cs"/>
-              </a:defRPr>
-            </a:lvl3pPr>
-            <a:lvl4pPr marL="969963" indent="-166688" algn="l" defTabSz="914400" rtl="0" eaLnBrk="1" latinLnBrk="0" hangingPunct="1">
-              <a:lnSpc>
-                <a:spcPct val="100000"/>
-              </a:lnSpc>
-              <a:spcBef>
-                <a:spcPts val="1200"/>
-              </a:spcBef>
-              <a:buClr>
-                <a:schemeClr val="bg1"/>
-              </a:buClr>
-              <a:buSzPct val="90000"/>
-              <a:buFont typeface="Arial" panose="020B0604020202020204" pitchFamily="34" charset="0"/>
-              <a:buChar char="•"/>
-              <a:defRPr lang="en-US" sz="1200" kern="1200" dirty="0">
-                <a:solidFill>
-                  <a:schemeClr val="bg1"/>
-                </a:solidFill>
-                <a:latin typeface="+mn-lt"/>
-                <a:ea typeface="+mn-ea"/>
-                <a:cs typeface="+mn-cs"/>
-              </a:defRPr>
-            </a:lvl4pPr>
-            <a:lvl5pPr marL="1143000" indent="-138113" algn="l" defTabSz="914400" rtl="0" eaLnBrk="1" latinLnBrk="0" hangingPunct="1">
-              <a:lnSpc>
-                <a:spcPct val="100000"/>
-              </a:lnSpc>
-              <a:spcBef>
-                <a:spcPts val="1200"/>
-              </a:spcBef>
-              <a:buClr>
-                <a:schemeClr val="bg1"/>
-              </a:buClr>
-              <a:buSzPct val="90000"/>
-              <a:buFont typeface="Camphor Std" panose="020B0504030404020204" pitchFamily="34" charset="0"/>
-              <a:buChar char="–"/>
-              <a:tabLst/>
-              <a:defRPr lang="en-US" sz="1200" kern="1200" dirty="0">
-                <a:solidFill>
-                  <a:schemeClr val="bg1"/>
-                </a:solidFill>
-                <a:latin typeface="+mn-lt"/>
-                <a:ea typeface="+mn-ea"/>
-                <a:cs typeface="+mn-cs"/>
-              </a:defRPr>
-            </a:lvl5pPr>
-            <a:lvl6pPr marL="1258888" indent="-111125" algn="l" defTabSz="914400" rtl="0" eaLnBrk="1" latinLnBrk="0" hangingPunct="1">
-              <a:lnSpc>
-                <a:spcPct val="100000"/>
-              </a:lnSpc>
-              <a:spcBef>
-                <a:spcPts val="1200"/>
-              </a:spcBef>
-              <a:buClrTx/>
-              <a:buSzPct val="90000"/>
-              <a:buFont typeface="Arial" panose="020B0604020202020204" pitchFamily="34" charset="0"/>
-              <a:buChar char="•"/>
-              <a:tabLst/>
-              <a:defRPr sz="1800" kern="1200">
-                <a:solidFill>
-                  <a:schemeClr val="bg1"/>
-                </a:solidFill>
-                <a:latin typeface="+mn-lt"/>
-                <a:ea typeface="+mn-ea"/>
-                <a:cs typeface="+mn-cs"/>
-              </a:defRPr>
-            </a:lvl6pPr>
-            <a:lvl7pPr marL="1379538" indent="-120650" algn="l" defTabSz="914400" rtl="0" eaLnBrk="1" latinLnBrk="0" hangingPunct="1">
-              <a:lnSpc>
-                <a:spcPct val="100000"/>
-              </a:lnSpc>
-              <a:spcBef>
-                <a:spcPts val="1200"/>
-              </a:spcBef>
-              <a:buClrTx/>
-              <a:buSzPct val="90000"/>
-              <a:buFont typeface="System Font Regular"/>
-              <a:buChar char="-"/>
-              <a:tabLst/>
-              <a:defRPr sz="1400" kern="1200">
-                <a:solidFill>
-                  <a:schemeClr val="bg1"/>
-                </a:solidFill>
-                <a:latin typeface="+mn-lt"/>
-                <a:ea typeface="+mn-ea"/>
-                <a:cs typeface="+mn-cs"/>
-              </a:defRPr>
-            </a:lvl7pPr>
-            <a:lvl8pPr marL="1550988" indent="-120650" algn="l" defTabSz="914400" rtl="0" eaLnBrk="1" latinLnBrk="0" hangingPunct="1">
-              <a:lnSpc>
-                <a:spcPct val="100000"/>
-              </a:lnSpc>
-              <a:spcBef>
-                <a:spcPts val="1200"/>
-              </a:spcBef>
-              <a:buClrTx/>
-              <a:buSzPct val="90000"/>
-              <a:buFont typeface="Arial" panose="020B0604020202020204" pitchFamily="34" charset="0"/>
-              <a:buChar char="•"/>
-              <a:tabLst/>
-              <a:defRPr sz="1200" kern="1200">
-                <a:solidFill>
-                  <a:schemeClr val="bg1"/>
-                </a:solidFill>
-                <a:latin typeface="+mn-lt"/>
-                <a:ea typeface="+mn-ea"/>
-                <a:cs typeface="+mn-cs"/>
-              </a:defRPr>
-            </a:lvl8pPr>
-            <a:lvl9pPr marL="1722438" indent="-120650" algn="l" defTabSz="914400" rtl="0" eaLnBrk="1" latinLnBrk="0" hangingPunct="1">
-              <a:lnSpc>
-                <a:spcPct val="100000"/>
-              </a:lnSpc>
-              <a:spcBef>
-                <a:spcPts val="1200"/>
-              </a:spcBef>
-              <a:buClrTx/>
-              <a:buSzPct val="90000"/>
-              <a:buFont typeface="System Font Regular"/>
-              <a:buChar char="-"/>
-              <a:tabLst/>
-              <a:defRPr sz="1800" kern="1200">
-                <a:solidFill>
-                  <a:schemeClr val="bg1"/>
-                </a:solidFill>
-                <a:latin typeface="+mn-lt"/>
-                <a:ea typeface="+mn-ea"/>
-                <a:cs typeface="+mn-cs"/>
-              </a:defRPr>
-            </a:lvl9pPr>
-          </a:lstStyle>
-          <a:p>
-            <a:pPr fontAlgn="base">
-              <a:spcBef>
-                <a:spcPts val="200"/>
-              </a:spcBef>
-              <a:buClr>
-                <a:srgbClr val="000000">
-                  <a:lumMod val="60000"/>
-                  <a:lumOff val="40000"/>
-                </a:srgbClr>
-              </a:buClr>
-              <a:buFont typeface="Arial" panose="020B0604020202020204" pitchFamily="34" charset="0"/>
-              <a:buNone/>
-            </a:pPr>
-            <a:r>
-              <a:rPr>
-                <a:solidFill>
-                  <a:srgbClr val="535353"/>
-                </a:solidFill>
-                <a:latin typeface="Arial"/>
-                <a:cs typeface="Calibri" panose="020F0502020204030204" pitchFamily="34" charset="0"/>
-                <a:sym typeface="Arial"/>
-              </a:rPr>
-              <a:t>You may want to add:</a:t>
-            </a:r>
-          </a:p>
-          <a:p>
-            <a:pPr marL="342900" indent="-342900" fontAlgn="base">
-              <a:spcBef>
-                <a:spcPts val="200"/>
-              </a:spcBef>
-              <a:buClr>
-                <a:srgbClr val="000000">
-                  <a:lumMod val="60000"/>
-                  <a:lumOff val="40000"/>
-                </a:srgbClr>
-              </a:buClr>
-              <a:buFont typeface="Courier New" panose="02070309020205020404" pitchFamily="49" charset="0"/>
-              <a:buChar char="o"/>
-            </a:pPr>
-            <a:r>
-              <a:rPr sz="1600">
-                <a:solidFill>
-                  <a:srgbClr val="535353"/>
-                </a:solidFill>
-                <a:latin typeface="Arial"/>
-                <a:cs typeface="Calibri" panose="020F0502020204030204" pitchFamily="34" charset="0"/>
-                <a:sym typeface="Arial"/>
-              </a:rPr>
-              <a:t>API serialization</a:t>
-            </a:r>
-          </a:p>
-          <a:p>
-            <a:pPr marL="342900" indent="-342900" fontAlgn="base">
-              <a:spcBef>
-                <a:spcPts val="200"/>
-              </a:spcBef>
-              <a:buClr>
-                <a:srgbClr val="000000">
-                  <a:lumMod val="60000"/>
-                  <a:lumOff val="40000"/>
-                </a:srgbClr>
-              </a:buClr>
-              <a:buFont typeface="Courier New" panose="02070309020205020404" pitchFamily="49" charset="0"/>
-              <a:buChar char="o"/>
-            </a:pPr>
-            <a:r>
-              <a:rPr sz="1600">
-                <a:solidFill>
-                  <a:srgbClr val="535353"/>
-                </a:solidFill>
-                <a:latin typeface="Arial"/>
-                <a:cs typeface="Calibri" panose="020F0502020204030204" pitchFamily="34" charset="0"/>
-                <a:sym typeface="Arial"/>
-              </a:rPr>
-              <a:t>ACLs for differentiated access</a:t>
-            </a:r>
-          </a:p>
-          <a:p>
-            <a:pPr marL="342900" indent="-342900" fontAlgn="base">
-              <a:spcBef>
-                <a:spcPts val="200"/>
-              </a:spcBef>
-              <a:buClr>
-                <a:srgbClr val="000000">
-                  <a:lumMod val="60000"/>
-                  <a:lumOff val="40000"/>
-                </a:srgbClr>
-              </a:buClr>
-              <a:buFont typeface="Courier New" panose="02070309020205020404" pitchFamily="49" charset="0"/>
-              <a:buChar char="o"/>
-            </a:pPr>
-            <a:r>
-              <a:rPr lang="en-US" sz="1600">
-                <a:solidFill>
-                  <a:srgbClr val="535353"/>
-                </a:solidFill>
-                <a:latin typeface="Arial"/>
-                <a:cs typeface="Calibri" panose="020F0502020204030204" pitchFamily="34" charset="0"/>
-                <a:sym typeface="Arial"/>
-              </a:rPr>
-              <a:t>Standard “distributed programming” primitives like Byzantine agreement</a:t>
-            </a:r>
-          </a:p>
-        </p:txBody>
-      </p:sp>
-    </p:spTree>
-    <p:extLst>
-      <p:ext uri="{BB962C8B-B14F-4D97-AF65-F5344CB8AC3E}">
-        <p14:creationId xmlns:p14="http://schemas.microsoft.com/office/powerpoint/2010/main" val="4123536275"/>
       </p:ext>
     </p:extLst>
   </p:cSld>
@@ -27331,12 +28196,37 @@
 </file>
 
 <file path=customXml/item1.xml><?xml version="1.0" encoding="utf-8"?>
-<?mso-contentType ?>
-<FormTemplates xmlns="http://schemas.microsoft.com/sharepoint/v3/contenttype/forms">
-  <Display>DocumentLibraryForm</Display>
-  <Edit>DocumentLibraryForm</Edit>
-  <New>DocumentLibraryForm</New>
-</FormTemplates>
+<p:properties xmlns:p="http://schemas.microsoft.com/office/2006/metadata/properties" xmlns:xsi="http://www.w3.org/2001/XMLSchema-instance" xmlns:pc="http://schemas.microsoft.com/office/infopath/2007/PartnerControls">
+  <documentManagement>
+    <SharedWithUsers xmlns="28481bb3-5299-45df-98e4-9eda10c473f6">
+      <UserInfo>
+        <DisplayName>John Manferdelli</DisplayName>
+        <AccountId>16</AccountId>
+        <AccountType/>
+      </UserInfo>
+      <UserInfo>
+        <DisplayName>Aditya Gurajada</DisplayName>
+        <AccountId>48</AccountId>
+        <AccountType/>
+      </UserInfo>
+      <UserInfo>
+        <DisplayName>Chris Ramming</DisplayName>
+        <AccountId>23</AccountId>
+        <AccountType/>
+      </UserInfo>
+      <UserInfo>
+        <DisplayName>Sung Lee</DisplayName>
+        <AccountId>82</AccountId>
+        <AccountType/>
+      </UserInfo>
+      <UserInfo>
+        <DisplayName>Radoslav Gerganov</DisplayName>
+        <AccountId>17</AccountId>
+        <AccountType/>
+      </UserInfo>
+    </SharedWithUsers>
+  </documentManagement>
+</p:properties>
 </file>
 
 <file path=customXml/item2.xml><?xml version="1.0" encoding="utf-8"?>
@@ -27563,43 +28453,27 @@
 </file>
 
 <file path=customXml/item3.xml><?xml version="1.0" encoding="utf-8"?>
-<p:properties xmlns:p="http://schemas.microsoft.com/office/2006/metadata/properties" xmlns:xsi="http://www.w3.org/2001/XMLSchema-instance" xmlns:pc="http://schemas.microsoft.com/office/infopath/2007/PartnerControls">
-  <documentManagement>
-    <SharedWithUsers xmlns="28481bb3-5299-45df-98e4-9eda10c473f6">
-      <UserInfo>
-        <DisplayName>John Manferdelli</DisplayName>
-        <AccountId>16</AccountId>
-        <AccountType/>
-      </UserInfo>
-      <UserInfo>
-        <DisplayName>Aditya Gurajada</DisplayName>
-        <AccountId>48</AccountId>
-        <AccountType/>
-      </UserInfo>
-      <UserInfo>
-        <DisplayName>Chris Ramming</DisplayName>
-        <AccountId>23</AccountId>
-        <AccountType/>
-      </UserInfo>
-      <UserInfo>
-        <DisplayName>Sung Lee</DisplayName>
-        <AccountId>82</AccountId>
-        <AccountType/>
-      </UserInfo>
-      <UserInfo>
-        <DisplayName>Radoslav Gerganov</DisplayName>
-        <AccountId>17</AccountId>
-        <AccountType/>
-      </UserInfo>
-    </SharedWithUsers>
-  </documentManagement>
-</p:properties>
+<?mso-contentType ?>
+<FormTemplates xmlns="http://schemas.microsoft.com/sharepoint/v3/contenttype/forms">
+  <Display>DocumentLibraryForm</Display>
+  <Edit>DocumentLibraryForm</Edit>
+  <New>DocumentLibraryForm</New>
+</FormTemplates>
 </file>
 
 <file path=customXml/itemProps1.xml><?xml version="1.0" encoding="utf-8"?>
-<ds:datastoreItem xmlns:ds="http://schemas.openxmlformats.org/officeDocument/2006/customXml" ds:itemID="{4DBBC6C3-9264-4AC9-A6FD-7C51DE139748}">
+<ds:datastoreItem xmlns:ds="http://schemas.openxmlformats.org/officeDocument/2006/customXml" ds:itemID="{22DF4F91-F5B5-4094-B601-C57B168258E0}">
   <ds:schemaRefs>
-    <ds:schemaRef ds:uri="http://schemas.microsoft.com/sharepoint/v3/contenttype/forms"/>
+    <ds:schemaRef ds:uri="28481bb3-5299-45df-98e4-9eda10c473f6"/>
+    <ds:schemaRef ds:uri="http://schemas.openxmlformats.org/package/2006/metadata/core-properties"/>
+    <ds:schemaRef ds:uri="http://schemas.microsoft.com/office/2006/metadata/properties"/>
+    <ds:schemaRef ds:uri="http://schemas.microsoft.com/office/2006/documentManagement/types"/>
+    <ds:schemaRef ds:uri="http://purl.org/dc/terms/"/>
+    <ds:schemaRef ds:uri="http://purl.org/dc/dcmitype/"/>
+    <ds:schemaRef ds:uri="http://purl.org/dc/elements/1.1/"/>
+    <ds:schemaRef ds:uri="http://schemas.microsoft.com/office/infopath/2007/PartnerControls"/>
+    <ds:schemaRef ds:uri="d31f2ad2-e472-44ee-9b91-cb098f6c1beb"/>
+    <ds:schemaRef ds:uri="http://www.w3.org/XML/1998/namespace"/>
   </ds:schemaRefs>
 </ds:datastoreItem>
 </file>
@@ -27624,18 +28498,9 @@
 </file>
 
 <file path=customXml/itemProps3.xml><?xml version="1.0" encoding="utf-8"?>
-<ds:datastoreItem xmlns:ds="http://schemas.openxmlformats.org/officeDocument/2006/customXml" ds:itemID="{22DF4F91-F5B5-4094-B601-C57B168258E0}">
+<ds:datastoreItem xmlns:ds="http://schemas.openxmlformats.org/officeDocument/2006/customXml" ds:itemID="{4DBBC6C3-9264-4AC9-A6FD-7C51DE139748}">
   <ds:schemaRefs>
-    <ds:schemaRef ds:uri="28481bb3-5299-45df-98e4-9eda10c473f6"/>
-    <ds:schemaRef ds:uri="http://schemas.openxmlformats.org/package/2006/metadata/core-properties"/>
-    <ds:schemaRef ds:uri="http://schemas.microsoft.com/office/2006/metadata/properties"/>
-    <ds:schemaRef ds:uri="http://schemas.microsoft.com/office/2006/documentManagement/types"/>
-    <ds:schemaRef ds:uri="http://purl.org/dc/terms/"/>
-    <ds:schemaRef ds:uri="http://purl.org/dc/dcmitype/"/>
-    <ds:schemaRef ds:uri="http://purl.org/dc/elements/1.1/"/>
-    <ds:schemaRef ds:uri="http://schemas.microsoft.com/office/infopath/2007/PartnerControls"/>
-    <ds:schemaRef ds:uri="d31f2ad2-e472-44ee-9b91-cb098f6c1beb"/>
-    <ds:schemaRef ds:uri="http://www.w3.org/XML/1998/namespace"/>
+    <ds:schemaRef ds:uri="http://schemas.microsoft.com/sharepoint/v3/contenttype/forms"/>
   </ds:schemaRefs>
 </ds:datastoreItem>
 </file>
--- a/Doc/CCC-Proposal-status-2026.pptx
+++ b/Doc/CCC-Proposal-status-2026.pptx
@@ -9878,7 +9878,7 @@
             </a:r>
           </a:p>
           <a:p>
-            <a:pPr marL="615950" lvl="1" indent="-342900">
+            <a:pPr lvl="1">
               <a:spcBef>
                 <a:spcPts val="400"/>
               </a:spcBef>
@@ -9948,7 +9948,7 @@
             </a:r>
           </a:p>
           <a:p>
-            <a:pPr marL="615950" lvl="1" indent="-342900">
+            <a:pPr lvl="1">
               <a:spcBef>
                 <a:spcPts val="400"/>
               </a:spcBef>
@@ -9969,7 +9969,7 @@
             </a:r>
           </a:p>
           <a:p>
-            <a:pPr marL="615950" lvl="1" indent="-342900">
+            <a:pPr lvl="1">
               <a:spcBef>
                 <a:spcPts val="400"/>
               </a:spcBef>
@@ -9990,7 +9990,7 @@
             </a:r>
           </a:p>
           <a:p>
-            <a:pPr marL="615950" lvl="1" indent="-342900">
+            <a:pPr lvl="1">
               <a:spcBef>
                 <a:spcPts val="400"/>
               </a:spcBef>
@@ -18185,7 +18185,7 @@
               <a:defRPr/>
             </a:pPr>
             <a:r>
-              <a:rPr kumimoji="0" lang="en-US" b="1" i="0" u="none" strike="noStrike" kern="0" cap="none" spc="0" normalizeH="0" baseline="0" noProof="0">
+              <a:rPr kumimoji="0" lang="en-US" b="1" i="0" u="none" strike="noStrike" kern="0" cap="none" spc="0" normalizeH="0" baseline="0" noProof="0" dirty="0">
                 <a:ln>
                   <a:noFill/>
                 </a:ln>
@@ -18207,7 +18207,7 @@
               <a:defRPr/>
             </a:pPr>
             <a:r>
-              <a:rPr kumimoji="0" lang="en-US" sz="3100" b="0" i="0" u="none" strike="noStrike" kern="0" cap="none" spc="0" normalizeH="0" baseline="0" noProof="0">
+              <a:rPr kumimoji="0" lang="en-US" sz="3100" b="0" i="0" u="none" strike="noStrike" kern="0" cap="none" spc="0" normalizeH="0" baseline="0" noProof="0" dirty="0">
                 <a:ln>
                   <a:noFill/>
                 </a:ln>
@@ -18244,7 +18244,7 @@
               <a:tabLst/>
               <a:defRPr/>
             </a:pPr>
-            <a:endParaRPr kumimoji="0" lang="en-US" b="1" i="0" u="none" strike="noStrike" kern="0" cap="none" spc="0" normalizeH="0" baseline="0" noProof="0">
+            <a:endParaRPr kumimoji="0" lang="en-US" b="1" i="0" u="none" strike="noStrike" kern="0" cap="none" spc="0" normalizeH="0" baseline="0" noProof="0" dirty="0">
               <a:ln>
                 <a:noFill/>
               </a:ln>
@@ -18338,7 +18338,6 @@
                 <a:effectLst/>
                 <a:uLnTx/>
                 <a:uFillTx/>
-                <a:latin typeface="Arial"/>
                 <a:ea typeface="+mn-ea"/>
                 <a:cs typeface="+mn-cs"/>
                 <a:sym typeface="Arial"/>
@@ -18425,7 +18424,6 @@
                 <a:effectLst/>
                 <a:uLnTx/>
                 <a:uFillTx/>
-                <a:latin typeface="Arial"/>
                 <a:ea typeface="+mn-ea"/>
                 <a:cs typeface="+mn-cs"/>
                 <a:sym typeface="Arial"/>
@@ -18512,7 +18510,6 @@
                 <a:effectLst/>
                 <a:uLnTx/>
                 <a:uFillTx/>
-                <a:latin typeface="Arial"/>
                 <a:ea typeface="+mn-ea"/>
                 <a:cs typeface="+mn-cs"/>
                 <a:sym typeface="Arial"/>
@@ -18599,7 +18596,6 @@
                 <a:effectLst/>
                 <a:uLnTx/>
                 <a:uFillTx/>
-                <a:latin typeface="Arial"/>
                 <a:ea typeface="+mn-ea"/>
                 <a:cs typeface="+mn-cs"/>
                 <a:sym typeface="Arial"/>
@@ -18686,7 +18682,6 @@
                 <a:effectLst/>
                 <a:uLnTx/>
                 <a:uFillTx/>
-                <a:latin typeface="Arial"/>
                 <a:ea typeface="+mn-ea"/>
                 <a:cs typeface="+mn-cs"/>
                 <a:sym typeface="Arial"/>
@@ -18773,7 +18768,6 @@
                 <a:effectLst/>
                 <a:uLnTx/>
                 <a:uFillTx/>
-                <a:latin typeface="Arial"/>
                 <a:ea typeface="+mn-ea"/>
                 <a:cs typeface="+mn-cs"/>
                 <a:sym typeface="Arial"/>
@@ -18860,7 +18854,6 @@
                 <a:effectLst/>
                 <a:uLnTx/>
                 <a:uFillTx/>
-                <a:latin typeface="Arial"/>
                 <a:ea typeface="+mn-ea"/>
                 <a:cs typeface="+mn-cs"/>
                 <a:sym typeface="Arial"/>
@@ -18947,7 +18940,6 @@
                 <a:effectLst/>
                 <a:uLnTx/>
                 <a:uFillTx/>
-                <a:latin typeface="Arial"/>
                 <a:ea typeface="+mn-ea"/>
                 <a:cs typeface="+mn-cs"/>
                 <a:sym typeface="Arial"/>
@@ -19034,7 +19026,6 @@
                 <a:effectLst/>
                 <a:uLnTx/>
                 <a:uFillTx/>
-                <a:latin typeface="Arial"/>
                 <a:ea typeface="+mn-ea"/>
                 <a:cs typeface="+mn-cs"/>
                 <a:sym typeface="Arial"/>
@@ -19121,7 +19112,6 @@
                 <a:effectLst/>
                 <a:uLnTx/>
                 <a:uFillTx/>
-                <a:latin typeface="Arial"/>
                 <a:ea typeface="+mn-ea"/>
                 <a:cs typeface="+mn-cs"/>
                 <a:sym typeface="Arial"/>
@@ -19208,7 +19198,6 @@
                 <a:effectLst/>
                 <a:uLnTx/>
                 <a:uFillTx/>
-                <a:latin typeface="Arial"/>
                 <a:ea typeface="+mn-ea"/>
                 <a:cs typeface="+mn-cs"/>
                 <a:sym typeface="Arial"/>
@@ -19483,7 +19472,6 @@
                 <a:effectLst/>
                 <a:uLnTx/>
                 <a:uFillTx/>
-                <a:latin typeface="Arial"/>
                 <a:ea typeface="+mn-ea"/>
                 <a:cs typeface="+mn-cs"/>
                 <a:sym typeface="Arial"/>
@@ -19560,7 +19548,6 @@
               <a:effectLst/>
               <a:uLnTx/>
               <a:uFillTx/>
-              <a:latin typeface="Arial"/>
               <a:ea typeface="+mn-ea"/>
               <a:cs typeface="+mn-cs"/>
               <a:sym typeface="Arial"/>
@@ -19606,11 +19593,10 @@
               <a:buNone/>
             </a:pPr>
             <a:r>
-              <a:rPr lang="en-US" kern="0">
+              <a:rPr lang="en-US" kern="0" dirty="0">
                 <a:solidFill>
                   <a:srgbClr val="00B050"/>
                 </a:solidFill>
-                <a:latin typeface="Arial"/>
                 <a:cs typeface="Arial"/>
                 <a:sym typeface="Arial"/>
               </a:rPr>
@@ -19809,7 +19795,6 @@
                 <a:solidFill>
                   <a:srgbClr val="0070C0"/>
                 </a:solidFill>
-                <a:latin typeface="Arial"/>
                 <a:cs typeface="Arial"/>
                 <a:sym typeface="Arial"/>
               </a:rPr>
@@ -19885,7 +19870,6 @@
               <a:effectLst/>
               <a:uLnTx/>
               <a:uFillTx/>
-              <a:latin typeface="Arial"/>
               <a:ea typeface="+mn-ea"/>
               <a:cs typeface="+mn-cs"/>
               <a:sym typeface="Arial"/>
@@ -19960,7 +19944,6 @@
               <a:effectLst/>
               <a:uLnTx/>
               <a:uFillTx/>
-              <a:latin typeface="Arial"/>
               <a:ea typeface="+mn-ea"/>
               <a:cs typeface="+mn-cs"/>
               <a:sym typeface="Arial"/>
@@ -20010,7 +19993,6 @@
                 <a:solidFill>
                   <a:srgbClr val="000000"/>
                 </a:solidFill>
-                <a:latin typeface="Arial"/>
                 <a:cs typeface="Arial"/>
                 <a:sym typeface="Arial"/>
               </a:rPr>
@@ -20058,7 +20040,6 @@
                 <a:solidFill>
                   <a:srgbClr val="000000"/>
                 </a:solidFill>
-                <a:latin typeface="Arial"/>
                 <a:cs typeface="Arial"/>
                 <a:sym typeface="Arial"/>
               </a:rPr>
@@ -20078,7 +20059,6 @@
                 <a:solidFill>
                   <a:srgbClr val="000000"/>
                 </a:solidFill>
-                <a:latin typeface="Arial"/>
                 <a:cs typeface="Arial"/>
                 <a:sym typeface="Arial"/>
               </a:rPr>
@@ -20126,7 +20106,6 @@
                 <a:solidFill>
                   <a:srgbClr val="000000"/>
                 </a:solidFill>
-                <a:latin typeface="Arial"/>
                 <a:cs typeface="Arial"/>
                 <a:sym typeface="Arial"/>
               </a:rPr>
@@ -20174,7 +20153,6 @@
                 <a:solidFill>
                   <a:srgbClr val="000000"/>
                 </a:solidFill>
-                <a:latin typeface="Arial"/>
                 <a:cs typeface="Arial"/>
                 <a:sym typeface="Arial"/>
               </a:rPr>
@@ -20194,7 +20172,6 @@
                 <a:solidFill>
                   <a:srgbClr val="000000"/>
                 </a:solidFill>
-                <a:latin typeface="Arial"/>
                 <a:cs typeface="Arial"/>
                 <a:sym typeface="Arial"/>
               </a:rPr>
@@ -20214,7 +20191,6 @@
                 <a:solidFill>
                   <a:srgbClr val="000000"/>
                 </a:solidFill>
-                <a:latin typeface="Arial"/>
                 <a:cs typeface="Arial"/>
                 <a:sym typeface="Arial"/>
               </a:rPr>
@@ -20265,7 +20241,6 @@
                 <a:solidFill>
                   <a:srgbClr val="000000"/>
                 </a:solidFill>
-                <a:latin typeface="Arial"/>
                 <a:cs typeface="Arial"/>
                 <a:sym typeface="Arial"/>
               </a:rPr>
@@ -20313,7 +20288,6 @@
                 <a:solidFill>
                   <a:srgbClr val="000000"/>
                 </a:solidFill>
-                <a:latin typeface="Arial"/>
                 <a:cs typeface="Arial"/>
                 <a:sym typeface="Arial"/>
               </a:rPr>
@@ -20336,8 +20310,8 @@
         </p:nvSpPr>
         <p:spPr>
           <a:xfrm>
-            <a:off x="9270390" y="3409161"/>
-            <a:ext cx="2676100" cy="2323713"/>
+            <a:off x="8538072" y="3732542"/>
+            <a:ext cx="3146011" cy="1790234"/>
           </a:xfrm>
           <a:prstGeom prst="rect">
             <a:avLst/>
@@ -20351,7 +20325,7 @@
           <a:p>
             <a:pPr>
               <a:spcAft>
-                <a:spcPts val="600"/>
+                <a:spcPts val="200"/>
               </a:spcAft>
               <a:buClr>
                 <a:srgbClr val="000000"/>
@@ -20360,11 +20334,10 @@
               <a:buNone/>
             </a:pPr>
             <a:r>
-              <a:rPr lang="en-US" kern="0">
+              <a:rPr lang="en-US" kern="0" dirty="0">
                 <a:solidFill>
                   <a:srgbClr val="00B050"/>
                 </a:solidFill>
-                <a:latin typeface="Arial"/>
                 <a:cs typeface="Arial"/>
                 <a:sym typeface="Arial"/>
               </a:rPr>
@@ -20374,7 +20347,7 @@
           <a:p>
             <a:pPr marL="285750" lvl="1" indent="-285750">
               <a:spcAft>
-                <a:spcPts val="600"/>
+                <a:spcPts val="200"/>
               </a:spcAft>
               <a:buClr>
                 <a:srgbClr val="000000"/>
@@ -20383,11 +20356,10 @@
               <a:buChar char="•"/>
             </a:pPr>
             <a:r>
-              <a:rPr lang="en-US" kern="0">
+              <a:rPr lang="en-US" kern="0" dirty="0">
                 <a:solidFill>
                   <a:srgbClr val="00B050"/>
                 </a:solidFill>
-                <a:latin typeface="Arial"/>
                 <a:cs typeface="Arial"/>
                 <a:sym typeface="Arial"/>
               </a:rPr>
@@ -20397,7 +20369,7 @@
           <a:p>
             <a:pPr marL="285750" lvl="1" indent="-285750">
               <a:spcAft>
-                <a:spcPts val="600"/>
+                <a:spcPts val="200"/>
               </a:spcAft>
               <a:buClr>
                 <a:srgbClr val="000000"/>
@@ -20406,11 +20378,10 @@
               <a:buChar char="•"/>
             </a:pPr>
             <a:r>
-              <a:rPr lang="en-US" kern="0">
+              <a:rPr lang="en-US" kern="0" dirty="0">
                 <a:solidFill>
                   <a:srgbClr val="00B050"/>
                 </a:solidFill>
-                <a:latin typeface="Arial"/>
                 <a:cs typeface="Arial"/>
                 <a:sym typeface="Arial"/>
               </a:rPr>
@@ -20420,7 +20391,7 @@
           <a:p>
             <a:pPr marL="285750" lvl="1" indent="-285750">
               <a:spcAft>
-                <a:spcPts val="600"/>
+                <a:spcPts val="200"/>
               </a:spcAft>
               <a:buClr>
                 <a:srgbClr val="000000"/>
@@ -20429,11 +20400,10 @@
               <a:buChar char="•"/>
             </a:pPr>
             <a:r>
-              <a:rPr lang="en-US" kern="0">
+              <a:rPr lang="en-US" kern="0" dirty="0">
                 <a:solidFill>
                   <a:srgbClr val="00B050"/>
                 </a:solidFill>
-                <a:latin typeface="Arial"/>
                 <a:cs typeface="Arial"/>
                 <a:sym typeface="Arial"/>
               </a:rPr>
@@ -20443,7 +20413,7 @@
           <a:p>
             <a:pPr marL="285750" lvl="1" indent="-285750">
               <a:spcAft>
-                <a:spcPts val="600"/>
+                <a:spcPts val="200"/>
               </a:spcAft>
               <a:buClr>
                 <a:srgbClr val="000000"/>
@@ -20452,11 +20422,10 @@
               <a:buChar char="•"/>
             </a:pPr>
             <a:r>
-              <a:rPr lang="en-US" kern="0">
+              <a:rPr lang="en-US" kern="0" dirty="0">
                 <a:solidFill>
                   <a:srgbClr val="00B050"/>
                 </a:solidFill>
-                <a:latin typeface="Arial"/>
                 <a:cs typeface="Arial"/>
                 <a:sym typeface="Arial"/>
               </a:rPr>
@@ -20466,7 +20435,7 @@
           <a:p>
             <a:pPr marL="285750" lvl="1" indent="-285750">
               <a:spcAft>
-                <a:spcPts val="600"/>
+                <a:spcPts val="200"/>
               </a:spcAft>
               <a:buClr>
                 <a:srgbClr val="000000"/>
@@ -20475,11 +20444,10 @@
               <a:buChar char="•"/>
             </a:pPr>
             <a:r>
-              <a:rPr lang="en-US" kern="0">
+              <a:rPr lang="en-US" kern="0" dirty="0">
                 <a:solidFill>
                   <a:srgbClr val="00B050"/>
                 </a:solidFill>
-                <a:latin typeface="Arial"/>
                 <a:cs typeface="Arial"/>
                 <a:sym typeface="Arial"/>
               </a:rPr>
@@ -20503,7 +20471,7 @@
         <p:spPr>
           <a:xfrm>
             <a:off x="5508279" y="1499068"/>
-            <a:ext cx="5001369" cy="307777"/>
+            <a:ext cx="4510850" cy="307777"/>
           </a:xfrm>
           <a:prstGeom prst="rect">
             <a:avLst/>
@@ -20530,7 +20498,6 @@
                 <a:solidFill>
                   <a:srgbClr val="000000"/>
                 </a:solidFill>
-                <a:latin typeface="Arial"/>
                 <a:cs typeface="Arial"/>
                 <a:sym typeface="Arial"/>
               </a:rPr>
@@ -20606,7 +20573,6 @@
               <a:effectLst/>
               <a:uLnTx/>
               <a:uFillTx/>
-              <a:latin typeface="Arial"/>
               <a:ea typeface="+mn-ea"/>
               <a:cs typeface="+mn-cs"/>
               <a:sym typeface="Arial"/>
@@ -20681,7 +20647,6 @@
               <a:effectLst/>
               <a:uLnTx/>
               <a:uFillTx/>
-              <a:latin typeface="Arial"/>
               <a:ea typeface="+mn-ea"/>
               <a:cs typeface="+mn-cs"/>
               <a:sym typeface="Arial"/>
@@ -20756,7 +20721,6 @@
               <a:effectLst/>
               <a:uLnTx/>
               <a:uFillTx/>
-              <a:latin typeface="Arial"/>
               <a:ea typeface="+mn-ea"/>
               <a:cs typeface="+mn-cs"/>
               <a:sym typeface="Arial"/>
@@ -20831,7 +20795,6 @@
               <a:effectLst/>
               <a:uLnTx/>
               <a:uFillTx/>
-              <a:latin typeface="Arial"/>
               <a:ea typeface="+mn-ea"/>
               <a:cs typeface="+mn-cs"/>
               <a:sym typeface="Arial"/>
@@ -20906,7 +20869,6 @@
               <a:effectLst/>
               <a:uLnTx/>
               <a:uFillTx/>
-              <a:latin typeface="Arial"/>
               <a:ea typeface="+mn-ea"/>
               <a:cs typeface="+mn-cs"/>
               <a:sym typeface="Arial"/>
@@ -20929,7 +20891,7 @@
         <p:spPr>
           <a:xfrm>
             <a:off x="5323820" y="5403483"/>
-            <a:ext cx="681597" cy="523220"/>
+            <a:ext cx="622286" cy="523220"/>
           </a:xfrm>
           <a:prstGeom prst="rect">
             <a:avLst/>
@@ -20954,7 +20916,6 @@
                 <a:solidFill>
                   <a:srgbClr val="000000"/>
                 </a:solidFill>
-                <a:latin typeface="Arial"/>
                 <a:cs typeface="Arial"/>
                 <a:sym typeface="Arial"/>
               </a:rPr>
@@ -21422,7 +21383,7 @@
               <a:defRPr/>
             </a:pPr>
             <a:r>
-              <a:rPr kumimoji="0" lang="en-US" sz="3200" b="1" i="0" u="none" strike="noStrike" kern="0" cap="none" spc="0" normalizeH="0" baseline="0" noProof="0" dirty="0">
+              <a:rPr kumimoji="0" lang="en-US" sz="4000" b="1" i="0" u="none" strike="noStrike" kern="0" cap="none" spc="0" normalizeH="0" baseline="0" noProof="0" dirty="0">
                 <a:ln>
                   <a:noFill/>
                 </a:ln>
@@ -22602,7 +22563,6 @@
                   <a:lumOff val="40000"/>
                 </a:srgbClr>
               </a:buClr>
-              <a:buNone/>
             </a:pPr>
             <a:r>
               <a:rPr lang="en-US" sz="2400" dirty="0">
@@ -22612,7 +22572,7 @@
                 <a:ea typeface="Times New Roman" panose="02020603050405020304" pitchFamily="18" charset="0"/>
                 <a:sym typeface="Arial"/>
               </a:rPr>
-              <a:t>CCA, Raspberry pi, Android, Nitro(?), TDX(?), more “accelerators”</a:t>
+              <a:t>CCA, Raspberry pi, iOS, Android, Nitro(?), TDX, more “accelerators”</a:t>
             </a:r>
           </a:p>
           <a:p>
@@ -22629,7 +22589,6 @@
                   <a:lumOff val="40000"/>
                 </a:srgbClr>
               </a:buClr>
-              <a:buNone/>
             </a:pPr>
             <a:r>
               <a:rPr lang="en-US" sz="2400" dirty="0">
@@ -22656,7 +22615,6 @@
                   <a:lumOff val="40000"/>
                 </a:srgbClr>
               </a:buClr>
-              <a:buNone/>
             </a:pPr>
             <a:r>
               <a:rPr lang="en-US" sz="2400" dirty="0">
@@ -22734,7 +22692,6 @@
                   <a:lumOff val="40000"/>
                 </a:srgbClr>
               </a:buClr>
-              <a:buNone/>
             </a:pPr>
             <a:r>
               <a:rPr lang="en-US" sz="2400" dirty="0">
@@ -22761,7 +22718,6 @@
                   <a:lumOff val="40000"/>
                 </a:srgbClr>
               </a:buClr>
-              <a:buNone/>
             </a:pPr>
             <a:r>
               <a:rPr lang="en-US" sz="2400" dirty="0">
@@ -22788,7 +22744,6 @@
                   <a:lumOff val="40000"/>
                 </a:srgbClr>
               </a:buClr>
-              <a:buNone/>
             </a:pPr>
             <a:r>
               <a:rPr lang="en-US" sz="2400" dirty="0">
@@ -22815,7 +22770,6 @@
                   <a:lumOff val="40000"/>
                 </a:srgbClr>
               </a:buClr>
-              <a:buNone/>
             </a:pPr>
             <a:r>
               <a:rPr lang="en-US" sz="2400" dirty="0">
@@ -28196,40 +28150,6 @@
 </file>
 
 <file path=customXml/item1.xml><?xml version="1.0" encoding="utf-8"?>
-<p:properties xmlns:p="http://schemas.microsoft.com/office/2006/metadata/properties" xmlns:xsi="http://www.w3.org/2001/XMLSchema-instance" xmlns:pc="http://schemas.microsoft.com/office/infopath/2007/PartnerControls">
-  <documentManagement>
-    <SharedWithUsers xmlns="28481bb3-5299-45df-98e4-9eda10c473f6">
-      <UserInfo>
-        <DisplayName>John Manferdelli</DisplayName>
-        <AccountId>16</AccountId>
-        <AccountType/>
-      </UserInfo>
-      <UserInfo>
-        <DisplayName>Aditya Gurajada</DisplayName>
-        <AccountId>48</AccountId>
-        <AccountType/>
-      </UserInfo>
-      <UserInfo>
-        <DisplayName>Chris Ramming</DisplayName>
-        <AccountId>23</AccountId>
-        <AccountType/>
-      </UserInfo>
-      <UserInfo>
-        <DisplayName>Sung Lee</DisplayName>
-        <AccountId>82</AccountId>
-        <AccountType/>
-      </UserInfo>
-      <UserInfo>
-        <DisplayName>Radoslav Gerganov</DisplayName>
-        <AccountId>17</AccountId>
-        <AccountType/>
-      </UserInfo>
-    </SharedWithUsers>
-  </documentManagement>
-</p:properties>
-</file>
-
-<file path=customXml/item2.xml><?xml version="1.0" encoding="utf-8"?>
 <ct:contentTypeSchema xmlns:ct="http://schemas.microsoft.com/office/2006/metadata/contentType" xmlns:ma="http://schemas.microsoft.com/office/2006/metadata/properties/metaAttributes" ct:_="" ma:_="" ma:contentTypeName="Document" ma:contentTypeID="0x0101004315450B81DA7D4295FAB6E101FBB355" ma:contentTypeVersion="13" ma:contentTypeDescription="Create a new document." ma:contentTypeScope="" ma:versionID="a2b276c0d94ecedbbbd31beef7f92291">
   <xsd:schema xmlns:xsd="http://www.w3.org/2001/XMLSchema" xmlns:xs="http://www.w3.org/2001/XMLSchema" xmlns:p="http://schemas.microsoft.com/office/2006/metadata/properties" xmlns:ns2="d31f2ad2-e472-44ee-9b91-cb098f6c1beb" xmlns:ns3="28481bb3-5299-45df-98e4-9eda10c473f6" targetNamespace="http://schemas.microsoft.com/office/2006/metadata/properties" ma:root="true" ma:fieldsID="dcef641001f8833cd1b5d41fe44c7501" ns2:_="" ns3:_="">
     <xsd:import namespace="d31f2ad2-e472-44ee-9b91-cb098f6c1beb"/>
@@ -28452,6 +28372,40 @@
 </ct:contentTypeSchema>
 </file>
 
+<file path=customXml/item2.xml><?xml version="1.0" encoding="utf-8"?>
+<p:properties xmlns:p="http://schemas.microsoft.com/office/2006/metadata/properties" xmlns:xsi="http://www.w3.org/2001/XMLSchema-instance" xmlns:pc="http://schemas.microsoft.com/office/infopath/2007/PartnerControls">
+  <documentManagement>
+    <SharedWithUsers xmlns="28481bb3-5299-45df-98e4-9eda10c473f6">
+      <UserInfo>
+        <DisplayName>John Manferdelli</DisplayName>
+        <AccountId>16</AccountId>
+        <AccountType/>
+      </UserInfo>
+      <UserInfo>
+        <DisplayName>Aditya Gurajada</DisplayName>
+        <AccountId>48</AccountId>
+        <AccountType/>
+      </UserInfo>
+      <UserInfo>
+        <DisplayName>Chris Ramming</DisplayName>
+        <AccountId>23</AccountId>
+        <AccountType/>
+      </UserInfo>
+      <UserInfo>
+        <DisplayName>Sung Lee</DisplayName>
+        <AccountId>82</AccountId>
+        <AccountType/>
+      </UserInfo>
+      <UserInfo>
+        <DisplayName>Radoslav Gerganov</DisplayName>
+        <AccountId>17</AccountId>
+        <AccountType/>
+      </UserInfo>
+    </SharedWithUsers>
+  </documentManagement>
+</p:properties>
+</file>
+
 <file path=customXml/item3.xml><?xml version="1.0" encoding="utf-8"?>
 <?mso-contentType ?>
 <FormTemplates xmlns="http://schemas.microsoft.com/sharepoint/v3/contenttype/forms">
@@ -28462,23 +28416,6 @@
 </file>
 
 <file path=customXml/itemProps1.xml><?xml version="1.0" encoding="utf-8"?>
-<ds:datastoreItem xmlns:ds="http://schemas.openxmlformats.org/officeDocument/2006/customXml" ds:itemID="{22DF4F91-F5B5-4094-B601-C57B168258E0}">
-  <ds:schemaRefs>
-    <ds:schemaRef ds:uri="28481bb3-5299-45df-98e4-9eda10c473f6"/>
-    <ds:schemaRef ds:uri="http://schemas.openxmlformats.org/package/2006/metadata/core-properties"/>
-    <ds:schemaRef ds:uri="http://schemas.microsoft.com/office/2006/metadata/properties"/>
-    <ds:schemaRef ds:uri="http://schemas.microsoft.com/office/2006/documentManagement/types"/>
-    <ds:schemaRef ds:uri="http://purl.org/dc/terms/"/>
-    <ds:schemaRef ds:uri="http://purl.org/dc/dcmitype/"/>
-    <ds:schemaRef ds:uri="http://purl.org/dc/elements/1.1/"/>
-    <ds:schemaRef ds:uri="http://schemas.microsoft.com/office/infopath/2007/PartnerControls"/>
-    <ds:schemaRef ds:uri="d31f2ad2-e472-44ee-9b91-cb098f6c1beb"/>
-    <ds:schemaRef ds:uri="http://www.w3.org/XML/1998/namespace"/>
-  </ds:schemaRefs>
-</ds:datastoreItem>
-</file>
-
-<file path=customXml/itemProps2.xml><?xml version="1.0" encoding="utf-8"?>
 <ds:datastoreItem xmlns:ds="http://schemas.openxmlformats.org/officeDocument/2006/customXml" ds:itemID="{390C09D2-4AFD-4468-8460-F270BE2D63C0}">
   <ds:schemaRefs>
     <ds:schemaRef ds:uri="28481bb3-5299-45df-98e4-9eda10c473f6"/>
@@ -28497,6 +28434,23 @@
 </ds:datastoreItem>
 </file>
 
+<file path=customXml/itemProps2.xml><?xml version="1.0" encoding="utf-8"?>
+<ds:datastoreItem xmlns:ds="http://schemas.openxmlformats.org/officeDocument/2006/customXml" ds:itemID="{22DF4F91-F5B5-4094-B601-C57B168258E0}">
+  <ds:schemaRefs>
+    <ds:schemaRef ds:uri="28481bb3-5299-45df-98e4-9eda10c473f6"/>
+    <ds:schemaRef ds:uri="http://schemas.openxmlformats.org/package/2006/metadata/core-properties"/>
+    <ds:schemaRef ds:uri="http://schemas.microsoft.com/office/2006/metadata/properties"/>
+    <ds:schemaRef ds:uri="http://schemas.microsoft.com/office/2006/documentManagement/types"/>
+    <ds:schemaRef ds:uri="http://purl.org/dc/terms/"/>
+    <ds:schemaRef ds:uri="http://purl.org/dc/dcmitype/"/>
+    <ds:schemaRef ds:uri="http://purl.org/dc/elements/1.1/"/>
+    <ds:schemaRef ds:uri="http://schemas.microsoft.com/office/infopath/2007/PartnerControls"/>
+    <ds:schemaRef ds:uri="d31f2ad2-e472-44ee-9b91-cb098f6c1beb"/>
+    <ds:schemaRef ds:uri="http://www.w3.org/XML/1998/namespace"/>
+  </ds:schemaRefs>
+</ds:datastoreItem>
+</file>
+
 <file path=customXml/itemProps3.xml><?xml version="1.0" encoding="utf-8"?>
 <ds:datastoreItem xmlns:ds="http://schemas.openxmlformats.org/officeDocument/2006/customXml" ds:itemID="{4DBBC6C3-9264-4AC9-A6FD-7C51DE139748}">
   <ds:schemaRefs>
